--- a/fig/peer-with-private-data.pptx
+++ b/fig/peer-with-private-data.pptx
@@ -104,6 +104,11 @@
       </a:defRPr>
     </a:lvl9pPr>
   </p:defaultTextStyle>
+  <p:extLst>
+    <p:ext uri="{EFAFB233-063F-42B5-8137-9DF3F51BA10A}">
+      <p15:sldGuideLst xmlns:p15="http://schemas.microsoft.com/office/powerpoint/2012/main"/>
+    </p:ext>
+  </p:extLst>
 </p:presentation>
 </file>
 
@@ -256,7 +261,7 @@
           <a:p>
             <a:fld id="{5FE00808-534E-DF4B-BFA1-314377E96F76}" type="datetimeFigureOut">
               <a:rPr lang="en-US" smtClean="0"/>
-              <a:t>3/31/20</a:t>
+              <a:t>2/18/26</a:t>
             </a:fld>
             <a:endParaRPr lang="en-US"/>
           </a:p>
@@ -456,7 +461,7 @@
           <a:p>
             <a:fld id="{5FE00808-534E-DF4B-BFA1-314377E96F76}" type="datetimeFigureOut">
               <a:rPr lang="en-US" smtClean="0"/>
-              <a:t>3/31/20</a:t>
+              <a:t>2/18/26</a:t>
             </a:fld>
             <a:endParaRPr lang="en-US"/>
           </a:p>
@@ -666,7 +671,7 @@
           <a:p>
             <a:fld id="{5FE00808-534E-DF4B-BFA1-314377E96F76}" type="datetimeFigureOut">
               <a:rPr lang="en-US" smtClean="0"/>
-              <a:t>3/31/20</a:t>
+              <a:t>2/18/26</a:t>
             </a:fld>
             <a:endParaRPr lang="en-US"/>
           </a:p>
@@ -866,7 +871,7 @@
           <a:p>
             <a:fld id="{5FE00808-534E-DF4B-BFA1-314377E96F76}" type="datetimeFigureOut">
               <a:rPr lang="en-US" smtClean="0"/>
-              <a:t>3/31/20</a:t>
+              <a:t>2/18/26</a:t>
             </a:fld>
             <a:endParaRPr lang="en-US"/>
           </a:p>
@@ -1142,7 +1147,7 @@
           <a:p>
             <a:fld id="{5FE00808-534E-DF4B-BFA1-314377E96F76}" type="datetimeFigureOut">
               <a:rPr lang="en-US" smtClean="0"/>
-              <a:t>3/31/20</a:t>
+              <a:t>2/18/26</a:t>
             </a:fld>
             <a:endParaRPr lang="en-US"/>
           </a:p>
@@ -1410,7 +1415,7 @@
           <a:p>
             <a:fld id="{5FE00808-534E-DF4B-BFA1-314377E96F76}" type="datetimeFigureOut">
               <a:rPr lang="en-US" smtClean="0"/>
-              <a:t>3/31/20</a:t>
+              <a:t>2/18/26</a:t>
             </a:fld>
             <a:endParaRPr lang="en-US"/>
           </a:p>
@@ -1825,7 +1830,7 @@
           <a:p>
             <a:fld id="{5FE00808-534E-DF4B-BFA1-314377E96F76}" type="datetimeFigureOut">
               <a:rPr lang="en-US" smtClean="0"/>
-              <a:t>3/31/20</a:t>
+              <a:t>2/18/26</a:t>
             </a:fld>
             <a:endParaRPr lang="en-US"/>
           </a:p>
@@ -1967,7 +1972,7 @@
           <a:p>
             <a:fld id="{5FE00808-534E-DF4B-BFA1-314377E96F76}" type="datetimeFigureOut">
               <a:rPr lang="en-US" smtClean="0"/>
-              <a:t>3/31/20</a:t>
+              <a:t>2/18/26</a:t>
             </a:fld>
             <a:endParaRPr lang="en-US"/>
           </a:p>
@@ -2080,7 +2085,7 @@
           <a:p>
             <a:fld id="{5FE00808-534E-DF4B-BFA1-314377E96F76}" type="datetimeFigureOut">
               <a:rPr lang="en-US" smtClean="0"/>
-              <a:t>3/31/20</a:t>
+              <a:t>2/18/26</a:t>
             </a:fld>
             <a:endParaRPr lang="en-US"/>
           </a:p>
@@ -2393,7 +2398,7 @@
           <a:p>
             <a:fld id="{5FE00808-534E-DF4B-BFA1-314377E96F76}" type="datetimeFigureOut">
               <a:rPr lang="en-US" smtClean="0"/>
-              <a:t>3/31/20</a:t>
+              <a:t>2/18/26</a:t>
             </a:fld>
             <a:endParaRPr lang="en-US"/>
           </a:p>
@@ -2682,7 +2687,7 @@
           <a:p>
             <a:fld id="{5FE00808-534E-DF4B-BFA1-314377E96F76}" type="datetimeFigureOut">
               <a:rPr lang="en-US" smtClean="0"/>
-              <a:t>3/31/20</a:t>
+              <a:t>2/18/26</a:t>
             </a:fld>
             <a:endParaRPr lang="en-US"/>
           </a:p>
@@ -2925,7 +2930,7 @@
           <a:p>
             <a:fld id="{5FE00808-534E-DF4B-BFA1-314377E96F76}" type="datetimeFigureOut">
               <a:rPr lang="en-US" smtClean="0"/>
-              <a:t>3/31/20</a:t>
+              <a:t>2/18/26</a:t>
             </a:fld>
             <a:endParaRPr lang="en-US"/>
           </a:p>
@@ -3344,10 +3349,10 @@
       </p:grpSpPr>
       <p:sp>
         <p:nvSpPr>
-          <p:cNvPr id="6" name="Rectangle 5">
-            <a:extLst>
-              <a:ext uri="{FF2B5EF4-FFF2-40B4-BE49-F238E27FC236}">
-                <a16:creationId xmlns:a16="http://schemas.microsoft.com/office/drawing/2014/main" id="{4557F12E-9BF2-2D4D-A8E2-CE4FB016F25C}"/>
+          <p:cNvPr id="34" name="Rounded Rectangle 33">
+            <a:extLst>
+              <a:ext uri="{FF2B5EF4-FFF2-40B4-BE49-F238E27FC236}">
+                <a16:creationId xmlns:a16="http://schemas.microsoft.com/office/drawing/2014/main" id="{5EFC56B4-F99B-57AB-02CD-003FD1588361}"/>
               </a:ext>
             </a:extLst>
           </p:cNvPr>
@@ -3356,8 +3361,62 @@
         </p:nvSpPr>
         <p:spPr>
           <a:xfrm>
+            <a:off x="8025267" y="1871753"/>
+            <a:ext cx="1227472" cy="877543"/>
+          </a:xfrm>
+          <a:prstGeom prst="roundRect">
+            <a:avLst/>
+          </a:prstGeom>
+          <a:solidFill>
+            <a:schemeClr val="bg1"/>
+          </a:solidFill>
+          <a:ln>
+            <a:solidFill>
+              <a:schemeClr val="tx1"/>
+            </a:solidFill>
+          </a:ln>
+        </p:spPr>
+        <p:style>
+          <a:lnRef idx="2">
+            <a:schemeClr val="accent1">
+              <a:shade val="15000"/>
+            </a:schemeClr>
+          </a:lnRef>
+          <a:fillRef idx="1">
+            <a:schemeClr val="accent1"/>
+          </a:fillRef>
+          <a:effectRef idx="0">
+            <a:schemeClr val="accent1"/>
+          </a:effectRef>
+          <a:fontRef idx="minor">
+            <a:schemeClr val="lt1"/>
+          </a:fontRef>
+        </p:style>
+        <p:txBody>
+          <a:bodyPr rtlCol="0" anchor="ctr"/>
+          <a:lstStyle/>
+          <a:p>
+            <a:pPr algn="ctr"/>
+            <a:endParaRPr lang="en-US"/>
+          </a:p>
+        </p:txBody>
+      </p:sp>
+      <p:sp>
+        <p:nvSpPr>
+          <p:cNvPr id="6" name="Rectangle 5">
+            <a:extLst>
+              <a:ext uri="{FF2B5EF4-FFF2-40B4-BE49-F238E27FC236}">
+                <a16:creationId xmlns:a16="http://schemas.microsoft.com/office/drawing/2014/main" id="{4557F12E-9BF2-2D4D-A8E2-CE4FB016F25C}"/>
+              </a:ext>
+            </a:extLst>
+          </p:cNvPr>
+          <p:cNvSpPr/>
+          <p:nvPr/>
+        </p:nvSpPr>
+        <p:spPr>
+          <a:xfrm>
             <a:off x="2203978" y="1114504"/>
-            <a:ext cx="5864984" cy="4074517"/>
+            <a:ext cx="7290954" cy="4074517"/>
           </a:xfrm>
           <a:prstGeom prst="rect">
             <a:avLst/>
@@ -3436,22 +3495,18 @@
         </p:nvSpPr>
         <p:spPr>
           <a:xfrm>
-            <a:off x="2283432" y="1201589"/>
-            <a:ext cx="3757056" cy="635425"/>
+            <a:off x="4391510" y="1159253"/>
+            <a:ext cx="1582688" cy="307843"/>
           </a:xfrm>
           <a:prstGeom prst="roundRect">
             <a:avLst/>
           </a:prstGeom>
           <a:solidFill>
-            <a:schemeClr val="accent6">
-              <a:lumMod val="75000"/>
-            </a:schemeClr>
+            <a:schemeClr val="bg1"/>
           </a:solidFill>
           <a:ln>
             <a:solidFill>
-              <a:schemeClr val="accent6">
-                <a:lumMod val="75000"/>
-              </a:schemeClr>
+              <a:schemeClr val="tx1"/>
             </a:solidFill>
           </a:ln>
         </p:spPr>
@@ -3478,6 +3533,9 @@
             <a:pPr algn="ctr"/>
             <a:r>
               <a:rPr lang="en-US" sz="2000" b="1" dirty="0">
+                <a:solidFill>
+                  <a:schemeClr val="tx1"/>
+                </a:solidFill>
                 <a:latin typeface="Centaur" panose="02030504050205020304" pitchFamily="18" charset="77"/>
               </a:rPr>
               <a:t>Endorser</a:t>
@@ -3506,10 +3564,7 @@
             <a:avLst/>
           </a:prstGeom>
           <a:solidFill>
-            <a:schemeClr val="accent4">
-              <a:lumMod val="60000"/>
-              <a:lumOff val="40000"/>
-            </a:schemeClr>
+            <a:schemeClr val="bg1"/>
           </a:solidFill>
           <a:ln>
             <a:solidFill>
@@ -3564,24 +3619,18 @@
         </p:nvSpPr>
         <p:spPr>
           <a:xfrm>
-            <a:off x="2383640" y="2216682"/>
-            <a:ext cx="975393" cy="902119"/>
+            <a:off x="2294840" y="2216682"/>
+            <a:ext cx="1064194" cy="902119"/>
           </a:xfrm>
           <a:prstGeom prst="roundRect">
             <a:avLst/>
           </a:prstGeom>
           <a:solidFill>
-            <a:schemeClr val="accent1">
-              <a:lumMod val="60000"/>
-              <a:lumOff val="40000"/>
-            </a:schemeClr>
+            <a:schemeClr val="bg1"/>
           </a:solidFill>
           <a:ln>
             <a:solidFill>
-              <a:schemeClr val="accent1">
-                <a:lumMod val="60000"/>
-                <a:lumOff val="40000"/>
-              </a:schemeClr>
+              <a:schemeClr val="tx1"/>
             </a:solidFill>
           </a:ln>
         </p:spPr>
@@ -3608,6 +3657,9 @@
             <a:pPr algn="ctr"/>
             <a:r>
               <a:rPr lang="en-US" sz="2000" b="1" dirty="0">
+                <a:solidFill>
+                  <a:schemeClr val="tx1"/>
+                </a:solidFill>
                 <a:latin typeface="Centaur" panose="02030504050205020304" pitchFamily="18" charset="77"/>
               </a:rPr>
               <a:t>Gossip</a:t>
@@ -3636,7 +3688,7 @@
             <a:avLst/>
           </a:prstGeom>
           <a:solidFill>
-            <a:srgbClr val="7030A0"/>
+            <a:schemeClr val="bg1"/>
           </a:solidFill>
           <a:ln>
             <a:solidFill>
@@ -3667,6 +3719,9 @@
             <a:pPr algn="ctr"/>
             <a:r>
               <a:rPr lang="en-US" sz="2000" b="1" dirty="0">
+                <a:solidFill>
+                  <a:schemeClr val="tx1"/>
+                </a:solidFill>
                 <a:latin typeface="Centaur" panose="02030504050205020304" pitchFamily="18" charset="77"/>
               </a:rPr>
               <a:t>Ordering</a:t>
@@ -3676,6 +3731,9 @@
             <a:pPr algn="ctr"/>
             <a:r>
               <a:rPr lang="en-US" sz="2000" b="1" dirty="0">
+                <a:solidFill>
+                  <a:schemeClr val="tx1"/>
+                </a:solidFill>
                 <a:latin typeface="Centaur" panose="02030504050205020304" pitchFamily="18" charset="77"/>
               </a:rPr>
               <a:t>Service</a:t>
@@ -3727,7 +3785,7 @@
         </p:nvSpPr>
         <p:spPr>
           <a:xfrm>
-            <a:off x="151237" y="2662236"/>
+            <a:off x="151237" y="2674593"/>
             <a:ext cx="1371600" cy="443213"/>
           </a:xfrm>
           <a:prstGeom prst="rect">
@@ -3736,7 +3794,11 @@
           <a:solidFill>
             <a:schemeClr val="bg1"/>
           </a:solidFill>
-          <a:ln w="44450"/>
+          <a:ln w="22225">
+            <a:solidFill>
+              <a:schemeClr val="tx1"/>
+            </a:solidFill>
+          </a:ln>
         </p:spPr>
         <p:style>
           <a:lnRef idx="2">
@@ -3786,13 +3848,13 @@
           <p:nvPr>
             <p:extLst>
               <p:ext uri="{D42A27DB-BD31-4B8C-83A1-F6EECF244321}">
-                <p14:modId xmlns:p14="http://schemas.microsoft.com/office/powerpoint/2010/main" val="966376555"/>
+                <p14:modId xmlns:p14="http://schemas.microsoft.com/office/powerpoint/2010/main" val="660144047"/>
               </p:ext>
             </p:extLst>
           </p:nvPr>
         </p:nvGraphicFramePr>
         <p:xfrm>
-          <a:off x="3519609" y="2654856"/>
+          <a:off x="3519609" y="2725196"/>
           <a:ext cx="833120" cy="370840"/>
         </p:xfrm>
         <a:graphic>
@@ -4056,7 +4118,7 @@
         </p:nvSpPr>
         <p:spPr>
           <a:xfrm>
-            <a:off x="3319107" y="2284103"/>
+            <a:off x="3319107" y="2354443"/>
             <a:ext cx="1376724" cy="400110"/>
           </a:xfrm>
           <a:prstGeom prst="rect">
@@ -4100,11 +4162,11 @@
             <a:avLst/>
           </a:prstGeom>
           <a:solidFill>
-            <a:srgbClr val="C00000"/>
+            <a:schemeClr val="bg1"/>
           </a:solidFill>
           <a:ln>
             <a:solidFill>
-              <a:schemeClr val="bg1"/>
+              <a:schemeClr val="tx1"/>
             </a:solidFill>
           </a:ln>
         </p:spPr>
@@ -4130,9 +4192,9 @@
           <a:p>
             <a:pPr algn="ctr"/>
             <a:r>
-              <a:rPr lang="en-US" sz="2000" b="1" dirty="0">
+              <a:rPr lang="en-US" sz="1900" b="1" dirty="0">
                 <a:solidFill>
-                  <a:schemeClr val="bg1"/>
+                  <a:schemeClr val="tx1"/>
                 </a:solidFill>
                 <a:latin typeface="Centaur" panose="02030504050205020304" pitchFamily="18" charset="77"/>
               </a:rPr>
@@ -4162,11 +4224,11 @@
             <a:avLst/>
           </a:prstGeom>
           <a:solidFill>
-            <a:srgbClr val="942093"/>
+            <a:schemeClr val="bg1"/>
           </a:solidFill>
           <a:ln>
             <a:solidFill>
-              <a:schemeClr val="bg1"/>
+              <a:schemeClr val="tx1"/>
             </a:solidFill>
           </a:ln>
         </p:spPr>
@@ -4192,9 +4254,9 @@
           <a:p>
             <a:pPr algn="ctr"/>
             <a:r>
-              <a:rPr lang="en-US" sz="2000" b="1" dirty="0">
+              <a:rPr lang="en-US" sz="1900" b="1" dirty="0">
                 <a:solidFill>
-                  <a:schemeClr val="bg1"/>
+                  <a:schemeClr val="tx1"/>
                 </a:solidFill>
                 <a:latin typeface="Centaur" panose="02030504050205020304" pitchFamily="18" charset="77"/>
               </a:rPr>
@@ -4233,12 +4295,42 @@
           </a:prstGeom>
         </p:spPr>
       </p:pic>
-      <p:sp>
-        <p:nvSpPr>
-          <p:cNvPr id="22" name="Can 21">
-            <a:extLst>
-              <a:ext uri="{FF2B5EF4-FFF2-40B4-BE49-F238E27FC236}">
-                <a16:creationId xmlns:a16="http://schemas.microsoft.com/office/drawing/2014/main" id="{56D96EE4-D670-5545-B205-DCF09EA8C551}"/>
+      <p:pic>
+        <p:nvPicPr>
+          <p:cNvPr id="35" name="Picture 34">
+            <a:extLst>
+              <a:ext uri="{FF2B5EF4-FFF2-40B4-BE49-F238E27FC236}">
+                <a16:creationId xmlns:a16="http://schemas.microsoft.com/office/drawing/2014/main" id="{AA1AD6FE-3FDD-CB48-9220-9872325C8318}"/>
+              </a:ext>
+            </a:extLst>
+          </p:cNvPr>
+          <p:cNvPicPr>
+            <a:picLocks noChangeAspect="1"/>
+          </p:cNvPicPr>
+          <p:nvPr/>
+        </p:nvPicPr>
+        <p:blipFill>
+          <a:blip r:embed="rId2"/>
+          <a:stretch>
+            <a:fillRect/>
+          </a:stretch>
+        </p:blipFill>
+        <p:spPr>
+          <a:xfrm>
+            <a:off x="654115" y="1650950"/>
+            <a:ext cx="636789" cy="226060"/>
+          </a:xfrm>
+          <a:prstGeom prst="rect">
+            <a:avLst/>
+          </a:prstGeom>
+        </p:spPr>
+      </p:pic>
+      <p:sp>
+        <p:nvSpPr>
+          <p:cNvPr id="53" name="Rounded Rectangle 52">
+            <a:extLst>
+              <a:ext uri="{FF2B5EF4-FFF2-40B4-BE49-F238E27FC236}">
+                <a16:creationId xmlns:a16="http://schemas.microsoft.com/office/drawing/2014/main" id="{D6277FEF-0F6C-7749-AD34-B201F814D62D}"/>
               </a:ext>
             </a:extLst>
           </p:cNvPr>
@@ -4247,15 +4339,20 @@
         </p:nvSpPr>
         <p:spPr>
           <a:xfrm>
-            <a:off x="4964388" y="1876909"/>
-            <a:ext cx="1822392" cy="576118"/>
-          </a:xfrm>
-          <a:prstGeom prst="can">
+            <a:off x="2383640" y="4854763"/>
+            <a:ext cx="5985673" cy="275489"/>
+          </a:xfrm>
+          <a:prstGeom prst="roundRect">
             <a:avLst/>
           </a:prstGeom>
           <a:solidFill>
-            <a:srgbClr val="00FDFF"/>
+            <a:schemeClr val="bg1"/>
           </a:solidFill>
+          <a:ln>
+            <a:solidFill>
+              <a:schemeClr val="tx1"/>
+            </a:solidFill>
+          </a:ln>
         </p:spPr>
         <p:style>
           <a:lnRef idx="2">
@@ -4285,17 +4382,17 @@
                 </a:solidFill>
                 <a:latin typeface="Centaur" panose="02030504050205020304" pitchFamily="18" charset="77"/>
               </a:rPr>
-              <a:t>Public State DB</a:t>
-            </a:r>
-          </a:p>
-        </p:txBody>
-      </p:sp>
-      <p:sp>
-        <p:nvSpPr>
-          <p:cNvPr id="23" name="Vertical Scroll 22">
-            <a:extLst>
-              <a:ext uri="{FF2B5EF4-FFF2-40B4-BE49-F238E27FC236}">
-                <a16:creationId xmlns:a16="http://schemas.microsoft.com/office/drawing/2014/main" id="{C702515E-1897-774C-A497-C10EEBFDAE34}"/>
+              <a:t>Committer</a:t>
+            </a:r>
+          </a:p>
+        </p:txBody>
+      </p:sp>
+      <p:sp>
+        <p:nvSpPr>
+          <p:cNvPr id="70" name="Rounded Rectangle 69">
+            <a:extLst>
+              <a:ext uri="{FF2B5EF4-FFF2-40B4-BE49-F238E27FC236}">
+                <a16:creationId xmlns:a16="http://schemas.microsoft.com/office/drawing/2014/main" id="{DCF44230-29D4-1F4A-8656-97425F490970}"/>
               </a:ext>
             </a:extLst>
           </p:cNvPr>
@@ -4304,12 +4401,20 @@
         </p:nvSpPr>
         <p:spPr>
           <a:xfrm>
-            <a:off x="5048104" y="3096703"/>
-            <a:ext cx="1740512" cy="620575"/>
-          </a:xfrm>
-          <a:prstGeom prst="verticalScroll">
+            <a:off x="2319798" y="1556185"/>
+            <a:ext cx="2375688" cy="385654"/>
+          </a:xfrm>
+          <a:prstGeom prst="roundRect">
             <a:avLst/>
           </a:prstGeom>
+          <a:solidFill>
+            <a:srgbClr val="097C7A"/>
+          </a:solidFill>
+          <a:ln>
+            <a:solidFill>
+              <a:schemeClr val="tx1"/>
+            </a:solidFill>
+          </a:ln>
         </p:spPr>
         <p:style>
           <a:lnRef idx="2">
@@ -4334,19 +4439,22 @@
             <a:pPr algn="ctr"/>
             <a:r>
               <a:rPr lang="en-US" sz="2000" b="1" dirty="0">
+                <a:solidFill>
+                  <a:schemeClr val="bg1"/>
+                </a:solidFill>
                 <a:latin typeface="Centaur" panose="02030504050205020304" pitchFamily="18" charset="77"/>
               </a:rPr>
-              <a:t>Public Block Store</a:t>
-            </a:r>
-          </a:p>
-        </p:txBody>
-      </p:sp>
-      <p:sp>
-        <p:nvSpPr>
-          <p:cNvPr id="24" name="Can 23">
-            <a:extLst>
-              <a:ext uri="{FF2B5EF4-FFF2-40B4-BE49-F238E27FC236}">
-                <a16:creationId xmlns:a16="http://schemas.microsoft.com/office/drawing/2014/main" id="{C56E26D5-A98E-0442-A299-7F0468DA9D9C}"/>
+              <a:t>Pvtdata Dissemination</a:t>
+            </a:r>
+          </a:p>
+        </p:txBody>
+      </p:sp>
+      <p:sp>
+        <p:nvSpPr>
+          <p:cNvPr id="12" name="Rounded Rectangle 11">
+            <a:extLst>
+              <a:ext uri="{FF2B5EF4-FFF2-40B4-BE49-F238E27FC236}">
+                <a16:creationId xmlns:a16="http://schemas.microsoft.com/office/drawing/2014/main" id="{87FACF59-1ACC-14E1-07F3-F57182987DE2}"/>
               </a:ext>
             </a:extLst>
           </p:cNvPr>
@@ -4355,15 +4463,20 @@
         </p:nvSpPr>
         <p:spPr>
           <a:xfrm>
-            <a:off x="5275450" y="4475302"/>
-            <a:ext cx="1285820" cy="576118"/>
-          </a:xfrm>
-          <a:prstGeom prst="can">
+            <a:off x="2305727" y="1986411"/>
+            <a:ext cx="2843046" cy="385654"/>
+          </a:xfrm>
+          <a:prstGeom prst="roundRect">
             <a:avLst/>
           </a:prstGeom>
           <a:solidFill>
-            <a:srgbClr val="00FDFF"/>
+            <a:srgbClr val="097C7A"/>
           </a:solidFill>
+          <a:ln>
+            <a:solidFill>
+              <a:schemeClr val="tx1"/>
+            </a:solidFill>
+          </a:ln>
         </p:spPr>
         <p:style>
           <a:lnRef idx="2">
@@ -4389,21 +4502,21 @@
             <a:r>
               <a:rPr lang="en-US" sz="2000" b="1" dirty="0">
                 <a:solidFill>
-                  <a:schemeClr val="tx1"/>
+                  <a:schemeClr val="bg1"/>
                 </a:solidFill>
                 <a:latin typeface="Centaur" panose="02030504050205020304" pitchFamily="18" charset="77"/>
               </a:rPr>
-              <a:t>Public History DB</a:t>
+              <a:t>Missing Pvtdata Reconciler</a:t>
             </a:r>
           </a:p>
         </p:txBody>
       </p:sp>
       <p:pic>
         <p:nvPicPr>
-          <p:cNvPr id="35" name="Picture 34">
-            <a:extLst>
-              <a:ext uri="{FF2B5EF4-FFF2-40B4-BE49-F238E27FC236}">
-                <a16:creationId xmlns:a16="http://schemas.microsoft.com/office/drawing/2014/main" id="{AA1AD6FE-3FDD-CB48-9220-9872325C8318}"/>
+          <p:cNvPr id="28" name="Picture 27" descr="A diagram of a block store&#10;&#10;AI-generated content may be incorrect.">
+            <a:extLst>
+              <a:ext uri="{FF2B5EF4-FFF2-40B4-BE49-F238E27FC236}">
+                <a16:creationId xmlns:a16="http://schemas.microsoft.com/office/drawing/2014/main" id="{3BFAF686-3CFD-BDFB-09F1-88B837AA5796}"/>
               </a:ext>
             </a:extLst>
           </p:cNvPr>
@@ -4413,15 +4526,16 @@
           <p:nvPr/>
         </p:nvPicPr>
         <p:blipFill>
-          <a:blip r:embed="rId2"/>
+          <a:blip r:embed="rId3"/>
+          <a:srcRect t="27312" r="67536" b="53481"/>
           <a:stretch>
             <a:fillRect/>
           </a:stretch>
         </p:blipFill>
         <p:spPr>
           <a:xfrm>
-            <a:off x="654115" y="1650950"/>
-            <a:ext cx="636789" cy="226060"/>
+            <a:off x="4652687" y="3398418"/>
+            <a:ext cx="1420823" cy="812480"/>
           </a:xfrm>
           <a:prstGeom prst="rect">
             <a:avLst/>
@@ -4430,99 +4544,37 @@
       </p:pic>
       <p:sp>
         <p:nvSpPr>
-          <p:cNvPr id="43" name="TextBox 42">
-            <a:extLst>
-              <a:ext uri="{FF2B5EF4-FFF2-40B4-BE49-F238E27FC236}">
-                <a16:creationId xmlns:a16="http://schemas.microsoft.com/office/drawing/2014/main" id="{D81CEEAE-986C-8148-B17F-6528F4E8E40D}"/>
-              </a:ext>
-            </a:extLst>
-          </p:cNvPr>
-          <p:cNvSpPr txBox="1"/>
+          <p:cNvPr id="29" name="Rectangle 28">
+            <a:extLst>
+              <a:ext uri="{FF2B5EF4-FFF2-40B4-BE49-F238E27FC236}">
+                <a16:creationId xmlns:a16="http://schemas.microsoft.com/office/drawing/2014/main" id="{2991880D-4505-A5BC-076F-24E350042803}"/>
+              </a:ext>
+            </a:extLst>
+          </p:cNvPr>
+          <p:cNvSpPr/>
           <p:nvPr/>
         </p:nvSpPr>
         <p:spPr>
           <a:xfrm>
-            <a:off x="169417" y="3449186"/>
-            <a:ext cx="1823448" cy="1107996"/>
+            <a:off x="6032163" y="1151119"/>
+            <a:ext cx="703124" cy="321090"/>
           </a:xfrm>
           <a:prstGeom prst="rect">
             <a:avLst/>
           </a:prstGeom>
-          <a:noFill/>
-        </p:spPr>
-        <p:txBody>
-          <a:bodyPr wrap="none" rtlCol="0">
-            <a:spAutoFit/>
-          </a:bodyPr>
-          <a:lstStyle/>
-          <a:p>
-            <a:pPr algn="ctr"/>
-            <a:r>
-              <a:rPr lang="en-US" sz="2200" dirty="0">
-                <a:latin typeface="Centaur" panose="02030504050205020304" pitchFamily="18" charset="77"/>
-              </a:rPr>
-              <a:t>Components </a:t>
-            </a:r>
-          </a:p>
-          <a:p>
-            <a:pPr algn="ctr"/>
-            <a:r>
-              <a:rPr lang="en-US" sz="2200" dirty="0">
-                <a:latin typeface="Centaur" panose="02030504050205020304" pitchFamily="18" charset="77"/>
-              </a:rPr>
-              <a:t>involved in the </a:t>
-            </a:r>
-          </a:p>
-          <a:p>
-            <a:pPr algn="ctr"/>
-            <a:r>
-              <a:rPr lang="en-US" sz="2200" i="1" dirty="0">
-                <a:latin typeface="Centaur" panose="02030504050205020304" pitchFamily="18" charset="77"/>
-              </a:rPr>
-              <a:t>validation</a:t>
-            </a:r>
-            <a:r>
-              <a:rPr lang="en-US" sz="2200" dirty="0">
-                <a:latin typeface="Centaur" panose="02030504050205020304" pitchFamily="18" charset="77"/>
-              </a:rPr>
-              <a:t> phase</a:t>
-            </a:r>
-          </a:p>
-        </p:txBody>
-      </p:sp>
-      <p:sp>
-        <p:nvSpPr>
-          <p:cNvPr id="53" name="Rounded Rectangle 52">
-            <a:extLst>
-              <a:ext uri="{FF2B5EF4-FFF2-40B4-BE49-F238E27FC236}">
-                <a16:creationId xmlns:a16="http://schemas.microsoft.com/office/drawing/2014/main" id="{D6277FEF-0F6C-7749-AD34-B201F814D62D}"/>
-              </a:ext>
-            </a:extLst>
-          </p:cNvPr>
-          <p:cNvSpPr/>
-          <p:nvPr/>
-        </p:nvSpPr>
-        <p:spPr>
-          <a:xfrm>
-            <a:off x="2383640" y="4798491"/>
-            <a:ext cx="2182459" cy="271655"/>
-          </a:xfrm>
-          <a:prstGeom prst="roundRect">
-            <a:avLst/>
-          </a:prstGeom>
           <a:solidFill>
-            <a:srgbClr val="D5FC79"/>
+            <a:schemeClr val="bg1"/>
           </a:solidFill>
           <a:ln>
             <a:solidFill>
-              <a:srgbClr val="D5FC79"/>
+              <a:schemeClr val="bg1"/>
             </a:solidFill>
           </a:ln>
         </p:spPr>
         <p:style>
           <a:lnRef idx="2">
             <a:schemeClr val="accent1">
-              <a:shade val="50000"/>
+              <a:shade val="15000"/>
             </a:schemeClr>
           </a:lnRef>
           <a:fillRef idx="1">
@@ -4540,24 +4592,117 @@
           <a:lstStyle/>
           <a:p>
             <a:pPr algn="ctr"/>
-            <a:r>
-              <a:rPr lang="en-US" sz="2000" b="1" dirty="0">
-                <a:solidFill>
-                  <a:schemeClr val="tx1"/>
-                </a:solidFill>
-                <a:latin typeface="Centaur" panose="02030504050205020304" pitchFamily="18" charset="77"/>
-              </a:rPr>
-              <a:t>Committer</a:t>
-            </a:r>
-          </a:p>
-        </p:txBody>
-      </p:sp>
-      <p:sp>
-        <p:nvSpPr>
-          <p:cNvPr id="56" name="Rectangle 55">
-            <a:extLst>
-              <a:ext uri="{FF2B5EF4-FFF2-40B4-BE49-F238E27FC236}">
-                <a16:creationId xmlns:a16="http://schemas.microsoft.com/office/drawing/2014/main" id="{3A7D1482-B157-4C44-9FCE-6F4FDDB2E34E}"/>
+            <a:endParaRPr lang="en-US"/>
+          </a:p>
+        </p:txBody>
+      </p:sp>
+      <p:cxnSp>
+        <p:nvCxnSpPr>
+          <p:cNvPr id="31" name="Curved Connector 30">
+            <a:extLst>
+              <a:ext uri="{FF2B5EF4-FFF2-40B4-BE49-F238E27FC236}">
+                <a16:creationId xmlns:a16="http://schemas.microsoft.com/office/drawing/2014/main" id="{5A0707CD-5DD9-11D8-4183-99B4754FF949}"/>
+              </a:ext>
+            </a:extLst>
+          </p:cNvPr>
+          <p:cNvCxnSpPr>
+            <a:cxnSpLocks/>
+            <a:stCxn id="8" idx="3"/>
+            <a:endCxn id="28" idx="0"/>
+          </p:cNvCxnSpPr>
+          <p:nvPr/>
+        </p:nvCxnSpPr>
+        <p:spPr>
+          <a:xfrm flipH="1">
+            <a:off x="5363099" y="1313175"/>
+            <a:ext cx="611099" cy="2085243"/>
+          </a:xfrm>
+          <a:prstGeom prst="curvedConnector4">
+            <a:avLst>
+              <a:gd name="adj1" fmla="val -37408"/>
+              <a:gd name="adj2" fmla="val 53691"/>
+            </a:avLst>
+          </a:prstGeom>
+          <a:ln w="19050" cap="flat" cmpd="sng" algn="ctr">
+            <a:solidFill>
+              <a:schemeClr val="dk1"/>
+            </a:solidFill>
+            <a:prstDash val="solid"/>
+            <a:round/>
+            <a:headEnd type="none" w="med" len="med"/>
+            <a:tailEnd type="arrow" w="med" len="med"/>
+          </a:ln>
+        </p:spPr>
+        <p:style>
+          <a:lnRef idx="0">
+            <a:scrgbClr r="0" g="0" b="0"/>
+          </a:lnRef>
+          <a:fillRef idx="0">
+            <a:scrgbClr r="0" g="0" b="0"/>
+          </a:fillRef>
+          <a:effectRef idx="0">
+            <a:scrgbClr r="0" g="0" b="0"/>
+          </a:effectRef>
+          <a:fontRef idx="minor">
+            <a:schemeClr val="tx1"/>
+          </a:fontRef>
+        </p:style>
+      </p:cxnSp>
+      <p:cxnSp>
+        <p:nvCxnSpPr>
+          <p:cNvPr id="37" name="Curved Connector 36">
+            <a:extLst>
+              <a:ext uri="{FF2B5EF4-FFF2-40B4-BE49-F238E27FC236}">
+                <a16:creationId xmlns:a16="http://schemas.microsoft.com/office/drawing/2014/main" id="{6E0228AA-EB44-CA77-9C18-787854056642}"/>
+              </a:ext>
+            </a:extLst>
+          </p:cNvPr>
+          <p:cNvCxnSpPr>
+            <a:cxnSpLocks/>
+            <a:stCxn id="70" idx="3"/>
+            <a:endCxn id="28" idx="0"/>
+          </p:cNvCxnSpPr>
+          <p:nvPr/>
+        </p:nvCxnSpPr>
+        <p:spPr>
+          <a:xfrm>
+            <a:off x="4695486" y="1749012"/>
+            <a:ext cx="667613" cy="1649406"/>
+          </a:xfrm>
+          <a:prstGeom prst="curvedConnector2">
+            <a:avLst/>
+          </a:prstGeom>
+          <a:ln w="19050" cap="flat" cmpd="sng" algn="ctr">
+            <a:solidFill>
+              <a:schemeClr val="dk1"/>
+            </a:solidFill>
+            <a:prstDash val="solid"/>
+            <a:round/>
+            <a:headEnd type="arrow" w="med" len="med"/>
+            <a:tailEnd type="arrow" w="med" len="med"/>
+          </a:ln>
+        </p:spPr>
+        <p:style>
+          <a:lnRef idx="0">
+            <a:scrgbClr r="0" g="0" b="0"/>
+          </a:lnRef>
+          <a:fillRef idx="0">
+            <a:scrgbClr r="0" g="0" b="0"/>
+          </a:fillRef>
+          <a:effectRef idx="0">
+            <a:scrgbClr r="0" g="0" b="0"/>
+          </a:effectRef>
+          <a:fontRef idx="minor">
+            <a:schemeClr val="tx1"/>
+          </a:fontRef>
+        </p:style>
+      </p:cxnSp>
+      <p:sp>
+        <p:nvSpPr>
+          <p:cNvPr id="39" name="Vertical Scroll 38">
+            <a:extLst>
+              <a:ext uri="{FF2B5EF4-FFF2-40B4-BE49-F238E27FC236}">
+                <a16:creationId xmlns:a16="http://schemas.microsoft.com/office/drawing/2014/main" id="{CF9EA220-8834-58F6-E2E8-3B1166E95483}"/>
               </a:ext>
             </a:extLst>
           </p:cNvPr>
@@ -4566,10 +4711,10 @@
         </p:nvSpPr>
         <p:spPr>
           <a:xfrm>
-            <a:off x="2932014" y="3189908"/>
-            <a:ext cx="94593" cy="155777"/>
-          </a:xfrm>
-          <a:prstGeom prst="rect">
+            <a:off x="6455262" y="2069682"/>
+            <a:ext cx="1089102" cy="604911"/>
+          </a:xfrm>
+          <a:prstGeom prst="verticalScroll">
             <a:avLst/>
           </a:prstGeom>
           <a:solidFill>
@@ -4579,7 +4724,7 @@
         <p:style>
           <a:lnRef idx="2">
             <a:schemeClr val="accent1">
-              <a:shade val="50000"/>
+              <a:shade val="15000"/>
             </a:schemeClr>
           </a:lnRef>
           <a:fillRef idx="1">
@@ -4597,16 +4742,89 @@
           <a:lstStyle/>
           <a:p>
             <a:pPr algn="ctr"/>
-            <a:endParaRPr lang="en-US"/>
-          </a:p>
-        </p:txBody>
-      </p:sp>
-      <p:sp>
-        <p:nvSpPr>
-          <p:cNvPr id="57" name="Rectangle 56">
-            <a:extLst>
-              <a:ext uri="{FF2B5EF4-FFF2-40B4-BE49-F238E27FC236}">
-                <a16:creationId xmlns:a16="http://schemas.microsoft.com/office/drawing/2014/main" id="{CF1D1E8D-283E-D640-B2B4-BE4D658DEE72}"/>
+            <a:r>
+              <a:rPr lang="en-US" sz="2000" dirty="0">
+                <a:solidFill>
+                  <a:schemeClr val="tx1"/>
+                </a:solidFill>
+                <a:latin typeface="Centaur" panose="02030504050205020304" pitchFamily="18" charset="77"/>
+              </a:rPr>
+              <a:t>Block</a:t>
+            </a:r>
+            <a:br>
+              <a:rPr lang="en-US" sz="2000" dirty="0">
+                <a:solidFill>
+                  <a:schemeClr val="tx1"/>
+                </a:solidFill>
+                <a:latin typeface="Centaur" panose="02030504050205020304" pitchFamily="18" charset="77"/>
+              </a:rPr>
+            </a:br>
+            <a:r>
+              <a:rPr lang="en-US" sz="2000" dirty="0">
+                <a:solidFill>
+                  <a:schemeClr val="tx1"/>
+                </a:solidFill>
+                <a:latin typeface="Centaur" panose="02030504050205020304" pitchFamily="18" charset="77"/>
+              </a:rPr>
+              <a:t>Store</a:t>
+            </a:r>
+          </a:p>
+        </p:txBody>
+      </p:sp>
+      <p:cxnSp>
+        <p:nvCxnSpPr>
+          <p:cNvPr id="55" name="Curved Connector 54">
+            <a:extLst>
+              <a:ext uri="{FF2B5EF4-FFF2-40B4-BE49-F238E27FC236}">
+                <a16:creationId xmlns:a16="http://schemas.microsoft.com/office/drawing/2014/main" id="{7806DC78-7A2C-01EA-98E0-73E8841FB6B1}"/>
+              </a:ext>
+            </a:extLst>
+          </p:cNvPr>
+          <p:cNvCxnSpPr>
+            <a:cxnSpLocks/>
+            <a:stCxn id="12" idx="3"/>
+          </p:cNvCxnSpPr>
+          <p:nvPr/>
+        </p:nvCxnSpPr>
+        <p:spPr>
+          <a:xfrm>
+            <a:off x="5148773" y="2179238"/>
+            <a:ext cx="1234952" cy="939563"/>
+          </a:xfrm>
+          <a:prstGeom prst="curvedConnector3">
+            <a:avLst/>
+          </a:prstGeom>
+          <a:ln w="19050" cap="flat" cmpd="sng" algn="ctr">
+            <a:solidFill>
+              <a:schemeClr val="dk1"/>
+            </a:solidFill>
+            <a:prstDash val="solid"/>
+            <a:round/>
+            <a:headEnd type="arrow" w="med" len="med"/>
+            <a:tailEnd type="arrow" w="med" len="med"/>
+          </a:ln>
+        </p:spPr>
+        <p:style>
+          <a:lnRef idx="0">
+            <a:scrgbClr r="0" g="0" b="0"/>
+          </a:lnRef>
+          <a:fillRef idx="0">
+            <a:scrgbClr r="0" g="0" b="0"/>
+          </a:fillRef>
+          <a:effectRef idx="0">
+            <a:scrgbClr r="0" g="0" b="0"/>
+          </a:effectRef>
+          <a:fontRef idx="minor">
+            <a:schemeClr val="tx1"/>
+          </a:fontRef>
+        </p:style>
+      </p:cxnSp>
+      <p:sp>
+        <p:nvSpPr>
+          <p:cNvPr id="63" name="Can 62">
+            <a:extLst>
+              <a:ext uri="{FF2B5EF4-FFF2-40B4-BE49-F238E27FC236}">
+                <a16:creationId xmlns:a16="http://schemas.microsoft.com/office/drawing/2014/main" id="{8E6DDCE6-4B5B-7D71-C2AB-B7B17FACA40B}"/>
               </a:ext>
             </a:extLst>
           </p:cNvPr>
@@ -4615,20 +4833,25 @@
         </p:nvSpPr>
         <p:spPr>
           <a:xfrm>
-            <a:off x="3131708" y="3189912"/>
-            <a:ext cx="94593" cy="155777"/>
-          </a:xfrm>
-          <a:prstGeom prst="rect">
+            <a:off x="7938005" y="3175346"/>
+            <a:ext cx="1427018" cy="540327"/>
+          </a:xfrm>
+          <a:prstGeom prst="can">
             <a:avLst/>
           </a:prstGeom>
           <a:solidFill>
             <a:schemeClr val="bg1"/>
           </a:solidFill>
+          <a:ln>
+            <a:solidFill>
+              <a:schemeClr val="tx1"/>
+            </a:solidFill>
+          </a:ln>
         </p:spPr>
         <p:style>
           <a:lnRef idx="2">
             <a:schemeClr val="accent1">
-              <a:shade val="50000"/>
+              <a:shade val="15000"/>
             </a:schemeClr>
           </a:lnRef>
           <a:fillRef idx="1">
@@ -4646,16 +4869,278 @@
           <a:lstStyle/>
           <a:p>
             <a:pPr algn="ctr"/>
-            <a:endParaRPr lang="en-US"/>
-          </a:p>
-        </p:txBody>
-      </p:sp>
-      <p:sp>
-        <p:nvSpPr>
-          <p:cNvPr id="58" name="Rectangle 57">
-            <a:extLst>
-              <a:ext uri="{FF2B5EF4-FFF2-40B4-BE49-F238E27FC236}">
-                <a16:creationId xmlns:a16="http://schemas.microsoft.com/office/drawing/2014/main" id="{8D9B1193-856C-4740-A04B-9756CCFFC2B1}"/>
+            <a:r>
+              <a:rPr lang="en-US" sz="2000" b="1" dirty="0">
+                <a:solidFill>
+                  <a:schemeClr val="tx1"/>
+                </a:solidFill>
+                <a:latin typeface="Centaur" panose="02030504050205020304" pitchFamily="18" charset="77"/>
+              </a:rPr>
+              <a:t>History DB</a:t>
+            </a:r>
+          </a:p>
+        </p:txBody>
+      </p:sp>
+      <p:grpSp>
+        <p:nvGrpSpPr>
+          <p:cNvPr id="56" name="Group 55">
+            <a:extLst>
+              <a:ext uri="{FF2B5EF4-FFF2-40B4-BE49-F238E27FC236}">
+                <a16:creationId xmlns:a16="http://schemas.microsoft.com/office/drawing/2014/main" id="{F55D549B-7B43-96BD-7F8E-DC798F92D723}"/>
+              </a:ext>
+            </a:extLst>
+          </p:cNvPr>
+          <p:cNvGrpSpPr/>
+          <p:nvPr/>
+        </p:nvGrpSpPr>
+        <p:grpSpPr>
+          <a:xfrm>
+            <a:off x="6379114" y="2854826"/>
+            <a:ext cx="1249999" cy="1873868"/>
+            <a:chOff x="9773521" y="3301452"/>
+            <a:chExt cx="1249999" cy="1828800"/>
+          </a:xfrm>
+        </p:grpSpPr>
+        <p:sp>
+          <p:nvSpPr>
+            <p:cNvPr id="2" name="Can 1">
+              <a:extLst>
+                <a:ext uri="{FF2B5EF4-FFF2-40B4-BE49-F238E27FC236}">
+                  <a16:creationId xmlns:a16="http://schemas.microsoft.com/office/drawing/2014/main" id="{C74FF398-C669-17C7-3039-55CFBD4A5869}"/>
+                </a:ext>
+              </a:extLst>
+            </p:cNvPr>
+            <p:cNvSpPr/>
+            <p:nvPr/>
+          </p:nvSpPr>
+          <p:spPr>
+            <a:xfrm>
+              <a:off x="9773521" y="3301452"/>
+              <a:ext cx="1249999" cy="1828800"/>
+            </a:xfrm>
+            <a:prstGeom prst="can">
+              <a:avLst/>
+            </a:prstGeom>
+            <a:solidFill>
+              <a:srgbClr val="097C7A"/>
+            </a:solidFill>
+          </p:spPr>
+          <p:style>
+            <a:lnRef idx="2">
+              <a:schemeClr val="accent1">
+                <a:shade val="15000"/>
+              </a:schemeClr>
+            </a:lnRef>
+            <a:fillRef idx="1">
+              <a:schemeClr val="accent1"/>
+            </a:fillRef>
+            <a:effectRef idx="0">
+              <a:schemeClr val="accent1"/>
+            </a:effectRef>
+            <a:fontRef idx="minor">
+              <a:schemeClr val="lt1"/>
+            </a:fontRef>
+          </p:style>
+          <p:txBody>
+            <a:bodyPr rtlCol="0" anchor="ctr"/>
+            <a:lstStyle/>
+            <a:p>
+              <a:pPr algn="ctr"/>
+              <a:r>
+                <a:rPr lang="en-US" dirty="0">
+                  <a:solidFill>
+                    <a:schemeClr val="bg1"/>
+                  </a:solidFill>
+                  <a:latin typeface="Centaur" panose="02030504050205020304" pitchFamily="18" charset="77"/>
+                </a:rPr>
+                <a:t>Private</a:t>
+              </a:r>
+              <a:br>
+                <a:rPr lang="en-US" dirty="0">
+                  <a:solidFill>
+                    <a:schemeClr val="bg1"/>
+                  </a:solidFill>
+                  <a:latin typeface="Centaur" panose="02030504050205020304" pitchFamily="18" charset="77"/>
+                </a:rPr>
+              </a:br>
+              <a:r>
+                <a:rPr lang="en-US" dirty="0">
+                  <a:solidFill>
+                    <a:schemeClr val="bg1"/>
+                  </a:solidFill>
+                  <a:latin typeface="Centaur" panose="02030504050205020304" pitchFamily="18" charset="77"/>
+                </a:rPr>
+                <a:t>Data Store</a:t>
+              </a:r>
+            </a:p>
+            <a:p>
+              <a:pPr algn="ctr"/>
+              <a:endParaRPr lang="en-US" dirty="0">
+                <a:latin typeface="Centaur" panose="02030504050205020304" pitchFamily="18" charset="77"/>
+              </a:endParaRPr>
+            </a:p>
+            <a:p>
+              <a:pPr algn="ctr"/>
+              <a:endParaRPr lang="en-US" dirty="0">
+                <a:latin typeface="Centaur" panose="02030504050205020304" pitchFamily="18" charset="77"/>
+              </a:endParaRPr>
+            </a:p>
+            <a:p>
+              <a:pPr algn="ctr"/>
+              <a:endParaRPr lang="en-US" dirty="0">
+                <a:latin typeface="Centaur" panose="02030504050205020304" pitchFamily="18" charset="77"/>
+              </a:endParaRPr>
+            </a:p>
+            <a:p>
+              <a:pPr algn="ctr"/>
+              <a:endParaRPr lang="en-US" dirty="0">
+                <a:latin typeface="Centaur" panose="02030504050205020304" pitchFamily="18" charset="77"/>
+              </a:endParaRPr>
+            </a:p>
+            <a:p>
+              <a:pPr algn="ctr"/>
+              <a:endParaRPr lang="en-US" dirty="0">
+                <a:latin typeface="Centaur" panose="02030504050205020304" pitchFamily="18" charset="77"/>
+              </a:endParaRPr>
+            </a:p>
+          </p:txBody>
+        </p:sp>
+        <p:sp>
+          <p:nvSpPr>
+            <p:cNvPr id="9" name="Rectangle 8">
+              <a:extLst>
+                <a:ext uri="{FF2B5EF4-FFF2-40B4-BE49-F238E27FC236}">
+                  <a16:creationId xmlns:a16="http://schemas.microsoft.com/office/drawing/2014/main" id="{A1CC55B9-DDB4-B7C3-6C42-B5F46E485830}"/>
+                </a:ext>
+              </a:extLst>
+            </p:cNvPr>
+            <p:cNvSpPr/>
+            <p:nvPr/>
+          </p:nvSpPr>
+          <p:spPr>
+            <a:xfrm>
+              <a:off x="9854897" y="4385953"/>
+              <a:ext cx="1090352" cy="626713"/>
+            </a:xfrm>
+            <a:prstGeom prst="rect">
+              <a:avLst/>
+            </a:prstGeom>
+            <a:solidFill>
+              <a:srgbClr val="097C7A"/>
+            </a:solidFill>
+            <a:ln>
+              <a:solidFill>
+                <a:schemeClr val="bg1"/>
+              </a:solidFill>
+            </a:ln>
+          </p:spPr>
+          <p:style>
+            <a:lnRef idx="2">
+              <a:schemeClr val="accent1">
+                <a:shade val="15000"/>
+              </a:schemeClr>
+            </a:lnRef>
+            <a:fillRef idx="1">
+              <a:schemeClr val="accent1"/>
+            </a:fillRef>
+            <a:effectRef idx="0">
+              <a:schemeClr val="accent1"/>
+            </a:effectRef>
+            <a:fontRef idx="minor">
+              <a:schemeClr val="lt1"/>
+            </a:fontRef>
+          </p:style>
+          <p:txBody>
+            <a:bodyPr rtlCol="0" anchor="ctr"/>
+            <a:lstStyle/>
+            <a:p>
+              <a:pPr algn="ctr"/>
+              <a:r>
+                <a:rPr lang="en-US" sz="1400" dirty="0">
+                  <a:latin typeface="Centaur" panose="02030504050205020304" pitchFamily="18" charset="77"/>
+                </a:rPr>
+                <a:t>Missing</a:t>
+              </a:r>
+              <a:br>
+                <a:rPr lang="en-US" sz="1400" dirty="0">
+                  <a:latin typeface="Centaur" panose="02030504050205020304" pitchFamily="18" charset="77"/>
+                </a:rPr>
+              </a:br>
+              <a:r>
+                <a:rPr lang="en-US" sz="1400" dirty="0">
+                  <a:latin typeface="Centaur" panose="02030504050205020304" pitchFamily="18" charset="77"/>
+                </a:rPr>
+                <a:t>eligible &amp; ineligible data</a:t>
+              </a:r>
+            </a:p>
+          </p:txBody>
+        </p:sp>
+        <p:sp>
+          <p:nvSpPr>
+            <p:cNvPr id="11" name="Rectangle 10">
+              <a:extLst>
+                <a:ext uri="{FF2B5EF4-FFF2-40B4-BE49-F238E27FC236}">
+                  <a16:creationId xmlns:a16="http://schemas.microsoft.com/office/drawing/2014/main" id="{DB32E57D-B806-D641-4E00-D831CFE463AF}"/>
+                </a:ext>
+              </a:extLst>
+            </p:cNvPr>
+            <p:cNvSpPr/>
+            <p:nvPr/>
+          </p:nvSpPr>
+          <p:spPr>
+            <a:xfrm>
+              <a:off x="9854897" y="3884702"/>
+              <a:ext cx="1090352" cy="437018"/>
+            </a:xfrm>
+            <a:prstGeom prst="rect">
+              <a:avLst/>
+            </a:prstGeom>
+            <a:solidFill>
+              <a:srgbClr val="097C7A"/>
+            </a:solidFill>
+            <a:ln>
+              <a:solidFill>
+                <a:schemeClr val="bg1"/>
+              </a:solidFill>
+            </a:ln>
+          </p:spPr>
+          <p:style>
+            <a:lnRef idx="2">
+              <a:schemeClr val="accent1">
+                <a:shade val="15000"/>
+              </a:schemeClr>
+            </a:lnRef>
+            <a:fillRef idx="1">
+              <a:schemeClr val="accent1"/>
+            </a:fillRef>
+            <a:effectRef idx="0">
+              <a:schemeClr val="accent1"/>
+            </a:effectRef>
+            <a:fontRef idx="minor">
+              <a:schemeClr val="lt1"/>
+            </a:fontRef>
+          </p:style>
+          <p:txBody>
+            <a:bodyPr rtlCol="0" anchor="ctr"/>
+            <a:lstStyle/>
+            <a:p>
+              <a:pPr algn="ctr"/>
+              <a:r>
+                <a:rPr lang="en-US" sz="1400" dirty="0">
+                  <a:latin typeface="Centaur" panose="02030504050205020304" pitchFamily="18" charset="77"/>
+                </a:rPr>
+                <a:t>Private data history</a:t>
+              </a:r>
+            </a:p>
+          </p:txBody>
+        </p:sp>
+      </p:grpSp>
+      <p:sp>
+        <p:nvSpPr>
+          <p:cNvPr id="33" name="Can 32">
+            <a:extLst>
+              <a:ext uri="{FF2B5EF4-FFF2-40B4-BE49-F238E27FC236}">
+                <a16:creationId xmlns:a16="http://schemas.microsoft.com/office/drawing/2014/main" id="{E4417A37-E2C3-24F3-00D3-D3F8EF3F3E7E}"/>
               </a:ext>
             </a:extLst>
           </p:cNvPr>
@@ -4664,10 +5149,10 @@
         </p:nvSpPr>
         <p:spPr>
           <a:xfrm>
-            <a:off x="3336658" y="3195167"/>
-            <a:ext cx="94593" cy="155777"/>
-          </a:xfrm>
-          <a:prstGeom prst="rect">
+            <a:off x="7974884" y="1313175"/>
+            <a:ext cx="1353574" cy="1680159"/>
+          </a:xfrm>
+          <a:prstGeom prst="can">
             <a:avLst/>
           </a:prstGeom>
           <a:solidFill>
@@ -4677,7 +5162,7 @@
         <p:style>
           <a:lnRef idx="2">
             <a:schemeClr val="accent1">
-              <a:shade val="50000"/>
+              <a:shade val="15000"/>
             </a:schemeClr>
           </a:lnRef>
           <a:fillRef idx="1">
@@ -4695,16 +5180,374 @@
           <a:lstStyle/>
           <a:p>
             <a:pPr algn="ctr"/>
-            <a:endParaRPr lang="en-US"/>
-          </a:p>
-        </p:txBody>
-      </p:sp>
-      <p:sp>
-        <p:nvSpPr>
-          <p:cNvPr id="59" name="Rectangle 58">
-            <a:extLst>
-              <a:ext uri="{FF2B5EF4-FFF2-40B4-BE49-F238E27FC236}">
-                <a16:creationId xmlns:a16="http://schemas.microsoft.com/office/drawing/2014/main" id="{400B9C88-9293-D941-ADF9-9A2210DF6B61}"/>
+            <a:endParaRPr lang="en-US" dirty="0">
+              <a:solidFill>
+                <a:schemeClr val="bg1"/>
+              </a:solidFill>
+              <a:latin typeface="Centaur" panose="02030504050205020304" pitchFamily="18" charset="77"/>
+            </a:endParaRPr>
+          </a:p>
+          <a:p>
+            <a:pPr algn="ctr"/>
+            <a:endParaRPr lang="en-US" dirty="0">
+              <a:solidFill>
+                <a:schemeClr val="tx1"/>
+              </a:solidFill>
+              <a:latin typeface="Centaur" panose="02030504050205020304" pitchFamily="18" charset="77"/>
+            </a:endParaRPr>
+          </a:p>
+          <a:p>
+            <a:pPr algn="ctr"/>
+            <a:endParaRPr lang="en-US" dirty="0">
+              <a:solidFill>
+                <a:schemeClr val="tx1"/>
+              </a:solidFill>
+              <a:latin typeface="Centaur" panose="02030504050205020304" pitchFamily="18" charset="77"/>
+            </a:endParaRPr>
+          </a:p>
+          <a:p>
+            <a:pPr algn="ctr"/>
+            <a:endParaRPr lang="en-US" dirty="0">
+              <a:latin typeface="Centaur" panose="02030504050205020304" pitchFamily="18" charset="77"/>
+            </a:endParaRPr>
+          </a:p>
+          <a:p>
+            <a:pPr algn="ctr"/>
+            <a:endParaRPr lang="en-US" dirty="0">
+              <a:latin typeface="Centaur" panose="02030504050205020304" pitchFamily="18" charset="77"/>
+            </a:endParaRPr>
+          </a:p>
+          <a:p>
+            <a:pPr algn="ctr"/>
+            <a:endParaRPr lang="en-US" dirty="0">
+              <a:latin typeface="Centaur" panose="02030504050205020304" pitchFamily="18" charset="77"/>
+            </a:endParaRPr>
+          </a:p>
+          <a:p>
+            <a:pPr algn="ctr"/>
+            <a:endParaRPr lang="en-US" dirty="0">
+              <a:latin typeface="Centaur" panose="02030504050205020304" pitchFamily="18" charset="77"/>
+            </a:endParaRPr>
+          </a:p>
+          <a:p>
+            <a:pPr algn="ctr"/>
+            <a:endParaRPr lang="en-US" dirty="0">
+              <a:latin typeface="Centaur" panose="02030504050205020304" pitchFamily="18" charset="77"/>
+            </a:endParaRPr>
+          </a:p>
+        </p:txBody>
+      </p:sp>
+      <p:grpSp>
+        <p:nvGrpSpPr>
+          <p:cNvPr id="42" name="Group 41">
+            <a:extLst>
+              <a:ext uri="{FF2B5EF4-FFF2-40B4-BE49-F238E27FC236}">
+                <a16:creationId xmlns:a16="http://schemas.microsoft.com/office/drawing/2014/main" id="{C5AAE8B2-47E8-9637-0222-064B06561DB4}"/>
+              </a:ext>
+            </a:extLst>
+          </p:cNvPr>
+          <p:cNvGrpSpPr/>
+          <p:nvPr/>
+        </p:nvGrpSpPr>
+        <p:grpSpPr>
+          <a:xfrm>
+            <a:off x="8028627" y="2017205"/>
+            <a:ext cx="1250504" cy="885387"/>
+            <a:chOff x="10206681" y="1941839"/>
+            <a:chExt cx="1250504" cy="885387"/>
+          </a:xfrm>
+        </p:grpSpPr>
+        <p:sp>
+          <p:nvSpPr>
+            <p:cNvPr id="36" name="Rounded Rectangle 35">
+              <a:extLst>
+                <a:ext uri="{FF2B5EF4-FFF2-40B4-BE49-F238E27FC236}">
+                  <a16:creationId xmlns:a16="http://schemas.microsoft.com/office/drawing/2014/main" id="{F2F93884-B990-C568-5452-0135EF3EBDF0}"/>
+                </a:ext>
+              </a:extLst>
+            </p:cNvPr>
+            <p:cNvSpPr/>
+            <p:nvPr/>
+          </p:nvSpPr>
+          <p:spPr>
+            <a:xfrm>
+              <a:off x="10206681" y="1941839"/>
+              <a:ext cx="1250504" cy="885387"/>
+            </a:xfrm>
+            <a:prstGeom prst="roundRect">
+              <a:avLst/>
+            </a:prstGeom>
+            <a:solidFill>
+              <a:schemeClr val="bg1"/>
+            </a:solidFill>
+          </p:spPr>
+          <p:style>
+            <a:lnRef idx="2">
+              <a:schemeClr val="accent1">
+                <a:shade val="15000"/>
+              </a:schemeClr>
+            </a:lnRef>
+            <a:fillRef idx="1">
+              <a:schemeClr val="accent1"/>
+            </a:fillRef>
+            <a:effectRef idx="0">
+              <a:schemeClr val="accent1"/>
+            </a:effectRef>
+            <a:fontRef idx="minor">
+              <a:schemeClr val="lt1"/>
+            </a:fontRef>
+          </p:style>
+          <p:txBody>
+            <a:bodyPr rtlCol="0" anchor="ctr"/>
+            <a:lstStyle/>
+            <a:p>
+              <a:pPr algn="ctr"/>
+              <a:endParaRPr lang="en-US"/>
+            </a:p>
+          </p:txBody>
+        </p:sp>
+        <p:sp>
+          <p:nvSpPr>
+            <p:cNvPr id="38" name="Rectangle 37">
+              <a:extLst>
+                <a:ext uri="{FF2B5EF4-FFF2-40B4-BE49-F238E27FC236}">
+                  <a16:creationId xmlns:a16="http://schemas.microsoft.com/office/drawing/2014/main" id="{0652C365-D302-5326-7239-3D3AAFB0D2E3}"/>
+                </a:ext>
+              </a:extLst>
+            </p:cNvPr>
+            <p:cNvSpPr/>
+            <p:nvPr/>
+          </p:nvSpPr>
+          <p:spPr>
+            <a:xfrm>
+              <a:off x="10278218" y="2027202"/>
+              <a:ext cx="1090352" cy="202164"/>
+            </a:xfrm>
+            <a:prstGeom prst="rect">
+              <a:avLst/>
+            </a:prstGeom>
+            <a:solidFill>
+              <a:schemeClr val="bg1"/>
+            </a:solidFill>
+            <a:ln>
+              <a:solidFill>
+                <a:schemeClr val="tx1"/>
+              </a:solidFill>
+            </a:ln>
+          </p:spPr>
+          <p:style>
+            <a:lnRef idx="2">
+              <a:schemeClr val="accent1">
+                <a:shade val="15000"/>
+              </a:schemeClr>
+            </a:lnRef>
+            <a:fillRef idx="1">
+              <a:schemeClr val="accent1"/>
+            </a:fillRef>
+            <a:effectRef idx="0">
+              <a:schemeClr val="accent1"/>
+            </a:effectRef>
+            <a:fontRef idx="minor">
+              <a:schemeClr val="lt1"/>
+            </a:fontRef>
+          </p:style>
+          <p:txBody>
+            <a:bodyPr rtlCol="0" anchor="ctr"/>
+            <a:lstStyle/>
+            <a:p>
+              <a:pPr algn="ctr"/>
+              <a:r>
+                <a:rPr lang="en-US" sz="1400" dirty="0">
+                  <a:solidFill>
+                    <a:schemeClr val="tx1"/>
+                  </a:solidFill>
+                  <a:latin typeface="Centaur" panose="02030504050205020304" pitchFamily="18" charset="77"/>
+                </a:rPr>
+                <a:t>Public States</a:t>
+              </a:r>
+            </a:p>
+          </p:txBody>
+        </p:sp>
+        <p:sp>
+          <p:nvSpPr>
+            <p:cNvPr id="40" name="Rectangle 39">
+              <a:extLst>
+                <a:ext uri="{FF2B5EF4-FFF2-40B4-BE49-F238E27FC236}">
+                  <a16:creationId xmlns:a16="http://schemas.microsoft.com/office/drawing/2014/main" id="{9FC54E80-E70D-1409-2F0C-2FED60372ECD}"/>
+                </a:ext>
+              </a:extLst>
+            </p:cNvPr>
+            <p:cNvSpPr/>
+            <p:nvPr/>
+          </p:nvSpPr>
+          <p:spPr>
+            <a:xfrm>
+              <a:off x="10253417" y="2287167"/>
+              <a:ext cx="1144242" cy="202164"/>
+            </a:xfrm>
+            <a:prstGeom prst="rect">
+              <a:avLst/>
+            </a:prstGeom>
+            <a:solidFill>
+              <a:srgbClr val="097C7A"/>
+            </a:solidFill>
+            <a:ln>
+              <a:solidFill>
+                <a:schemeClr val="tx1"/>
+              </a:solidFill>
+            </a:ln>
+          </p:spPr>
+          <p:style>
+            <a:lnRef idx="2">
+              <a:schemeClr val="accent1">
+                <a:shade val="15000"/>
+              </a:schemeClr>
+            </a:lnRef>
+            <a:fillRef idx="1">
+              <a:schemeClr val="accent1"/>
+            </a:fillRef>
+            <a:effectRef idx="0">
+              <a:schemeClr val="accent1"/>
+            </a:effectRef>
+            <a:fontRef idx="minor">
+              <a:schemeClr val="lt1"/>
+            </a:fontRef>
+          </p:style>
+          <p:txBody>
+            <a:bodyPr rtlCol="0" anchor="ctr"/>
+            <a:lstStyle/>
+            <a:p>
+              <a:pPr algn="ctr"/>
+              <a:r>
+                <a:rPr lang="en-US" sz="1400" dirty="0">
+                  <a:solidFill>
+                    <a:schemeClr val="bg1"/>
+                  </a:solidFill>
+                  <a:latin typeface="Centaur" panose="02030504050205020304" pitchFamily="18" charset="77"/>
+                </a:rPr>
+                <a:t>Hashed States</a:t>
+              </a:r>
+            </a:p>
+          </p:txBody>
+        </p:sp>
+        <p:sp>
+          <p:nvSpPr>
+            <p:cNvPr id="41" name="Rectangle 40">
+              <a:extLst>
+                <a:ext uri="{FF2B5EF4-FFF2-40B4-BE49-F238E27FC236}">
+                  <a16:creationId xmlns:a16="http://schemas.microsoft.com/office/drawing/2014/main" id="{40FD0534-8292-200C-018D-80C6C3F71B2E}"/>
+                </a:ext>
+              </a:extLst>
+            </p:cNvPr>
+            <p:cNvSpPr/>
+            <p:nvPr/>
+          </p:nvSpPr>
+          <p:spPr>
+            <a:xfrm>
+              <a:off x="10278218" y="2547132"/>
+              <a:ext cx="1090352" cy="202164"/>
+            </a:xfrm>
+            <a:prstGeom prst="rect">
+              <a:avLst/>
+            </a:prstGeom>
+            <a:solidFill>
+              <a:srgbClr val="097C7A"/>
+            </a:solidFill>
+            <a:ln>
+              <a:solidFill>
+                <a:schemeClr val="tx1"/>
+              </a:solidFill>
+            </a:ln>
+          </p:spPr>
+          <p:style>
+            <a:lnRef idx="2">
+              <a:schemeClr val="accent1">
+                <a:shade val="15000"/>
+              </a:schemeClr>
+            </a:lnRef>
+            <a:fillRef idx="1">
+              <a:schemeClr val="accent1"/>
+            </a:fillRef>
+            <a:effectRef idx="0">
+              <a:schemeClr val="accent1"/>
+            </a:effectRef>
+            <a:fontRef idx="minor">
+              <a:schemeClr val="lt1"/>
+            </a:fontRef>
+          </p:style>
+          <p:txBody>
+            <a:bodyPr rtlCol="0" anchor="ctr"/>
+            <a:lstStyle/>
+            <a:p>
+              <a:pPr algn="ctr"/>
+              <a:r>
+                <a:rPr lang="en-US" sz="1400" dirty="0">
+                  <a:solidFill>
+                    <a:schemeClr val="bg1"/>
+                  </a:solidFill>
+                  <a:latin typeface="Centaur" panose="02030504050205020304" pitchFamily="18" charset="77"/>
+                </a:rPr>
+                <a:t>Private States</a:t>
+              </a:r>
+            </a:p>
+          </p:txBody>
+        </p:sp>
+      </p:grpSp>
+      <p:sp>
+        <p:nvSpPr>
+          <p:cNvPr id="44" name="TextBox 43">
+            <a:extLst>
+              <a:ext uri="{FF2B5EF4-FFF2-40B4-BE49-F238E27FC236}">
+                <a16:creationId xmlns:a16="http://schemas.microsoft.com/office/drawing/2014/main" id="{C68A9C9D-E599-D72D-CE3E-5C9BF647BB54}"/>
+              </a:ext>
+            </a:extLst>
+          </p:cNvPr>
+          <p:cNvSpPr txBox="1"/>
+          <p:nvPr/>
+        </p:nvSpPr>
+        <p:spPr>
+          <a:xfrm>
+            <a:off x="8047723" y="1558225"/>
+            <a:ext cx="1178528" cy="523220"/>
+          </a:xfrm>
+          <a:prstGeom prst="rect">
+            <a:avLst/>
+          </a:prstGeom>
+          <a:noFill/>
+        </p:spPr>
+        <p:txBody>
+          <a:bodyPr wrap="none" rtlCol="0">
+            <a:spAutoFit/>
+          </a:bodyPr>
+          <a:lstStyle/>
+          <a:p>
+            <a:pPr algn="ctr"/>
+            <a:r>
+              <a:rPr lang="en-US" sz="1400" dirty="0">
+                <a:latin typeface="Centaur" panose="02030504050205020304" pitchFamily="18" charset="77"/>
+              </a:rPr>
+              <a:t>Namespace per</a:t>
+            </a:r>
+            <a:br>
+              <a:rPr lang="en-US" sz="1400" dirty="0">
+                <a:latin typeface="Centaur" panose="02030504050205020304" pitchFamily="18" charset="77"/>
+              </a:rPr>
+            </a:br>
+            <a:r>
+              <a:rPr lang="en-US" sz="1400" dirty="0">
+                <a:latin typeface="Centaur" panose="02030504050205020304" pitchFamily="18" charset="77"/>
+              </a:rPr>
+              <a:t>chaincode</a:t>
+            </a:r>
+          </a:p>
+        </p:txBody>
+      </p:sp>
+      <p:sp>
+        <p:nvSpPr>
+          <p:cNvPr id="47" name="Rectangle 46">
+            <a:extLst>
+              <a:ext uri="{FF2B5EF4-FFF2-40B4-BE49-F238E27FC236}">
+                <a16:creationId xmlns:a16="http://schemas.microsoft.com/office/drawing/2014/main" id="{1899E352-8C84-BFD1-13B8-ADDAC4B219B8}"/>
               </a:ext>
             </a:extLst>
           </p:cNvPr>
@@ -4713,20 +5556,20 @@
         </p:nvSpPr>
         <p:spPr>
           <a:xfrm>
-            <a:off x="3531098" y="3189914"/>
-            <a:ext cx="94593" cy="155777"/>
+            <a:off x="4007469" y="4366657"/>
+            <a:ext cx="345260" cy="268868"/>
           </a:xfrm>
           <a:prstGeom prst="rect">
             <a:avLst/>
           </a:prstGeom>
           <a:solidFill>
-            <a:schemeClr val="bg1"/>
+            <a:srgbClr val="0D7D7D"/>
           </a:solidFill>
         </p:spPr>
         <p:style>
           <a:lnRef idx="2">
             <a:schemeClr val="accent1">
-              <a:shade val="50000"/>
+              <a:shade val="15000"/>
             </a:schemeClr>
           </a:lnRef>
           <a:fillRef idx="1">
@@ -4750,10 +5593,10 @@
       </p:sp>
       <p:sp>
         <p:nvSpPr>
-          <p:cNvPr id="60" name="Rectangle 59">
-            <a:extLst>
-              <a:ext uri="{FF2B5EF4-FFF2-40B4-BE49-F238E27FC236}">
-                <a16:creationId xmlns:a16="http://schemas.microsoft.com/office/drawing/2014/main" id="{C6E34592-16E7-704F-9CD0-0EF4FEC6B77C}"/>
+          <p:cNvPr id="48" name="Rectangle 47">
+            <a:extLst>
+              <a:ext uri="{FF2B5EF4-FFF2-40B4-BE49-F238E27FC236}">
+                <a16:creationId xmlns:a16="http://schemas.microsoft.com/office/drawing/2014/main" id="{D8B474B9-634E-07A8-92F8-5336040789BB}"/>
               </a:ext>
             </a:extLst>
           </p:cNvPr>
@@ -4762,20 +5605,20 @@
         </p:nvSpPr>
         <p:spPr>
           <a:xfrm>
-            <a:off x="3725538" y="3195172"/>
-            <a:ext cx="94593" cy="155777"/>
+            <a:off x="3980464" y="3677801"/>
+            <a:ext cx="345260" cy="196878"/>
           </a:xfrm>
           <a:prstGeom prst="rect">
             <a:avLst/>
           </a:prstGeom>
           <a:solidFill>
-            <a:schemeClr val="bg1"/>
+            <a:srgbClr val="0D7D7D"/>
           </a:solidFill>
         </p:spPr>
         <p:style>
           <a:lnRef idx="2">
             <a:schemeClr val="accent1">
-              <a:shade val="50000"/>
+              <a:shade val="15000"/>
             </a:schemeClr>
           </a:lnRef>
           <a:fillRef idx="1">
@@ -4799,10 +5642,10 @@
       </p:sp>
       <p:sp>
         <p:nvSpPr>
-          <p:cNvPr id="61" name="Rectangle 60">
-            <a:extLst>
-              <a:ext uri="{FF2B5EF4-FFF2-40B4-BE49-F238E27FC236}">
-                <a16:creationId xmlns:a16="http://schemas.microsoft.com/office/drawing/2014/main" id="{A71937C4-12B0-1C48-8267-53881FAAFE58}"/>
+          <p:cNvPr id="54" name="Rectangle 53">
+            <a:extLst>
+              <a:ext uri="{FF2B5EF4-FFF2-40B4-BE49-F238E27FC236}">
+                <a16:creationId xmlns:a16="http://schemas.microsoft.com/office/drawing/2014/main" id="{0D61D292-D682-3CD6-ABFC-29509C05FA13}"/>
               </a:ext>
             </a:extLst>
           </p:cNvPr>
@@ -4811,8 +5654,8 @@
         </p:nvSpPr>
         <p:spPr>
           <a:xfrm>
-            <a:off x="3331550" y="3960152"/>
-            <a:ext cx="94593" cy="155777"/>
+            <a:off x="268283" y="3798252"/>
+            <a:ext cx="1723720" cy="781978"/>
           </a:xfrm>
           <a:prstGeom prst="rect">
             <a:avLst/>
@@ -4820,11 +5663,12 @@
           <a:solidFill>
             <a:schemeClr val="bg1"/>
           </a:solidFill>
+          <a:ln w="53975"/>
         </p:spPr>
         <p:style>
           <a:lnRef idx="2">
             <a:schemeClr val="accent1">
-              <a:shade val="50000"/>
+              <a:shade val="15000"/>
             </a:schemeClr>
           </a:lnRef>
           <a:fillRef idx="1">
@@ -4848,10 +5692,10 @@
       </p:sp>
       <p:sp>
         <p:nvSpPr>
-          <p:cNvPr id="68" name="Rectangle 67">
-            <a:extLst>
-              <a:ext uri="{FF2B5EF4-FFF2-40B4-BE49-F238E27FC236}">
-                <a16:creationId xmlns:a16="http://schemas.microsoft.com/office/drawing/2014/main" id="{5F598610-D838-1C43-B74E-11812FB17D1E}"/>
+          <p:cNvPr id="49" name="Rectangle 48">
+            <a:extLst>
+              <a:ext uri="{FF2B5EF4-FFF2-40B4-BE49-F238E27FC236}">
+                <a16:creationId xmlns:a16="http://schemas.microsoft.com/office/drawing/2014/main" id="{4BBEA602-6085-8AAD-E9E1-587784C04B53}"/>
               </a:ext>
             </a:extLst>
           </p:cNvPr>
@@ -4860,8 +5704,8 @@
         </p:nvSpPr>
         <p:spPr>
           <a:xfrm>
-            <a:off x="3915009" y="3186931"/>
-            <a:ext cx="94593" cy="155777"/>
+            <a:off x="322174" y="3874880"/>
+            <a:ext cx="345260" cy="268868"/>
           </a:xfrm>
           <a:prstGeom prst="rect">
             <a:avLst/>
@@ -4873,7 +5717,7 @@
         <p:style>
           <a:lnRef idx="2">
             <a:schemeClr val="accent1">
-              <a:shade val="50000"/>
+              <a:shade val="15000"/>
             </a:schemeClr>
           </a:lnRef>
           <a:fillRef idx="1">
@@ -4897,10 +5741,10 @@
       </p:sp>
       <p:sp>
         <p:nvSpPr>
-          <p:cNvPr id="69" name="Rectangle 68">
-            <a:extLst>
-              <a:ext uri="{FF2B5EF4-FFF2-40B4-BE49-F238E27FC236}">
-                <a16:creationId xmlns:a16="http://schemas.microsoft.com/office/drawing/2014/main" id="{34338EDD-A7DC-014C-A7B1-3D8F87564626}"/>
+          <p:cNvPr id="50" name="Rectangle 49">
+            <a:extLst>
+              <a:ext uri="{FF2B5EF4-FFF2-40B4-BE49-F238E27FC236}">
+                <a16:creationId xmlns:a16="http://schemas.microsoft.com/office/drawing/2014/main" id="{906A43F1-86EF-3689-1BB1-E3DFA06FEE41}"/>
               </a:ext>
             </a:extLst>
           </p:cNvPr>
@@ -4909,20 +5753,20 @@
         </p:nvSpPr>
         <p:spPr>
           <a:xfrm>
-            <a:off x="2738424" y="3194024"/>
-            <a:ext cx="94593" cy="155777"/>
+            <a:off x="322174" y="4255470"/>
+            <a:ext cx="345260" cy="268868"/>
           </a:xfrm>
           <a:prstGeom prst="rect">
             <a:avLst/>
           </a:prstGeom>
           <a:solidFill>
-            <a:schemeClr val="bg1"/>
+            <a:srgbClr val="0D7D7D"/>
           </a:solidFill>
         </p:spPr>
         <p:style>
           <a:lnRef idx="2">
             <a:schemeClr val="accent1">
-              <a:shade val="50000"/>
+              <a:shade val="15000"/>
             </a:schemeClr>
           </a:lnRef>
           <a:fillRef idx="1">
@@ -4946,10 +5790,84 @@
       </p:sp>
       <p:sp>
         <p:nvSpPr>
-          <p:cNvPr id="70" name="Rounded Rectangle 69">
-            <a:extLst>
-              <a:ext uri="{FF2B5EF4-FFF2-40B4-BE49-F238E27FC236}">
-                <a16:creationId xmlns:a16="http://schemas.microsoft.com/office/drawing/2014/main" id="{DCF44230-29D4-1F4A-8656-97425F490970}"/>
+          <p:cNvPr id="51" name="TextBox 50">
+            <a:extLst>
+              <a:ext uri="{FF2B5EF4-FFF2-40B4-BE49-F238E27FC236}">
+                <a16:creationId xmlns:a16="http://schemas.microsoft.com/office/drawing/2014/main" id="{F5D65954-AE4B-BCF7-8CA6-A3CCE865974B}"/>
+              </a:ext>
+            </a:extLst>
+          </p:cNvPr>
+          <p:cNvSpPr txBox="1"/>
+          <p:nvPr/>
+        </p:nvSpPr>
+        <p:spPr>
+          <a:xfrm>
+            <a:off x="645325" y="3824648"/>
+            <a:ext cx="1165575" cy="369332"/>
+          </a:xfrm>
+          <a:prstGeom prst="rect">
+            <a:avLst/>
+          </a:prstGeom>
+          <a:noFill/>
+        </p:spPr>
+        <p:txBody>
+          <a:bodyPr wrap="none" rtlCol="0">
+            <a:spAutoFit/>
+          </a:bodyPr>
+          <a:lstStyle/>
+          <a:p>
+            <a:r>
+              <a:rPr lang="en-US" dirty="0">
+                <a:latin typeface="Centaur" panose="02030504050205020304" pitchFamily="18" charset="77"/>
+              </a:rPr>
+              <a:t>Pre-existing</a:t>
+            </a:r>
+          </a:p>
+        </p:txBody>
+      </p:sp>
+      <p:sp>
+        <p:nvSpPr>
+          <p:cNvPr id="52" name="TextBox 51">
+            <a:extLst>
+              <a:ext uri="{FF2B5EF4-FFF2-40B4-BE49-F238E27FC236}">
+                <a16:creationId xmlns:a16="http://schemas.microsoft.com/office/drawing/2014/main" id="{BF26E03F-CFB8-99C1-C30D-3050ED9F6152}"/>
+              </a:ext>
+            </a:extLst>
+          </p:cNvPr>
+          <p:cNvSpPr txBox="1"/>
+          <p:nvPr/>
+        </p:nvSpPr>
+        <p:spPr>
+          <a:xfrm>
+            <a:off x="656702" y="4210898"/>
+            <a:ext cx="1380443" cy="369332"/>
+          </a:xfrm>
+          <a:prstGeom prst="rect">
+            <a:avLst/>
+          </a:prstGeom>
+          <a:noFill/>
+        </p:spPr>
+        <p:txBody>
+          <a:bodyPr wrap="none" rtlCol="0">
+            <a:spAutoFit/>
+          </a:bodyPr>
+          <a:lstStyle/>
+          <a:p>
+            <a:r>
+              <a:rPr lang="en-US" dirty="0">
+                <a:latin typeface="Centaur" panose="02030504050205020304" pitchFamily="18" charset="77"/>
+              </a:rPr>
+              <a:t>New for PDC</a:t>
+            </a:r>
+          </a:p>
+        </p:txBody>
+      </p:sp>
+      <p:sp>
+        <p:nvSpPr>
+          <p:cNvPr id="3" name="Rectangle 2">
+            <a:extLst>
+              <a:ext uri="{FF2B5EF4-FFF2-40B4-BE49-F238E27FC236}">
+                <a16:creationId xmlns:a16="http://schemas.microsoft.com/office/drawing/2014/main" id="{B8FD57C6-2BA0-362B-AB17-63447F72ACD9}"/>
               </a:ext>
             </a:extLst>
           </p:cNvPr>
@@ -4958,29 +5876,25 @@
         </p:nvSpPr>
         <p:spPr>
           <a:xfrm>
-            <a:off x="2404204" y="1864163"/>
-            <a:ext cx="2517325" cy="385654"/>
-          </a:xfrm>
-          <a:prstGeom prst="roundRect">
+            <a:off x="4562361" y="3268016"/>
+            <a:ext cx="189248" cy="184501"/>
+          </a:xfrm>
+          <a:prstGeom prst="rect">
             <a:avLst/>
           </a:prstGeom>
           <a:solidFill>
-            <a:schemeClr val="accent1">
-              <a:lumMod val="75000"/>
-            </a:schemeClr>
+            <a:schemeClr val="bg1"/>
           </a:solidFill>
           <a:ln>
             <a:solidFill>
-              <a:schemeClr val="accent1">
-                <a:lumMod val="75000"/>
-              </a:schemeClr>
+              <a:schemeClr val="bg1"/>
             </a:solidFill>
           </a:ln>
         </p:spPr>
         <p:style>
           <a:lnRef idx="2">
             <a:schemeClr val="accent1">
-              <a:shade val="50000"/>
+              <a:shade val="15000"/>
             </a:schemeClr>
           </a:lnRef>
           <a:fillRef idx="1">
@@ -4998,27 +5912,16 @@
           <a:lstStyle/>
           <a:p>
             <a:pPr algn="ctr"/>
-            <a:r>
-              <a:rPr lang="en-US" sz="2000" b="1" dirty="0" err="1">
-                <a:latin typeface="Centaur" panose="02030504050205020304" pitchFamily="18" charset="77"/>
-              </a:rPr>
-              <a:t>Pvtdata</a:t>
-            </a:r>
-            <a:r>
-              <a:rPr lang="en-US" sz="2000" b="1" dirty="0">
-                <a:latin typeface="Centaur" panose="02030504050205020304" pitchFamily="18" charset="77"/>
-              </a:rPr>
-              <a:t> Dissemination</a:t>
-            </a:r>
-          </a:p>
-        </p:txBody>
-      </p:sp>
-      <p:sp>
-        <p:nvSpPr>
-          <p:cNvPr id="71" name="Can 70">
-            <a:extLst>
-              <a:ext uri="{FF2B5EF4-FFF2-40B4-BE49-F238E27FC236}">
-                <a16:creationId xmlns:a16="http://schemas.microsoft.com/office/drawing/2014/main" id="{5AF7CF8F-72CD-244E-8D80-415CAA3F5022}"/>
+            <a:endParaRPr lang="en-US"/>
+          </a:p>
+        </p:txBody>
+      </p:sp>
+      <p:sp>
+        <p:nvSpPr>
+          <p:cNvPr id="4" name="Rectangle 3">
+            <a:extLst>
+              <a:ext uri="{FF2B5EF4-FFF2-40B4-BE49-F238E27FC236}">
+                <a16:creationId xmlns:a16="http://schemas.microsoft.com/office/drawing/2014/main" id="{D814F8B2-BDD9-0449-E8F7-7874AB8EECF6}"/>
               </a:ext>
             </a:extLst>
           </p:cNvPr>
@@ -5027,22 +5930,25 @@
         </p:nvSpPr>
         <p:spPr>
           <a:xfrm>
-            <a:off x="4966224" y="2506844"/>
-            <a:ext cx="1822392" cy="576118"/>
-          </a:xfrm>
-          <a:prstGeom prst="can">
+            <a:off x="4597187" y="3748448"/>
+            <a:ext cx="102157" cy="86624"/>
+          </a:xfrm>
+          <a:prstGeom prst="rect">
             <a:avLst/>
           </a:prstGeom>
           <a:solidFill>
-            <a:schemeClr val="accent2">
-              <a:lumMod val="75000"/>
-            </a:schemeClr>
+            <a:schemeClr val="bg1"/>
           </a:solidFill>
+          <a:ln>
+            <a:solidFill>
+              <a:schemeClr val="bg1"/>
+            </a:solidFill>
+          </a:ln>
         </p:spPr>
         <p:style>
           <a:lnRef idx="2">
             <a:schemeClr val="accent1">
-              <a:shade val="50000"/>
+              <a:shade val="15000"/>
             </a:schemeClr>
           </a:lnRef>
           <a:fillRef idx="1">
@@ -5060,24 +5966,204 @@
           <a:lstStyle/>
           <a:p>
             <a:pPr algn="ctr"/>
-            <a:r>
-              <a:rPr lang="en-US" sz="2000" b="1" dirty="0">
-                <a:solidFill>
-                  <a:schemeClr val="bg1"/>
-                </a:solidFill>
-                <a:latin typeface="Centaur" panose="02030504050205020304" pitchFamily="18" charset="77"/>
-              </a:rPr>
-              <a:t>Private State DB</a:t>
-            </a:r>
-          </a:p>
-        </p:txBody>
-      </p:sp>
-      <p:sp>
-        <p:nvSpPr>
-          <p:cNvPr id="72" name="Vertical Scroll 71">
-            <a:extLst>
-              <a:ext uri="{FF2B5EF4-FFF2-40B4-BE49-F238E27FC236}">
-                <a16:creationId xmlns:a16="http://schemas.microsoft.com/office/drawing/2014/main" id="{E875AEEB-AC92-ED4D-8E35-86041D8909C6}"/>
+            <a:endParaRPr lang="en-US"/>
+          </a:p>
+        </p:txBody>
+      </p:sp>
+      <p:cxnSp>
+        <p:nvCxnSpPr>
+          <p:cNvPr id="22" name="Straight Arrow Connector 21">
+            <a:extLst>
+              <a:ext uri="{FF2B5EF4-FFF2-40B4-BE49-F238E27FC236}">
+                <a16:creationId xmlns:a16="http://schemas.microsoft.com/office/drawing/2014/main" id="{0B1155F6-AB0B-8004-898C-EAA2B7AF40BA}"/>
+              </a:ext>
+            </a:extLst>
+          </p:cNvPr>
+          <p:cNvCxnSpPr>
+            <a:cxnSpLocks/>
+          </p:cNvCxnSpPr>
+          <p:nvPr/>
+        </p:nvCxnSpPr>
+        <p:spPr>
+          <a:xfrm>
+            <a:off x="3937000" y="3068238"/>
+            <a:ext cx="0" cy="175205"/>
+          </a:xfrm>
+          <a:prstGeom prst="straightConnector1">
+            <a:avLst/>
+          </a:prstGeom>
+          <a:ln w="19050" cap="flat" cmpd="sng" algn="ctr">
+            <a:solidFill>
+              <a:schemeClr val="dk1"/>
+            </a:solidFill>
+            <a:prstDash val="solid"/>
+            <a:round/>
+            <a:headEnd type="none" w="med" len="med"/>
+            <a:tailEnd type="arrow" w="med" len="med"/>
+          </a:ln>
+        </p:spPr>
+        <p:style>
+          <a:lnRef idx="0">
+            <a:scrgbClr r="0" g="0" b="0"/>
+          </a:lnRef>
+          <a:fillRef idx="0">
+            <a:scrgbClr r="0" g="0" b="0"/>
+          </a:fillRef>
+          <a:effectRef idx="0">
+            <a:scrgbClr r="0" g="0" b="0"/>
+          </a:effectRef>
+          <a:fontRef idx="minor">
+            <a:schemeClr val="tx1"/>
+          </a:fontRef>
+        </p:style>
+      </p:cxnSp>
+      <p:cxnSp>
+        <p:nvCxnSpPr>
+          <p:cNvPr id="24" name="Straight Arrow Connector 23">
+            <a:extLst>
+              <a:ext uri="{FF2B5EF4-FFF2-40B4-BE49-F238E27FC236}">
+                <a16:creationId xmlns:a16="http://schemas.microsoft.com/office/drawing/2014/main" id="{A27CC911-16C7-E073-A8F1-C1B565C75843}"/>
+              </a:ext>
+            </a:extLst>
+          </p:cNvPr>
+          <p:cNvCxnSpPr>
+            <a:cxnSpLocks/>
+          </p:cNvCxnSpPr>
+          <p:nvPr/>
+        </p:nvCxnSpPr>
+        <p:spPr>
+          <a:xfrm>
+            <a:off x="3924300" y="3874679"/>
+            <a:ext cx="0" cy="194264"/>
+          </a:xfrm>
+          <a:prstGeom prst="straightConnector1">
+            <a:avLst/>
+          </a:prstGeom>
+          <a:ln w="19050" cap="flat" cmpd="sng" algn="ctr">
+            <a:solidFill>
+              <a:schemeClr val="dk1"/>
+            </a:solidFill>
+            <a:prstDash val="solid"/>
+            <a:round/>
+            <a:headEnd type="none" w="med" len="med"/>
+            <a:tailEnd type="arrow" w="med" len="med"/>
+          </a:ln>
+        </p:spPr>
+        <p:style>
+          <a:lnRef idx="0">
+            <a:scrgbClr r="0" g="0" b="0"/>
+          </a:lnRef>
+          <a:fillRef idx="0">
+            <a:scrgbClr r="0" g="0" b="0"/>
+          </a:fillRef>
+          <a:effectRef idx="0">
+            <a:scrgbClr r="0" g="0" b="0"/>
+          </a:effectRef>
+          <a:fontRef idx="minor">
+            <a:schemeClr val="tx1"/>
+          </a:fontRef>
+        </p:style>
+      </p:cxnSp>
+      <p:cxnSp>
+        <p:nvCxnSpPr>
+          <p:cNvPr id="25" name="Straight Arrow Connector 24">
+            <a:extLst>
+              <a:ext uri="{FF2B5EF4-FFF2-40B4-BE49-F238E27FC236}">
+                <a16:creationId xmlns:a16="http://schemas.microsoft.com/office/drawing/2014/main" id="{A5871FA6-2C90-D9D1-9C46-B0452BABC067}"/>
+              </a:ext>
+            </a:extLst>
+          </p:cNvPr>
+          <p:cNvCxnSpPr>
+            <a:cxnSpLocks/>
+          </p:cNvCxnSpPr>
+          <p:nvPr/>
+        </p:nvCxnSpPr>
+        <p:spPr>
+          <a:xfrm>
+            <a:off x="3924300" y="4655738"/>
+            <a:ext cx="0" cy="199025"/>
+          </a:xfrm>
+          <a:prstGeom prst="straightConnector1">
+            <a:avLst/>
+          </a:prstGeom>
+          <a:ln w="19050" cap="flat" cmpd="sng" algn="ctr">
+            <a:solidFill>
+              <a:schemeClr val="dk1"/>
+            </a:solidFill>
+            <a:prstDash val="solid"/>
+            <a:round/>
+            <a:headEnd type="none" w="med" len="med"/>
+            <a:tailEnd type="arrow" w="med" len="med"/>
+          </a:ln>
+        </p:spPr>
+        <p:style>
+          <a:lnRef idx="0">
+            <a:scrgbClr r="0" g="0" b="0"/>
+          </a:lnRef>
+          <a:fillRef idx="0">
+            <a:scrgbClr r="0" g="0" b="0"/>
+          </a:fillRef>
+          <a:effectRef idx="0">
+            <a:scrgbClr r="0" g="0" b="0"/>
+          </a:effectRef>
+          <a:fontRef idx="minor">
+            <a:schemeClr val="tx1"/>
+          </a:fontRef>
+        </p:style>
+      </p:cxnSp>
+      <p:cxnSp>
+        <p:nvCxnSpPr>
+          <p:cNvPr id="32" name="Straight Arrow Connector 31">
+            <a:extLst>
+              <a:ext uri="{FF2B5EF4-FFF2-40B4-BE49-F238E27FC236}">
+                <a16:creationId xmlns:a16="http://schemas.microsoft.com/office/drawing/2014/main" id="{A2D4B29C-C3EF-7197-5D10-D46F85B531BF}"/>
+              </a:ext>
+            </a:extLst>
+          </p:cNvPr>
+          <p:cNvCxnSpPr>
+            <a:cxnSpLocks/>
+          </p:cNvCxnSpPr>
+          <p:nvPr/>
+        </p:nvCxnSpPr>
+        <p:spPr>
+          <a:xfrm flipV="1">
+            <a:off x="5974198" y="3791760"/>
+            <a:ext cx="381624" cy="6492"/>
+          </a:xfrm>
+          <a:prstGeom prst="straightConnector1">
+            <a:avLst/>
+          </a:prstGeom>
+          <a:ln w="19050" cap="flat" cmpd="sng" algn="ctr">
+            <a:solidFill>
+              <a:schemeClr val="dk1"/>
+            </a:solidFill>
+            <a:prstDash val="solid"/>
+            <a:round/>
+            <a:headEnd type="none" w="med" len="med"/>
+            <a:tailEnd type="arrow" w="med" len="med"/>
+          </a:ln>
+        </p:spPr>
+        <p:style>
+          <a:lnRef idx="0">
+            <a:scrgbClr r="0" g="0" b="0"/>
+          </a:lnRef>
+          <a:fillRef idx="0">
+            <a:scrgbClr r="0" g="0" b="0"/>
+          </a:fillRef>
+          <a:effectRef idx="0">
+            <a:scrgbClr r="0" g="0" b="0"/>
+          </a:effectRef>
+          <a:fontRef idx="minor">
+            <a:schemeClr val="tx1"/>
+          </a:fontRef>
+        </p:style>
+      </p:cxnSp>
+      <p:sp>
+        <p:nvSpPr>
+          <p:cNvPr id="5" name="Can 4">
+            <a:extLst>
+              <a:ext uri="{FF2B5EF4-FFF2-40B4-BE49-F238E27FC236}">
+                <a16:creationId xmlns:a16="http://schemas.microsoft.com/office/drawing/2014/main" id="{B79DB960-209C-1661-1C7C-896B98D54AC1}"/>
               </a:ext>
             </a:extLst>
           </p:cNvPr>
@@ -5086,17 +6172,25 @@
         </p:nvSpPr>
         <p:spPr>
           <a:xfrm>
-            <a:off x="5046268" y="3775039"/>
-            <a:ext cx="1740512" cy="620575"/>
-          </a:xfrm>
-          <a:prstGeom prst="verticalScroll">
+            <a:off x="6388258" y="1340626"/>
+            <a:ext cx="1210968" cy="501226"/>
+          </a:xfrm>
+          <a:prstGeom prst="can">
             <a:avLst/>
           </a:prstGeom>
+          <a:solidFill>
+            <a:srgbClr val="0D7D7D"/>
+          </a:solidFill>
+          <a:ln>
+            <a:solidFill>
+              <a:schemeClr val="tx1"/>
+            </a:solidFill>
+          </a:ln>
         </p:spPr>
         <p:style>
           <a:lnRef idx="2">
             <a:schemeClr val="accent1">
-              <a:shade val="50000"/>
+              <a:shade val="15000"/>
             </a:schemeClr>
           </a:lnRef>
           <a:fillRef idx="1">
@@ -5115,20 +6209,20 @@
           <a:p>
             <a:pPr algn="ctr"/>
             <a:r>
-              <a:rPr lang="en-US" sz="2000" b="1" dirty="0">
+              <a:rPr lang="en-US" dirty="0">
                 <a:latin typeface="Centaur" panose="02030504050205020304" pitchFamily="18" charset="77"/>
               </a:rPr>
-              <a:t>Private Block Store</a:t>
-            </a:r>
-          </a:p>
-        </p:txBody>
-      </p:sp>
-      <p:sp>
-        <p:nvSpPr>
-          <p:cNvPr id="73" name="Can 72">
-            <a:extLst>
-              <a:ext uri="{FF2B5EF4-FFF2-40B4-BE49-F238E27FC236}">
-                <a16:creationId xmlns:a16="http://schemas.microsoft.com/office/drawing/2014/main" id="{EEC2D35F-3958-4E40-B9D0-098DDA7236F4}"/>
+              <a:t>Purge DB</a:t>
+            </a:r>
+          </a:p>
+        </p:txBody>
+      </p:sp>
+      <p:sp>
+        <p:nvSpPr>
+          <p:cNvPr id="23" name="Can 22">
+            <a:extLst>
+              <a:ext uri="{FF2B5EF4-FFF2-40B4-BE49-F238E27FC236}">
+                <a16:creationId xmlns:a16="http://schemas.microsoft.com/office/drawing/2014/main" id="{5AA2E241-61B2-9ACF-E522-B167001E870A}"/>
               </a:ext>
             </a:extLst>
           </p:cNvPr>
@@ -5137,20 +6231,25 @@
         </p:nvSpPr>
         <p:spPr>
           <a:xfrm>
-            <a:off x="6714460" y="4404974"/>
-            <a:ext cx="1285820" cy="576118"/>
+            <a:off x="4699344" y="3404914"/>
+            <a:ext cx="1306862" cy="740240"/>
           </a:xfrm>
           <a:prstGeom prst="can">
             <a:avLst/>
           </a:prstGeom>
           <a:solidFill>
-            <a:srgbClr val="00FDFF"/>
+            <a:srgbClr val="0D7D7D"/>
           </a:solidFill>
+          <a:ln>
+            <a:solidFill>
+              <a:schemeClr val="tx1"/>
+            </a:solidFill>
+          </a:ln>
         </p:spPr>
         <p:style>
           <a:lnRef idx="2">
             <a:schemeClr val="accent1">
-              <a:shade val="50000"/>
+              <a:shade val="15000"/>
             </a:schemeClr>
           </a:lnRef>
           <a:fillRef idx="1">
@@ -5169,17 +6268,545 @@
           <a:p>
             <a:pPr algn="ctr"/>
             <a:r>
-              <a:rPr lang="en-US" sz="2000" b="1" dirty="0">
+              <a:rPr lang="en-US" dirty="0">
+                <a:latin typeface="Centaur" panose="02030504050205020304" pitchFamily="18" charset="77"/>
+              </a:rPr>
+              <a:t>Transient</a:t>
+            </a:r>
+            <a:br>
+              <a:rPr lang="en-US" dirty="0">
+                <a:latin typeface="Centaur" panose="02030504050205020304" pitchFamily="18" charset="77"/>
+              </a:rPr>
+            </a:br>
+            <a:r>
+              <a:rPr lang="en-US" dirty="0">
+                <a:latin typeface="Centaur" panose="02030504050205020304" pitchFamily="18" charset="77"/>
+              </a:rPr>
+              <a:t>Store</a:t>
+            </a:r>
+          </a:p>
+        </p:txBody>
+      </p:sp>
+      <p:sp>
+        <p:nvSpPr>
+          <p:cNvPr id="26" name="Can 25">
+            <a:extLst>
+              <a:ext uri="{FF2B5EF4-FFF2-40B4-BE49-F238E27FC236}">
+                <a16:creationId xmlns:a16="http://schemas.microsoft.com/office/drawing/2014/main" id="{FBB32E3A-E1D8-C238-EAB8-23490A9620CC}"/>
+              </a:ext>
+            </a:extLst>
+          </p:cNvPr>
+          <p:cNvSpPr/>
+          <p:nvPr/>
+        </p:nvSpPr>
+        <p:spPr>
+          <a:xfrm>
+            <a:off x="8000552" y="3958520"/>
+            <a:ext cx="1303191" cy="802342"/>
+          </a:xfrm>
+          <a:prstGeom prst="can">
+            <a:avLst/>
+          </a:prstGeom>
+          <a:solidFill>
+            <a:srgbClr val="0D7D7D"/>
+          </a:solidFill>
+        </p:spPr>
+        <p:style>
+          <a:lnRef idx="2">
+            <a:schemeClr val="accent1">
+              <a:shade val="15000"/>
+            </a:schemeClr>
+          </a:lnRef>
+          <a:fillRef idx="1">
+            <a:schemeClr val="accent1"/>
+          </a:fillRef>
+          <a:effectRef idx="0">
+            <a:schemeClr val="accent1"/>
+          </a:effectRef>
+          <a:fontRef idx="minor">
+            <a:schemeClr val="lt1"/>
+          </a:fontRef>
+        </p:style>
+        <p:txBody>
+          <a:bodyPr rtlCol="0" anchor="ctr"/>
+          <a:lstStyle/>
+          <a:p>
+            <a:pPr algn="ctr"/>
+            <a:r>
+              <a:rPr lang="en-US" sz="1600" dirty="0">
                 <a:solidFill>
-                  <a:schemeClr val="tx1"/>
+                  <a:schemeClr val="bg1"/>
                 </a:solidFill>
                 <a:latin typeface="Centaur" panose="02030504050205020304" pitchFamily="18" charset="77"/>
               </a:rPr>
-              <a:t>Config History DB</a:t>
-            </a:r>
-          </a:p>
-        </p:txBody>
-      </p:sp>
+              <a:t>Private Data</a:t>
+            </a:r>
+            <a:br>
+              <a:rPr lang="en-US" sz="1600" dirty="0">
+                <a:solidFill>
+                  <a:schemeClr val="bg1"/>
+                </a:solidFill>
+                <a:latin typeface="Centaur" panose="02030504050205020304" pitchFamily="18" charset="77"/>
+              </a:rPr>
+            </a:br>
+            <a:r>
+              <a:rPr lang="en-US" sz="1600" dirty="0">
+                <a:solidFill>
+                  <a:schemeClr val="bg1"/>
+                </a:solidFill>
+                <a:latin typeface="Centaur" panose="02030504050205020304" pitchFamily="18" charset="77"/>
+              </a:rPr>
+              <a:t>Collection </a:t>
+            </a:r>
+          </a:p>
+          <a:p>
+            <a:pPr algn="ctr"/>
+            <a:r>
+              <a:rPr lang="en-US" sz="1600" dirty="0">
+                <a:solidFill>
+                  <a:schemeClr val="bg1"/>
+                </a:solidFill>
+                <a:latin typeface="Centaur" panose="02030504050205020304" pitchFamily="18" charset="77"/>
+              </a:rPr>
+              <a:t>Config DB</a:t>
+            </a:r>
+          </a:p>
+          <a:p>
+            <a:pPr algn="ctr"/>
+            <a:endParaRPr lang="en-US" sz="1600" dirty="0">
+              <a:solidFill>
+                <a:schemeClr val="bg1"/>
+              </a:solidFill>
+              <a:latin typeface="Centaur" panose="02030504050205020304" pitchFamily="18" charset="77"/>
+            </a:endParaRPr>
+          </a:p>
+        </p:txBody>
+      </p:sp>
+      <p:sp>
+        <p:nvSpPr>
+          <p:cNvPr id="45" name="TextBox 44">
+            <a:extLst>
+              <a:ext uri="{FF2B5EF4-FFF2-40B4-BE49-F238E27FC236}">
+                <a16:creationId xmlns:a16="http://schemas.microsoft.com/office/drawing/2014/main" id="{70BD09B7-404A-7D19-ACC2-7F0026713516}"/>
+              </a:ext>
+            </a:extLst>
+          </p:cNvPr>
+          <p:cNvSpPr txBox="1"/>
+          <p:nvPr/>
+        </p:nvSpPr>
+        <p:spPr>
+          <a:xfrm>
+            <a:off x="8168648" y="1295629"/>
+            <a:ext cx="939681" cy="369332"/>
+          </a:xfrm>
+          <a:prstGeom prst="rect">
+            <a:avLst/>
+          </a:prstGeom>
+          <a:noFill/>
+        </p:spPr>
+        <p:txBody>
+          <a:bodyPr wrap="none" rtlCol="0">
+            <a:spAutoFit/>
+          </a:bodyPr>
+          <a:lstStyle/>
+          <a:p>
+            <a:r>
+              <a:rPr lang="en-US" dirty="0">
+                <a:latin typeface="Centaur" panose="02030504050205020304" pitchFamily="18" charset="77"/>
+              </a:rPr>
+              <a:t>State DB</a:t>
+            </a:r>
+          </a:p>
+        </p:txBody>
+      </p:sp>
+      <p:cxnSp>
+        <p:nvCxnSpPr>
+          <p:cNvPr id="58" name="Straight Arrow Connector 57">
+            <a:extLst>
+              <a:ext uri="{FF2B5EF4-FFF2-40B4-BE49-F238E27FC236}">
+                <a16:creationId xmlns:a16="http://schemas.microsoft.com/office/drawing/2014/main" id="{24E7875F-6006-1E41-1EE8-E458CED1C809}"/>
+              </a:ext>
+            </a:extLst>
+          </p:cNvPr>
+          <p:cNvCxnSpPr>
+            <a:cxnSpLocks/>
+            <a:endCxn id="2" idx="3"/>
+          </p:cNvCxnSpPr>
+          <p:nvPr/>
+        </p:nvCxnSpPr>
+        <p:spPr>
+          <a:xfrm flipV="1">
+            <a:off x="7004114" y="4728694"/>
+            <a:ext cx="0" cy="126069"/>
+          </a:xfrm>
+          <a:prstGeom prst="straightConnector1">
+            <a:avLst/>
+          </a:prstGeom>
+          <a:ln w="19050" cap="flat" cmpd="sng" algn="ctr">
+            <a:solidFill>
+              <a:schemeClr val="dk1"/>
+            </a:solidFill>
+            <a:prstDash val="solid"/>
+            <a:round/>
+            <a:headEnd type="none" w="med" len="med"/>
+            <a:tailEnd type="arrow" w="med" len="med"/>
+          </a:ln>
+        </p:spPr>
+        <p:style>
+          <a:lnRef idx="0">
+            <a:scrgbClr r="0" g="0" b="0"/>
+          </a:lnRef>
+          <a:fillRef idx="0">
+            <a:scrgbClr r="0" g="0" b="0"/>
+          </a:fillRef>
+          <a:effectRef idx="0">
+            <a:scrgbClr r="0" g="0" b="0"/>
+          </a:effectRef>
+          <a:fontRef idx="minor">
+            <a:schemeClr val="tx1"/>
+          </a:fontRef>
+        </p:style>
+      </p:cxnSp>
+      <p:cxnSp>
+        <p:nvCxnSpPr>
+          <p:cNvPr id="60" name="Straight Arrow Connector 59">
+            <a:extLst>
+              <a:ext uri="{FF2B5EF4-FFF2-40B4-BE49-F238E27FC236}">
+                <a16:creationId xmlns:a16="http://schemas.microsoft.com/office/drawing/2014/main" id="{AFFB7350-A293-772D-8343-BE0EA6925048}"/>
+              </a:ext>
+            </a:extLst>
+          </p:cNvPr>
+          <p:cNvCxnSpPr>
+            <a:cxnSpLocks/>
+          </p:cNvCxnSpPr>
+          <p:nvPr/>
+        </p:nvCxnSpPr>
+        <p:spPr>
+          <a:xfrm flipV="1">
+            <a:off x="6993742" y="2674593"/>
+            <a:ext cx="0" cy="175056"/>
+          </a:xfrm>
+          <a:prstGeom prst="straightConnector1">
+            <a:avLst/>
+          </a:prstGeom>
+          <a:ln w="19050" cap="flat" cmpd="sng" algn="ctr">
+            <a:solidFill>
+              <a:schemeClr val="dk1"/>
+            </a:solidFill>
+            <a:prstDash val="solid"/>
+            <a:round/>
+            <a:headEnd type="none" w="med" len="med"/>
+            <a:tailEnd type="arrow" w="med" len="med"/>
+          </a:ln>
+        </p:spPr>
+        <p:style>
+          <a:lnRef idx="0">
+            <a:scrgbClr r="0" g="0" b="0"/>
+          </a:lnRef>
+          <a:fillRef idx="0">
+            <a:scrgbClr r="0" g="0" b="0"/>
+          </a:fillRef>
+          <a:effectRef idx="0">
+            <a:scrgbClr r="0" g="0" b="0"/>
+          </a:effectRef>
+          <a:fontRef idx="minor">
+            <a:schemeClr val="tx1"/>
+          </a:fontRef>
+        </p:style>
+      </p:cxnSp>
+      <p:cxnSp>
+        <p:nvCxnSpPr>
+          <p:cNvPr id="62" name="Straight Arrow Connector 61">
+            <a:extLst>
+              <a:ext uri="{FF2B5EF4-FFF2-40B4-BE49-F238E27FC236}">
+                <a16:creationId xmlns:a16="http://schemas.microsoft.com/office/drawing/2014/main" id="{CC5161DC-60D0-2D3A-18B4-D94D2054BEE4}"/>
+              </a:ext>
+            </a:extLst>
+          </p:cNvPr>
+          <p:cNvCxnSpPr>
+            <a:cxnSpLocks/>
+            <a:endCxn id="5" idx="3"/>
+          </p:cNvCxnSpPr>
+          <p:nvPr/>
+        </p:nvCxnSpPr>
+        <p:spPr>
+          <a:xfrm flipV="1">
+            <a:off x="6992736" y="1841852"/>
+            <a:ext cx="1006" cy="227830"/>
+          </a:xfrm>
+          <a:prstGeom prst="straightConnector1">
+            <a:avLst/>
+          </a:prstGeom>
+          <a:ln w="19050" cap="flat" cmpd="sng" algn="ctr">
+            <a:solidFill>
+              <a:schemeClr val="dk1"/>
+            </a:solidFill>
+            <a:prstDash val="solid"/>
+            <a:round/>
+            <a:headEnd type="none" w="med" len="med"/>
+            <a:tailEnd type="arrow" w="med" len="med"/>
+          </a:ln>
+        </p:spPr>
+        <p:style>
+          <a:lnRef idx="0">
+            <a:scrgbClr r="0" g="0" b="0"/>
+          </a:lnRef>
+          <a:fillRef idx="0">
+            <a:scrgbClr r="0" g="0" b="0"/>
+          </a:fillRef>
+          <a:effectRef idx="0">
+            <a:scrgbClr r="0" g="0" b="0"/>
+          </a:effectRef>
+          <a:fontRef idx="minor">
+            <a:schemeClr val="tx1"/>
+          </a:fontRef>
+        </p:style>
+      </p:cxnSp>
+      <p:cxnSp>
+        <p:nvCxnSpPr>
+          <p:cNvPr id="66" name="Curved Connector 65">
+            <a:extLst>
+              <a:ext uri="{FF2B5EF4-FFF2-40B4-BE49-F238E27FC236}">
+                <a16:creationId xmlns:a16="http://schemas.microsoft.com/office/drawing/2014/main" id="{386F515B-033C-2D9A-70BC-6F54A389709E}"/>
+              </a:ext>
+            </a:extLst>
+          </p:cNvPr>
+          <p:cNvCxnSpPr>
+            <a:cxnSpLocks/>
+            <a:stCxn id="5" idx="1"/>
+          </p:cNvCxnSpPr>
+          <p:nvPr/>
+        </p:nvCxnSpPr>
+        <p:spPr>
+          <a:xfrm rot="16200000" flipH="1">
+            <a:off x="7415711" y="918656"/>
+            <a:ext cx="137203" cy="981143"/>
+          </a:xfrm>
+          <a:prstGeom prst="curvedConnector4">
+            <a:avLst>
+              <a:gd name="adj1" fmla="val -47732"/>
+              <a:gd name="adj2" fmla="val 80856"/>
+            </a:avLst>
+          </a:prstGeom>
+          <a:ln w="19050" cap="flat" cmpd="sng" algn="ctr">
+            <a:solidFill>
+              <a:schemeClr val="dk1"/>
+            </a:solidFill>
+            <a:prstDash val="solid"/>
+            <a:round/>
+            <a:headEnd type="none" w="med" len="med"/>
+            <a:tailEnd type="arrow" w="med" len="med"/>
+          </a:ln>
+        </p:spPr>
+        <p:style>
+          <a:lnRef idx="0">
+            <a:scrgbClr r="0" g="0" b="0"/>
+          </a:lnRef>
+          <a:fillRef idx="0">
+            <a:scrgbClr r="0" g="0" b="0"/>
+          </a:fillRef>
+          <a:effectRef idx="0">
+            <a:scrgbClr r="0" g="0" b="0"/>
+          </a:effectRef>
+          <a:fontRef idx="minor">
+            <a:schemeClr val="tx1"/>
+          </a:fontRef>
+        </p:style>
+      </p:cxnSp>
+      <p:cxnSp>
+        <p:nvCxnSpPr>
+          <p:cNvPr id="71" name="Straight Arrow Connector 70">
+            <a:extLst>
+              <a:ext uri="{FF2B5EF4-FFF2-40B4-BE49-F238E27FC236}">
+                <a16:creationId xmlns:a16="http://schemas.microsoft.com/office/drawing/2014/main" id="{22EC83A1-E995-8348-B36A-6D214ECD7291}"/>
+              </a:ext>
+            </a:extLst>
+          </p:cNvPr>
+          <p:cNvCxnSpPr>
+            <a:cxnSpLocks/>
+            <a:stCxn id="33" idx="3"/>
+            <a:endCxn id="63" idx="1"/>
+          </p:cNvCxnSpPr>
+          <p:nvPr/>
+        </p:nvCxnSpPr>
+        <p:spPr>
+          <a:xfrm flipH="1">
+            <a:off x="8651514" y="2993334"/>
+            <a:ext cx="157" cy="182012"/>
+          </a:xfrm>
+          <a:prstGeom prst="straightConnector1">
+            <a:avLst/>
+          </a:prstGeom>
+          <a:ln w="19050" cap="flat" cmpd="sng" algn="ctr">
+            <a:solidFill>
+              <a:schemeClr val="dk1"/>
+            </a:solidFill>
+            <a:prstDash val="solid"/>
+            <a:round/>
+            <a:headEnd type="none" w="med" len="med"/>
+            <a:tailEnd type="arrow" w="med" len="med"/>
+          </a:ln>
+        </p:spPr>
+        <p:style>
+          <a:lnRef idx="0">
+            <a:scrgbClr r="0" g="0" b="0"/>
+          </a:lnRef>
+          <a:fillRef idx="0">
+            <a:scrgbClr r="0" g="0" b="0"/>
+          </a:fillRef>
+          <a:effectRef idx="0">
+            <a:scrgbClr r="0" g="0" b="0"/>
+          </a:effectRef>
+          <a:fontRef idx="minor">
+            <a:schemeClr val="tx1"/>
+          </a:fontRef>
+        </p:style>
+      </p:cxnSp>
+      <p:cxnSp>
+        <p:nvCxnSpPr>
+          <p:cNvPr id="74" name="Straight Arrow Connector 73">
+            <a:extLst>
+              <a:ext uri="{FF2B5EF4-FFF2-40B4-BE49-F238E27FC236}">
+                <a16:creationId xmlns:a16="http://schemas.microsoft.com/office/drawing/2014/main" id="{FE723C18-41DA-7359-B29C-BE6342059DC6}"/>
+              </a:ext>
+            </a:extLst>
+          </p:cNvPr>
+          <p:cNvCxnSpPr>
+            <a:cxnSpLocks/>
+            <a:stCxn id="63" idx="3"/>
+            <a:endCxn id="26" idx="1"/>
+          </p:cNvCxnSpPr>
+          <p:nvPr/>
+        </p:nvCxnSpPr>
+        <p:spPr>
+          <a:xfrm>
+            <a:off x="8651514" y="3715673"/>
+            <a:ext cx="634" cy="242847"/>
+          </a:xfrm>
+          <a:prstGeom prst="straightConnector1">
+            <a:avLst/>
+          </a:prstGeom>
+          <a:ln w="19050" cap="flat" cmpd="sng" algn="ctr">
+            <a:solidFill>
+              <a:schemeClr val="dk1"/>
+            </a:solidFill>
+            <a:prstDash val="solid"/>
+            <a:round/>
+            <a:headEnd type="none" w="med" len="med"/>
+            <a:tailEnd type="arrow" w="med" len="med"/>
+          </a:ln>
+        </p:spPr>
+        <p:style>
+          <a:lnRef idx="0">
+            <a:scrgbClr r="0" g="0" b="0"/>
+          </a:lnRef>
+          <a:fillRef idx="0">
+            <a:scrgbClr r="0" g="0" b="0"/>
+          </a:fillRef>
+          <a:effectRef idx="0">
+            <a:scrgbClr r="0" g="0" b="0"/>
+          </a:effectRef>
+          <a:fontRef idx="minor">
+            <a:schemeClr val="tx1"/>
+          </a:fontRef>
+        </p:style>
+      </p:cxnSp>
+      <p:sp>
+        <p:nvSpPr>
+          <p:cNvPr id="77" name="TextBox 76">
+            <a:extLst>
+              <a:ext uri="{FF2B5EF4-FFF2-40B4-BE49-F238E27FC236}">
+                <a16:creationId xmlns:a16="http://schemas.microsoft.com/office/drawing/2014/main" id="{83F1ACD5-E9DF-B7BB-C1C4-8D07CC47DA5B}"/>
+              </a:ext>
+            </a:extLst>
+          </p:cNvPr>
+          <p:cNvSpPr txBox="1"/>
+          <p:nvPr/>
+        </p:nvSpPr>
+        <p:spPr>
+          <a:xfrm>
+            <a:off x="230686" y="4606626"/>
+            <a:ext cx="1868460" cy="584775"/>
+          </a:xfrm>
+          <a:prstGeom prst="rect">
+            <a:avLst/>
+          </a:prstGeom>
+          <a:noFill/>
+        </p:spPr>
+        <p:txBody>
+          <a:bodyPr wrap="none" rtlCol="0">
+            <a:spAutoFit/>
+          </a:bodyPr>
+          <a:lstStyle/>
+          <a:p>
+            <a:r>
+              <a:rPr lang="en-US" sz="1600" dirty="0">
+                <a:latin typeface="Centaur" panose="02030504050205020304" pitchFamily="18" charset="77"/>
+              </a:rPr>
+              <a:t>All stores &amp; DB uses</a:t>
+            </a:r>
+            <a:br>
+              <a:rPr lang="en-US" sz="1600" dirty="0">
+                <a:latin typeface="Centaur" panose="02030504050205020304" pitchFamily="18" charset="77"/>
+              </a:rPr>
+            </a:br>
+            <a:r>
+              <a:rPr lang="en-US" sz="1600" dirty="0">
+                <a:latin typeface="Centaur" panose="02030504050205020304" pitchFamily="18" charset="77"/>
+              </a:rPr>
+              <a:t>levelDB storage library</a:t>
+            </a:r>
+          </a:p>
+        </p:txBody>
+      </p:sp>
+      <p:cxnSp>
+        <p:nvCxnSpPr>
+          <p:cNvPr id="86" name="Straight Arrow Connector 85">
+            <a:extLst>
+              <a:ext uri="{FF2B5EF4-FFF2-40B4-BE49-F238E27FC236}">
+                <a16:creationId xmlns:a16="http://schemas.microsoft.com/office/drawing/2014/main" id="{B79D2ED4-2B32-EB41-6D99-A08FFEFDCDBF}"/>
+              </a:ext>
+            </a:extLst>
+          </p:cNvPr>
+          <p:cNvCxnSpPr>
+            <a:cxnSpLocks/>
+            <a:endCxn id="17" idx="1"/>
+          </p:cNvCxnSpPr>
+          <p:nvPr/>
+        </p:nvCxnSpPr>
+        <p:spPr>
+          <a:xfrm>
+            <a:off x="3369445" y="2910616"/>
+            <a:ext cx="150164" cy="0"/>
+          </a:xfrm>
+          <a:prstGeom prst="straightConnector1">
+            <a:avLst/>
+          </a:prstGeom>
+          <a:ln w="19050" cap="flat" cmpd="sng" algn="ctr">
+            <a:solidFill>
+              <a:schemeClr val="dk1"/>
+            </a:solidFill>
+            <a:prstDash val="solid"/>
+            <a:round/>
+            <a:headEnd type="none" w="med" len="med"/>
+            <a:tailEnd type="arrow" w="med" len="med"/>
+          </a:ln>
+        </p:spPr>
+        <p:style>
+          <a:lnRef idx="0">
+            <a:scrgbClr r="0" g="0" b="0"/>
+          </a:lnRef>
+          <a:fillRef idx="0">
+            <a:scrgbClr r="0" g="0" b="0"/>
+          </a:fillRef>
+          <a:effectRef idx="0">
+            <a:scrgbClr r="0" g="0" b="0"/>
+          </a:effectRef>
+          <a:fontRef idx="minor">
+            <a:schemeClr val="tx1"/>
+          </a:fontRef>
+        </p:style>
+      </p:cxnSp>
     </p:spTree>
     <p:extLst>
       <p:ext uri="{BB962C8B-B14F-4D97-AF65-F5344CB8AC3E}">

--- a/fig/peer-with-private-data.pptx
+++ b/fig/peer-with-private-data.pptx
@@ -261,7 +261,7 @@
           <a:p>
             <a:fld id="{5FE00808-534E-DF4B-BFA1-314377E96F76}" type="datetimeFigureOut">
               <a:rPr lang="en-US" smtClean="0"/>
-              <a:t>2/18/26</a:t>
+              <a:t>2/26/26</a:t>
             </a:fld>
             <a:endParaRPr lang="en-US"/>
           </a:p>
@@ -461,7 +461,7 @@
           <a:p>
             <a:fld id="{5FE00808-534E-DF4B-BFA1-314377E96F76}" type="datetimeFigureOut">
               <a:rPr lang="en-US" smtClean="0"/>
-              <a:t>2/18/26</a:t>
+              <a:t>2/26/26</a:t>
             </a:fld>
             <a:endParaRPr lang="en-US"/>
           </a:p>
@@ -671,7 +671,7 @@
           <a:p>
             <a:fld id="{5FE00808-534E-DF4B-BFA1-314377E96F76}" type="datetimeFigureOut">
               <a:rPr lang="en-US" smtClean="0"/>
-              <a:t>2/18/26</a:t>
+              <a:t>2/26/26</a:t>
             </a:fld>
             <a:endParaRPr lang="en-US"/>
           </a:p>
@@ -871,7 +871,7 @@
           <a:p>
             <a:fld id="{5FE00808-534E-DF4B-BFA1-314377E96F76}" type="datetimeFigureOut">
               <a:rPr lang="en-US" smtClean="0"/>
-              <a:t>2/18/26</a:t>
+              <a:t>2/26/26</a:t>
             </a:fld>
             <a:endParaRPr lang="en-US"/>
           </a:p>
@@ -1147,7 +1147,7 @@
           <a:p>
             <a:fld id="{5FE00808-534E-DF4B-BFA1-314377E96F76}" type="datetimeFigureOut">
               <a:rPr lang="en-US" smtClean="0"/>
-              <a:t>2/18/26</a:t>
+              <a:t>2/26/26</a:t>
             </a:fld>
             <a:endParaRPr lang="en-US"/>
           </a:p>
@@ -1415,7 +1415,7 @@
           <a:p>
             <a:fld id="{5FE00808-534E-DF4B-BFA1-314377E96F76}" type="datetimeFigureOut">
               <a:rPr lang="en-US" smtClean="0"/>
-              <a:t>2/18/26</a:t>
+              <a:t>2/26/26</a:t>
             </a:fld>
             <a:endParaRPr lang="en-US"/>
           </a:p>
@@ -1830,7 +1830,7 @@
           <a:p>
             <a:fld id="{5FE00808-534E-DF4B-BFA1-314377E96F76}" type="datetimeFigureOut">
               <a:rPr lang="en-US" smtClean="0"/>
-              <a:t>2/18/26</a:t>
+              <a:t>2/26/26</a:t>
             </a:fld>
             <a:endParaRPr lang="en-US"/>
           </a:p>
@@ -1972,7 +1972,7 @@
           <a:p>
             <a:fld id="{5FE00808-534E-DF4B-BFA1-314377E96F76}" type="datetimeFigureOut">
               <a:rPr lang="en-US" smtClean="0"/>
-              <a:t>2/18/26</a:t>
+              <a:t>2/26/26</a:t>
             </a:fld>
             <a:endParaRPr lang="en-US"/>
           </a:p>
@@ -2085,7 +2085,7 @@
           <a:p>
             <a:fld id="{5FE00808-534E-DF4B-BFA1-314377E96F76}" type="datetimeFigureOut">
               <a:rPr lang="en-US" smtClean="0"/>
-              <a:t>2/18/26</a:t>
+              <a:t>2/26/26</a:t>
             </a:fld>
             <a:endParaRPr lang="en-US"/>
           </a:p>
@@ -2398,7 +2398,7 @@
           <a:p>
             <a:fld id="{5FE00808-534E-DF4B-BFA1-314377E96F76}" type="datetimeFigureOut">
               <a:rPr lang="en-US" smtClean="0"/>
-              <a:t>2/18/26</a:t>
+              <a:t>2/26/26</a:t>
             </a:fld>
             <a:endParaRPr lang="en-US"/>
           </a:p>
@@ -2687,7 +2687,7 @@
           <a:p>
             <a:fld id="{5FE00808-534E-DF4B-BFA1-314377E96F76}" type="datetimeFigureOut">
               <a:rPr lang="en-US" smtClean="0"/>
-              <a:t>2/18/26</a:t>
+              <a:t>2/26/26</a:t>
             </a:fld>
             <a:endParaRPr lang="en-US"/>
           </a:p>
@@ -2930,7 +2930,7 @@
           <a:p>
             <a:fld id="{5FE00808-534E-DF4B-BFA1-314377E96F76}" type="datetimeFigureOut">
               <a:rPr lang="en-US" smtClean="0"/>
-              <a:t>2/18/26</a:t>
+              <a:t>2/26/26</a:t>
             </a:fld>
             <a:endParaRPr lang="en-US"/>
           </a:p>
@@ -3361,7 +3361,7 @@
         </p:nvSpPr>
         <p:spPr>
           <a:xfrm>
-            <a:off x="8025267" y="1871753"/>
+            <a:off x="8495507" y="1871753"/>
             <a:ext cx="1227472" cy="877543"/>
           </a:xfrm>
           <a:prstGeom prst="roundRect">
@@ -3415,8 +3415,8 @@
         </p:nvSpPr>
         <p:spPr>
           <a:xfrm>
-            <a:off x="2203978" y="1114504"/>
-            <a:ext cx="7290954" cy="4074517"/>
+            <a:off x="2203978" y="1134738"/>
+            <a:ext cx="7898489" cy="3955056"/>
           </a:xfrm>
           <a:prstGeom prst="rect">
             <a:avLst/>
@@ -3451,52 +3451,22 @@
           </a:p>
         </p:txBody>
       </p:sp>
-      <p:pic>
-        <p:nvPicPr>
-          <p:cNvPr id="7" name="Picture 6">
-            <a:extLst>
-              <a:ext uri="{FF2B5EF4-FFF2-40B4-BE49-F238E27FC236}">
-                <a16:creationId xmlns:a16="http://schemas.microsoft.com/office/drawing/2014/main" id="{E29A2E62-88D8-8444-8A2A-7B0245B91F73}"/>
-              </a:ext>
-            </a:extLst>
-          </p:cNvPr>
-          <p:cNvPicPr>
-            <a:picLocks noChangeAspect="1"/>
-          </p:cNvPicPr>
+      <p:sp>
+        <p:nvSpPr>
+          <p:cNvPr id="8" name="Rounded Rectangle 7">
+            <a:extLst>
+              <a:ext uri="{FF2B5EF4-FFF2-40B4-BE49-F238E27FC236}">
+                <a16:creationId xmlns:a16="http://schemas.microsoft.com/office/drawing/2014/main" id="{98CC5B81-788C-7A4A-8795-795FD1EFF9D7}"/>
+              </a:ext>
+            </a:extLst>
+          </p:cNvPr>
+          <p:cNvSpPr/>
           <p:nvPr/>
-        </p:nvPicPr>
-        <p:blipFill>
-          <a:blip r:embed="rId2"/>
-          <a:stretch>
-            <a:fillRect/>
-          </a:stretch>
-        </p:blipFill>
+        </p:nvSpPr>
         <p:spPr>
           <a:xfrm>
-            <a:off x="1567190" y="1148025"/>
-            <a:ext cx="636789" cy="226060"/>
-          </a:xfrm>
-          <a:prstGeom prst="rect">
-            <a:avLst/>
-          </a:prstGeom>
-        </p:spPr>
-      </p:pic>
-      <p:sp>
-        <p:nvSpPr>
-          <p:cNvPr id="8" name="Rounded Rectangle 7">
-            <a:extLst>
-              <a:ext uri="{FF2B5EF4-FFF2-40B4-BE49-F238E27FC236}">
-                <a16:creationId xmlns:a16="http://schemas.microsoft.com/office/drawing/2014/main" id="{98CC5B81-788C-7A4A-8795-795FD1EFF9D7}"/>
-              </a:ext>
-            </a:extLst>
-          </p:cNvPr>
-          <p:cNvSpPr/>
-          <p:nvPr/>
-        </p:nvSpPr>
-        <p:spPr>
-          <a:xfrm>
-            <a:off x="4391510" y="1159253"/>
-            <a:ext cx="1582688" cy="307843"/>
+            <a:off x="4988660" y="1473111"/>
+            <a:ext cx="1200908" cy="468728"/>
           </a:xfrm>
           <a:prstGeom prst="roundRect">
             <a:avLst/>
@@ -3545,68 +3515,6 @@
       </p:sp>
       <p:sp>
         <p:nvSpPr>
-          <p:cNvPr id="10" name="Multidocument 8">
-            <a:extLst>
-              <a:ext uri="{FF2B5EF4-FFF2-40B4-BE49-F238E27FC236}">
-                <a16:creationId xmlns:a16="http://schemas.microsoft.com/office/drawing/2014/main" id="{F1A9925A-667B-8246-BC23-9203B908959A}"/>
-              </a:ext>
-            </a:extLst>
-          </p:cNvPr>
-          <p:cNvSpPr/>
-          <p:nvPr/>
-        </p:nvSpPr>
-        <p:spPr>
-          <a:xfrm>
-            <a:off x="543699" y="1101381"/>
-            <a:ext cx="1006353" cy="489858"/>
-          </a:xfrm>
-          <a:prstGeom prst="flowChartMultidocument">
-            <a:avLst/>
-          </a:prstGeom>
-          <a:solidFill>
-            <a:schemeClr val="bg1"/>
-          </a:solidFill>
-          <a:ln>
-            <a:solidFill>
-              <a:schemeClr val="tx1"/>
-            </a:solidFill>
-          </a:ln>
-        </p:spPr>
-        <p:style>
-          <a:lnRef idx="2">
-            <a:schemeClr val="accent1">
-              <a:shade val="50000"/>
-            </a:schemeClr>
-          </a:lnRef>
-          <a:fillRef idx="1">
-            <a:schemeClr val="accent1"/>
-          </a:fillRef>
-          <a:effectRef idx="0">
-            <a:schemeClr val="accent1"/>
-          </a:effectRef>
-          <a:fontRef idx="minor">
-            <a:schemeClr val="lt1"/>
-          </a:fontRef>
-        </p:style>
-        <p:txBody>
-          <a:bodyPr rtlCol="0" anchor="ctr"/>
-          <a:lstStyle/>
-          <a:p>
-            <a:pPr algn="ctr"/>
-            <a:r>
-              <a:rPr lang="en-US" sz="2000" b="1" dirty="0">
-                <a:solidFill>
-                  <a:schemeClr val="tx1"/>
-                </a:solidFill>
-                <a:latin typeface="Centaur" panose="02030504050205020304" pitchFamily="18" charset="77"/>
-              </a:rPr>
-              <a:t>Clients</a:t>
-            </a:r>
-          </a:p>
-        </p:txBody>
-      </p:sp>
-      <p:sp>
-        <p:nvSpPr>
           <p:cNvPr id="13" name="Rounded Rectangle 12">
             <a:extLst>
               <a:ext uri="{FF2B5EF4-FFF2-40B4-BE49-F238E27FC236}">
@@ -3663,172 +3571,6 @@
                 <a:latin typeface="Centaur" panose="02030504050205020304" pitchFamily="18" charset="77"/>
               </a:rPr>
               <a:t>Gossip</a:t>
-            </a:r>
-          </a:p>
-        </p:txBody>
-      </p:sp>
-      <p:sp>
-        <p:nvSpPr>
-          <p:cNvPr id="14" name="Oval 13">
-            <a:extLst>
-              <a:ext uri="{FF2B5EF4-FFF2-40B4-BE49-F238E27FC236}">
-                <a16:creationId xmlns:a16="http://schemas.microsoft.com/office/drawing/2014/main" id="{23955869-2D18-7D49-A14C-D13B27D3D671}"/>
-              </a:ext>
-            </a:extLst>
-          </p:cNvPr>
-          <p:cNvSpPr/>
-          <p:nvPr/>
-        </p:nvSpPr>
-        <p:spPr>
-          <a:xfrm>
-            <a:off x="114641" y="1951774"/>
-            <a:ext cx="1518747" cy="522515"/>
-          </a:xfrm>
-          <a:prstGeom prst="ellipse">
-            <a:avLst/>
-          </a:prstGeom>
-          <a:solidFill>
-            <a:schemeClr val="bg1"/>
-          </a:solidFill>
-          <a:ln>
-            <a:solidFill>
-              <a:srgbClr val="7030A0"/>
-            </a:solidFill>
-          </a:ln>
-        </p:spPr>
-        <p:style>
-          <a:lnRef idx="2">
-            <a:schemeClr val="accent1">
-              <a:shade val="50000"/>
-            </a:schemeClr>
-          </a:lnRef>
-          <a:fillRef idx="1">
-            <a:schemeClr val="accent1"/>
-          </a:fillRef>
-          <a:effectRef idx="0">
-            <a:schemeClr val="accent1"/>
-          </a:effectRef>
-          <a:fontRef idx="minor">
-            <a:schemeClr val="lt1"/>
-          </a:fontRef>
-        </p:style>
-        <p:txBody>
-          <a:bodyPr rtlCol="0" anchor="ctr"/>
-          <a:lstStyle/>
-          <a:p>
-            <a:pPr algn="ctr"/>
-            <a:r>
-              <a:rPr lang="en-US" sz="2000" b="1" dirty="0">
-                <a:solidFill>
-                  <a:schemeClr val="tx1"/>
-                </a:solidFill>
-                <a:latin typeface="Centaur" panose="02030504050205020304" pitchFamily="18" charset="77"/>
-              </a:rPr>
-              <a:t>Ordering</a:t>
-            </a:r>
-          </a:p>
-          <a:p>
-            <a:pPr algn="ctr"/>
-            <a:r>
-              <a:rPr lang="en-US" sz="2000" b="1" dirty="0">
-                <a:solidFill>
-                  <a:schemeClr val="tx1"/>
-                </a:solidFill>
-                <a:latin typeface="Centaur" panose="02030504050205020304" pitchFamily="18" charset="77"/>
-              </a:rPr>
-              <a:t>Service</a:t>
-            </a:r>
-          </a:p>
-        </p:txBody>
-      </p:sp>
-      <p:pic>
-        <p:nvPicPr>
-          <p:cNvPr id="15" name="Picture 14">
-            <a:extLst>
-              <a:ext uri="{FF2B5EF4-FFF2-40B4-BE49-F238E27FC236}">
-                <a16:creationId xmlns:a16="http://schemas.microsoft.com/office/drawing/2014/main" id="{F4D82F2E-A05C-1342-9E7D-7C88E81DCDE5}"/>
-              </a:ext>
-            </a:extLst>
-          </p:cNvPr>
-          <p:cNvPicPr>
-            <a:picLocks noChangeAspect="1"/>
-          </p:cNvPicPr>
-          <p:nvPr/>
-        </p:nvPicPr>
-        <p:blipFill>
-          <a:blip r:embed="rId2"/>
-          <a:stretch>
-            <a:fillRect/>
-          </a:stretch>
-        </p:blipFill>
-        <p:spPr>
-          <a:xfrm>
-            <a:off x="1556302" y="2129883"/>
-            <a:ext cx="636789" cy="226060"/>
-          </a:xfrm>
-          <a:prstGeom prst="rect">
-            <a:avLst/>
-          </a:prstGeom>
-        </p:spPr>
-      </p:pic>
-      <p:sp>
-        <p:nvSpPr>
-          <p:cNvPr id="16" name="Rectangle 15">
-            <a:extLst>
-              <a:ext uri="{FF2B5EF4-FFF2-40B4-BE49-F238E27FC236}">
-                <a16:creationId xmlns:a16="http://schemas.microsoft.com/office/drawing/2014/main" id="{D537ADD2-34C5-6645-933D-C9B58719684E}"/>
-              </a:ext>
-            </a:extLst>
-          </p:cNvPr>
-          <p:cNvSpPr/>
-          <p:nvPr/>
-        </p:nvSpPr>
-        <p:spPr>
-          <a:xfrm>
-            <a:off x="151237" y="2674593"/>
-            <a:ext cx="1371600" cy="443213"/>
-          </a:xfrm>
-          <a:prstGeom prst="rect">
-            <a:avLst/>
-          </a:prstGeom>
-          <a:solidFill>
-            <a:schemeClr val="bg1"/>
-          </a:solidFill>
-          <a:ln w="22225">
-            <a:solidFill>
-              <a:schemeClr val="tx1"/>
-            </a:solidFill>
-          </a:ln>
-        </p:spPr>
-        <p:style>
-          <a:lnRef idx="2">
-            <a:schemeClr val="accent1">
-              <a:shade val="50000"/>
-            </a:schemeClr>
-          </a:lnRef>
-          <a:fillRef idx="1">
-            <a:schemeClr val="accent1"/>
-          </a:fillRef>
-          <a:effectRef idx="0">
-            <a:schemeClr val="accent1"/>
-          </a:effectRef>
-          <a:fontRef idx="minor">
-            <a:schemeClr val="lt1"/>
-          </a:fontRef>
-        </p:style>
-        <p:txBody>
-          <a:bodyPr rtlCol="0" anchor="ctr"/>
-          <a:lstStyle/>
-          <a:p>
-            <a:pPr algn="ctr"/>
-            <a:r>
-              <a:rPr lang="en-US" sz="2000" dirty="0">
-                <a:solidFill>
-                  <a:schemeClr val="tx1"/>
-                </a:solidFill>
-                <a:latin typeface="Centaur" panose="02030504050205020304" pitchFamily="18" charset="77"/>
-              </a:rPr>
-              <a:t>Other Peers</a:t>
             </a:r>
           </a:p>
         </p:txBody>
@@ -4265,82 +4007,22 @@
           </a:p>
         </p:txBody>
       </p:sp>
-      <p:pic>
-        <p:nvPicPr>
-          <p:cNvPr id="21" name="Picture 20">
-            <a:extLst>
-              <a:ext uri="{FF2B5EF4-FFF2-40B4-BE49-F238E27FC236}">
-                <a16:creationId xmlns:a16="http://schemas.microsoft.com/office/drawing/2014/main" id="{799B800B-1EDC-6D49-8F63-1EEF1E30D7AE}"/>
-              </a:ext>
-            </a:extLst>
-          </p:cNvPr>
-          <p:cNvPicPr>
-            <a:picLocks noChangeAspect="1"/>
-          </p:cNvPicPr>
+      <p:sp>
+        <p:nvSpPr>
+          <p:cNvPr id="53" name="Rounded Rectangle 52">
+            <a:extLst>
+              <a:ext uri="{FF2B5EF4-FFF2-40B4-BE49-F238E27FC236}">
+                <a16:creationId xmlns:a16="http://schemas.microsoft.com/office/drawing/2014/main" id="{D6277FEF-0F6C-7749-AD34-B201F814D62D}"/>
+              </a:ext>
+            </a:extLst>
+          </p:cNvPr>
+          <p:cNvSpPr/>
           <p:nvPr/>
-        </p:nvPicPr>
-        <p:blipFill>
-          <a:blip r:embed="rId2"/>
-          <a:stretch>
-            <a:fillRect/>
-          </a:stretch>
-        </p:blipFill>
+        </p:nvSpPr>
         <p:spPr>
           <a:xfrm>
-            <a:off x="1550052" y="2767274"/>
-            <a:ext cx="636789" cy="226060"/>
-          </a:xfrm>
-          <a:prstGeom prst="rect">
-            <a:avLst/>
-          </a:prstGeom>
-        </p:spPr>
-      </p:pic>
-      <p:pic>
-        <p:nvPicPr>
-          <p:cNvPr id="35" name="Picture 34">
-            <a:extLst>
-              <a:ext uri="{FF2B5EF4-FFF2-40B4-BE49-F238E27FC236}">
-                <a16:creationId xmlns:a16="http://schemas.microsoft.com/office/drawing/2014/main" id="{AA1AD6FE-3FDD-CB48-9220-9872325C8318}"/>
-              </a:ext>
-            </a:extLst>
-          </p:cNvPr>
-          <p:cNvPicPr>
-            <a:picLocks noChangeAspect="1"/>
-          </p:cNvPicPr>
-          <p:nvPr/>
-        </p:nvPicPr>
-        <p:blipFill>
-          <a:blip r:embed="rId2"/>
-          <a:stretch>
-            <a:fillRect/>
-          </a:stretch>
-        </p:blipFill>
-        <p:spPr>
-          <a:xfrm>
-            <a:off x="654115" y="1650950"/>
-            <a:ext cx="636789" cy="226060"/>
-          </a:xfrm>
-          <a:prstGeom prst="rect">
-            <a:avLst/>
-          </a:prstGeom>
-        </p:spPr>
-      </p:pic>
-      <p:sp>
-        <p:nvSpPr>
-          <p:cNvPr id="53" name="Rounded Rectangle 52">
-            <a:extLst>
-              <a:ext uri="{FF2B5EF4-FFF2-40B4-BE49-F238E27FC236}">
-                <a16:creationId xmlns:a16="http://schemas.microsoft.com/office/drawing/2014/main" id="{D6277FEF-0F6C-7749-AD34-B201F814D62D}"/>
-              </a:ext>
-            </a:extLst>
-          </p:cNvPr>
-          <p:cNvSpPr/>
-          <p:nvPr/>
-        </p:nvSpPr>
-        <p:spPr>
-          <a:xfrm>
-            <a:off x="2383640" y="4854763"/>
-            <a:ext cx="5985673" cy="275489"/>
+            <a:off x="6265288" y="1240197"/>
+            <a:ext cx="3722734" cy="3752311"/>
           </a:xfrm>
           <a:prstGeom prst="roundRect">
             <a:avLst/>
@@ -4375,6 +4057,105 @@
           <a:lstStyle/>
           <a:p>
             <a:pPr algn="ctr"/>
+            <a:endParaRPr lang="en-US" sz="2000" b="1" dirty="0">
+              <a:solidFill>
+                <a:schemeClr val="tx1"/>
+              </a:solidFill>
+              <a:latin typeface="Centaur" panose="02030504050205020304" pitchFamily="18" charset="77"/>
+            </a:endParaRPr>
+          </a:p>
+          <a:p>
+            <a:pPr algn="ctr"/>
+            <a:endParaRPr lang="en-US" sz="2000" b="1" dirty="0">
+              <a:solidFill>
+                <a:schemeClr val="tx1"/>
+              </a:solidFill>
+              <a:latin typeface="Centaur" panose="02030504050205020304" pitchFamily="18" charset="77"/>
+            </a:endParaRPr>
+          </a:p>
+          <a:p>
+            <a:pPr algn="ctr"/>
+            <a:endParaRPr lang="en-US" sz="2000" b="1" dirty="0">
+              <a:solidFill>
+                <a:schemeClr val="tx1"/>
+              </a:solidFill>
+              <a:latin typeface="Centaur" panose="02030504050205020304" pitchFamily="18" charset="77"/>
+            </a:endParaRPr>
+          </a:p>
+          <a:p>
+            <a:pPr algn="ctr"/>
+            <a:endParaRPr lang="en-US" sz="2000" b="1" dirty="0">
+              <a:solidFill>
+                <a:schemeClr val="tx1"/>
+              </a:solidFill>
+              <a:latin typeface="Centaur" panose="02030504050205020304" pitchFamily="18" charset="77"/>
+            </a:endParaRPr>
+          </a:p>
+          <a:p>
+            <a:pPr algn="ctr"/>
+            <a:endParaRPr lang="en-US" sz="2000" b="1" dirty="0">
+              <a:solidFill>
+                <a:schemeClr val="tx1"/>
+              </a:solidFill>
+              <a:latin typeface="Centaur" panose="02030504050205020304" pitchFamily="18" charset="77"/>
+            </a:endParaRPr>
+          </a:p>
+          <a:p>
+            <a:pPr algn="ctr"/>
+            <a:endParaRPr lang="en-US" sz="2000" b="1" dirty="0">
+              <a:solidFill>
+                <a:schemeClr val="tx1"/>
+              </a:solidFill>
+              <a:latin typeface="Centaur" panose="02030504050205020304" pitchFamily="18" charset="77"/>
+            </a:endParaRPr>
+          </a:p>
+          <a:p>
+            <a:pPr algn="ctr"/>
+            <a:endParaRPr lang="en-US" sz="2000" b="1" dirty="0">
+              <a:solidFill>
+                <a:schemeClr val="tx1"/>
+              </a:solidFill>
+              <a:latin typeface="Centaur" panose="02030504050205020304" pitchFamily="18" charset="77"/>
+            </a:endParaRPr>
+          </a:p>
+          <a:p>
+            <a:pPr algn="ctr"/>
+            <a:endParaRPr lang="en-US" sz="2000" b="1" dirty="0">
+              <a:solidFill>
+                <a:schemeClr val="tx1"/>
+              </a:solidFill>
+              <a:latin typeface="Centaur" panose="02030504050205020304" pitchFamily="18" charset="77"/>
+            </a:endParaRPr>
+          </a:p>
+          <a:p>
+            <a:pPr algn="ctr"/>
+            <a:endParaRPr lang="en-US" sz="2000" b="1" dirty="0">
+              <a:solidFill>
+                <a:schemeClr val="tx1"/>
+              </a:solidFill>
+              <a:latin typeface="Centaur" panose="02030504050205020304" pitchFamily="18" charset="77"/>
+            </a:endParaRPr>
+          </a:p>
+          <a:p>
+            <a:pPr algn="ctr"/>
+            <a:endParaRPr lang="en-US" sz="2000" b="1" dirty="0">
+              <a:solidFill>
+                <a:schemeClr val="tx1"/>
+              </a:solidFill>
+              <a:latin typeface="Centaur" panose="02030504050205020304" pitchFamily="18" charset="77"/>
+            </a:endParaRPr>
+          </a:p>
+          <a:p>
+            <a:pPr algn="ctr"/>
+            <a:endParaRPr lang="en-US" sz="2000" b="1" dirty="0">
+              <a:solidFill>
+                <a:schemeClr val="tx1"/>
+              </a:solidFill>
+              <a:latin typeface="Centaur" panose="02030504050205020304" pitchFamily="18" charset="77"/>
+            </a:endParaRPr>
+          </a:p>
+          <a:p>
+            <a:pPr algn="ctr"/>
             <a:r>
               <a:rPr lang="en-US" sz="2000" b="1" dirty="0">
                 <a:solidFill>
@@ -4408,7 +4189,9 @@
             <a:avLst/>
           </a:prstGeom>
           <a:solidFill>
-            <a:srgbClr val="097C7A"/>
+            <a:schemeClr val="bg1">
+              <a:lumMod val="50000"/>
+            </a:schemeClr>
           </a:solidFill>
           <a:ln>
             <a:solidFill>
@@ -4470,7 +4253,9 @@
             <a:avLst/>
           </a:prstGeom>
           <a:solidFill>
-            <a:srgbClr val="097C7A"/>
+            <a:schemeClr val="bg1">
+              <a:lumMod val="50000"/>
+            </a:schemeClr>
           </a:solidFill>
           <a:ln>
             <a:solidFill>
@@ -4526,7 +4311,7 @@
           <p:nvPr/>
         </p:nvPicPr>
         <p:blipFill>
-          <a:blip r:embed="rId3"/>
+          <a:blip r:embed="rId2"/>
           <a:srcRect t="27312" r="67536" b="53481"/>
           <a:stretch>
             <a:fillRect/>
@@ -4542,60 +4327,6 @@
           </a:prstGeom>
         </p:spPr>
       </p:pic>
-      <p:sp>
-        <p:nvSpPr>
-          <p:cNvPr id="29" name="Rectangle 28">
-            <a:extLst>
-              <a:ext uri="{FF2B5EF4-FFF2-40B4-BE49-F238E27FC236}">
-                <a16:creationId xmlns:a16="http://schemas.microsoft.com/office/drawing/2014/main" id="{2991880D-4505-A5BC-076F-24E350042803}"/>
-              </a:ext>
-            </a:extLst>
-          </p:cNvPr>
-          <p:cNvSpPr/>
-          <p:nvPr/>
-        </p:nvSpPr>
-        <p:spPr>
-          <a:xfrm>
-            <a:off x="6032163" y="1151119"/>
-            <a:ext cx="703124" cy="321090"/>
-          </a:xfrm>
-          <a:prstGeom prst="rect">
-            <a:avLst/>
-          </a:prstGeom>
-          <a:solidFill>
-            <a:schemeClr val="bg1"/>
-          </a:solidFill>
-          <a:ln>
-            <a:solidFill>
-              <a:schemeClr val="bg1"/>
-            </a:solidFill>
-          </a:ln>
-        </p:spPr>
-        <p:style>
-          <a:lnRef idx="2">
-            <a:schemeClr val="accent1">
-              <a:shade val="15000"/>
-            </a:schemeClr>
-          </a:lnRef>
-          <a:fillRef idx="1">
-            <a:schemeClr val="accent1"/>
-          </a:fillRef>
-          <a:effectRef idx="0">
-            <a:schemeClr val="accent1"/>
-          </a:effectRef>
-          <a:fontRef idx="minor">
-            <a:schemeClr val="lt1"/>
-          </a:fontRef>
-        </p:style>
-        <p:txBody>
-          <a:bodyPr rtlCol="0" anchor="ctr"/>
-          <a:lstStyle/>
-          <a:p>
-            <a:pPr algn="ctr"/>
-            <a:endParaRPr lang="en-US"/>
-          </a:p>
-        </p:txBody>
-      </p:sp>
       <p:cxnSp>
         <p:nvCxnSpPr>
           <p:cNvPr id="31" name="Curved Connector 30">
@@ -4607,20 +4338,19 @@
           </p:cNvPr>
           <p:cNvCxnSpPr>
             <a:cxnSpLocks/>
-            <a:stCxn id="8" idx="3"/>
+            <a:stCxn id="8" idx="2"/>
             <a:endCxn id="28" idx="0"/>
           </p:cNvCxnSpPr>
           <p:nvPr/>
         </p:nvCxnSpPr>
         <p:spPr>
-          <a:xfrm flipH="1">
-            <a:off x="5363099" y="1313175"/>
-            <a:ext cx="611099" cy="2085243"/>
-          </a:xfrm>
-          <a:prstGeom prst="curvedConnector4">
+          <a:xfrm rot="5400000">
+            <a:off x="4747818" y="2557121"/>
+            <a:ext cx="1456579" cy="226015"/>
+          </a:xfrm>
+          <a:prstGeom prst="curvedConnector3">
             <a:avLst>
-              <a:gd name="adj1" fmla="val -37408"/>
-              <a:gd name="adj2" fmla="val 53691"/>
+              <a:gd name="adj1" fmla="val 50000"/>
             </a:avLst>
           </a:prstGeom>
           <a:ln w="19050" cap="flat" cmpd="sng" algn="ctr">
@@ -4711,8 +4441,8 @@
         </p:nvSpPr>
         <p:spPr>
           <a:xfrm>
-            <a:off x="6455262" y="2069682"/>
-            <a:ext cx="1089102" cy="604911"/>
+            <a:off x="6342631" y="2191607"/>
+            <a:ext cx="1603608" cy="369793"/>
           </a:xfrm>
           <a:prstGeom prst="verticalScroll">
             <a:avLst/>
@@ -4749,24 +4479,7 @@
                 </a:solidFill>
                 <a:latin typeface="Centaur" panose="02030504050205020304" pitchFamily="18" charset="77"/>
               </a:rPr>
-              <a:t>Block</a:t>
-            </a:r>
-            <a:br>
-              <a:rPr lang="en-US" sz="2000" dirty="0">
-                <a:solidFill>
-                  <a:schemeClr val="tx1"/>
-                </a:solidFill>
-                <a:latin typeface="Centaur" panose="02030504050205020304" pitchFamily="18" charset="77"/>
-              </a:rPr>
-            </a:br>
-            <a:r>
-              <a:rPr lang="en-US" sz="2000" dirty="0">
-                <a:solidFill>
-                  <a:schemeClr val="tx1"/>
-                </a:solidFill>
-                <a:latin typeface="Centaur" panose="02030504050205020304" pitchFamily="18" charset="77"/>
-              </a:rPr>
-              <a:t>Store</a:t>
+              <a:t>Block Store</a:t>
             </a:r>
           </a:p>
         </p:txBody>
@@ -4789,7 +4502,7 @@
         <p:spPr>
           <a:xfrm>
             <a:off x="5148773" y="2179238"/>
-            <a:ext cx="1234952" cy="939563"/>
+            <a:ext cx="1364153" cy="1153436"/>
           </a:xfrm>
           <a:prstGeom prst="curvedConnector3">
             <a:avLst/>
@@ -4833,8 +4546,8 @@
         </p:nvSpPr>
         <p:spPr>
           <a:xfrm>
-            <a:off x="7938005" y="3175346"/>
-            <a:ext cx="1427018" cy="540327"/>
+            <a:off x="8295767" y="3187153"/>
+            <a:ext cx="1427018" cy="375224"/>
           </a:xfrm>
           <a:prstGeom prst="can">
             <a:avLst/>
@@ -4895,11 +4608,16 @@
         </p:nvGrpSpPr>
         <p:grpSpPr>
           <a:xfrm>
-            <a:off x="6379114" y="2854826"/>
-            <a:ext cx="1249999" cy="1873868"/>
+            <a:off x="6512926" y="2854826"/>
+            <a:ext cx="1595770" cy="1873868"/>
             <a:chOff x="9773521" y="3301452"/>
             <a:chExt cx="1249999" cy="1828800"/>
           </a:xfrm>
+          <a:solidFill>
+            <a:schemeClr val="bg1">
+              <a:lumMod val="50000"/>
+            </a:schemeClr>
+          </a:solidFill>
         </p:grpSpPr>
         <p:sp>
           <p:nvSpPr>
@@ -4921,9 +4639,7 @@
             <a:prstGeom prst="can">
               <a:avLst/>
             </a:prstGeom>
-            <a:solidFill>
-              <a:srgbClr val="097C7A"/>
-            </a:solidFill>
+            <a:grpFill/>
           </p:spPr>
           <p:style>
             <a:lnRef idx="2">
@@ -5025,9 +4741,7 @@
             <a:prstGeom prst="rect">
               <a:avLst/>
             </a:prstGeom>
-            <a:solidFill>
-              <a:srgbClr val="097C7A"/>
-            </a:solidFill>
+            <a:grpFill/>
             <a:ln>
               <a:solidFill>
                 <a:schemeClr val="bg1"/>
@@ -5056,18 +4770,18 @@
             <a:p>
               <a:pPr algn="ctr"/>
               <a:r>
-                <a:rPr lang="en-US" sz="1400" dirty="0">
+                <a:rPr lang="en-US" sz="1600" dirty="0">
                   <a:latin typeface="Centaur" panose="02030504050205020304" pitchFamily="18" charset="77"/>
                 </a:rPr>
                 <a:t>Missing</a:t>
               </a:r>
               <a:br>
-                <a:rPr lang="en-US" sz="1400" dirty="0">
+                <a:rPr lang="en-US" sz="1600" dirty="0">
                   <a:latin typeface="Centaur" panose="02030504050205020304" pitchFamily="18" charset="77"/>
                 </a:rPr>
               </a:br>
               <a:r>
-                <a:rPr lang="en-US" sz="1400" dirty="0">
+                <a:rPr lang="en-US" sz="1600" dirty="0">
                   <a:latin typeface="Centaur" panose="02030504050205020304" pitchFamily="18" charset="77"/>
                 </a:rPr>
                 <a:t>eligible &amp; ineligible data</a:t>
@@ -5095,9 +4809,7 @@
             <a:prstGeom prst="rect">
               <a:avLst/>
             </a:prstGeom>
-            <a:solidFill>
-              <a:srgbClr val="097C7A"/>
-            </a:solidFill>
+            <a:grpFill/>
             <a:ln>
               <a:solidFill>
                 <a:schemeClr val="bg1"/>
@@ -5126,7 +4838,7 @@
             <a:p>
               <a:pPr algn="ctr"/>
               <a:r>
-                <a:rPr lang="en-US" sz="1400" dirty="0">
+                <a:rPr lang="en-US" sz="1600" dirty="0">
                   <a:latin typeface="Centaur" panose="02030504050205020304" pitchFamily="18" charset="77"/>
                 </a:rPr>
                 <a:t>Private data history</a:t>
@@ -5149,8 +4861,8 @@
         </p:nvSpPr>
         <p:spPr>
           <a:xfrm>
-            <a:off x="7974884" y="1313175"/>
-            <a:ext cx="1353574" cy="1680159"/>
+            <a:off x="8184415" y="1313175"/>
+            <a:ext cx="1614283" cy="1680159"/>
           </a:xfrm>
           <a:prstGeom prst="can">
             <a:avLst/>
@@ -5251,8 +4963,8 @@
         </p:nvGrpSpPr>
         <p:grpSpPr>
           <a:xfrm>
-            <a:off x="8028627" y="2017205"/>
-            <a:ext cx="1250504" cy="885387"/>
+            <a:off x="8210903" y="2017205"/>
+            <a:ext cx="1538468" cy="885387"/>
             <a:chOff x="10206681" y="1941839"/>
             <a:chExt cx="1250504" cy="885387"/>
           </a:xfrm>
@@ -5357,7 +5069,7 @@
             <a:p>
               <a:pPr algn="ctr"/>
               <a:r>
-                <a:rPr lang="en-US" sz="1400" dirty="0">
+                <a:rPr lang="en-US" sz="1600" dirty="0">
                   <a:solidFill>
                     <a:schemeClr val="tx1"/>
                   </a:solidFill>
@@ -5389,7 +5101,9 @@
               <a:avLst/>
             </a:prstGeom>
             <a:solidFill>
-              <a:srgbClr val="097C7A"/>
+              <a:schemeClr val="bg1">
+                <a:lumMod val="50000"/>
+              </a:schemeClr>
             </a:solidFill>
             <a:ln>
               <a:solidFill>
@@ -5419,7 +5133,7 @@
             <a:p>
               <a:pPr algn="ctr"/>
               <a:r>
-                <a:rPr lang="en-US" sz="1400" dirty="0">
+                <a:rPr lang="en-US" sz="1600" dirty="0">
                   <a:solidFill>
                     <a:schemeClr val="bg1"/>
                   </a:solidFill>
@@ -5451,7 +5165,9 @@
               <a:avLst/>
             </a:prstGeom>
             <a:solidFill>
-              <a:srgbClr val="097C7A"/>
+              <a:schemeClr val="bg1">
+                <a:lumMod val="50000"/>
+              </a:schemeClr>
             </a:solidFill>
             <a:ln>
               <a:solidFill>
@@ -5481,7 +5197,7 @@
             <a:p>
               <a:pPr algn="ctr"/>
               <a:r>
-                <a:rPr lang="en-US" sz="1400" dirty="0">
+                <a:rPr lang="en-US" sz="1600" dirty="0">
                   <a:solidFill>
                     <a:schemeClr val="bg1"/>
                   </a:solidFill>
@@ -5507,7 +5223,7 @@
         </p:nvSpPr>
         <p:spPr>
           <a:xfrm>
-            <a:off x="8047723" y="1558225"/>
+            <a:off x="8365484" y="1579348"/>
             <a:ext cx="1178528" cy="523220"/>
           </a:xfrm>
           <a:prstGeom prst="rect">
@@ -5563,7 +5279,9 @@
             <a:avLst/>
           </a:prstGeom>
           <a:solidFill>
-            <a:srgbClr val="0D7D7D"/>
+            <a:schemeClr val="bg1">
+              <a:lumMod val="50000"/>
+            </a:schemeClr>
           </a:solidFill>
         </p:spPr>
         <p:style>
@@ -5612,7 +5330,9 @@
             <a:avLst/>
           </a:prstGeom>
           <a:solidFill>
-            <a:srgbClr val="0D7D7D"/>
+            <a:schemeClr val="bg1">
+              <a:lumMod val="50000"/>
+            </a:schemeClr>
           </a:solidFill>
         </p:spPr>
         <p:style>
@@ -5637,228 +5357,6 @@
           <a:p>
             <a:pPr algn="ctr"/>
             <a:endParaRPr lang="en-US"/>
-          </a:p>
-        </p:txBody>
-      </p:sp>
-      <p:sp>
-        <p:nvSpPr>
-          <p:cNvPr id="54" name="Rectangle 53">
-            <a:extLst>
-              <a:ext uri="{FF2B5EF4-FFF2-40B4-BE49-F238E27FC236}">
-                <a16:creationId xmlns:a16="http://schemas.microsoft.com/office/drawing/2014/main" id="{0D61D292-D682-3CD6-ABFC-29509C05FA13}"/>
-              </a:ext>
-            </a:extLst>
-          </p:cNvPr>
-          <p:cNvSpPr/>
-          <p:nvPr/>
-        </p:nvSpPr>
-        <p:spPr>
-          <a:xfrm>
-            <a:off x="268283" y="3798252"/>
-            <a:ext cx="1723720" cy="781978"/>
-          </a:xfrm>
-          <a:prstGeom prst="rect">
-            <a:avLst/>
-          </a:prstGeom>
-          <a:solidFill>
-            <a:schemeClr val="bg1"/>
-          </a:solidFill>
-          <a:ln w="53975"/>
-        </p:spPr>
-        <p:style>
-          <a:lnRef idx="2">
-            <a:schemeClr val="accent1">
-              <a:shade val="15000"/>
-            </a:schemeClr>
-          </a:lnRef>
-          <a:fillRef idx="1">
-            <a:schemeClr val="accent1"/>
-          </a:fillRef>
-          <a:effectRef idx="0">
-            <a:schemeClr val="accent1"/>
-          </a:effectRef>
-          <a:fontRef idx="minor">
-            <a:schemeClr val="lt1"/>
-          </a:fontRef>
-        </p:style>
-        <p:txBody>
-          <a:bodyPr rtlCol="0" anchor="ctr"/>
-          <a:lstStyle/>
-          <a:p>
-            <a:pPr algn="ctr"/>
-            <a:endParaRPr lang="en-US"/>
-          </a:p>
-        </p:txBody>
-      </p:sp>
-      <p:sp>
-        <p:nvSpPr>
-          <p:cNvPr id="49" name="Rectangle 48">
-            <a:extLst>
-              <a:ext uri="{FF2B5EF4-FFF2-40B4-BE49-F238E27FC236}">
-                <a16:creationId xmlns:a16="http://schemas.microsoft.com/office/drawing/2014/main" id="{4BBEA602-6085-8AAD-E9E1-587784C04B53}"/>
-              </a:ext>
-            </a:extLst>
-          </p:cNvPr>
-          <p:cNvSpPr/>
-          <p:nvPr/>
-        </p:nvSpPr>
-        <p:spPr>
-          <a:xfrm>
-            <a:off x="322174" y="3874880"/>
-            <a:ext cx="345260" cy="268868"/>
-          </a:xfrm>
-          <a:prstGeom prst="rect">
-            <a:avLst/>
-          </a:prstGeom>
-          <a:solidFill>
-            <a:schemeClr val="bg1"/>
-          </a:solidFill>
-        </p:spPr>
-        <p:style>
-          <a:lnRef idx="2">
-            <a:schemeClr val="accent1">
-              <a:shade val="15000"/>
-            </a:schemeClr>
-          </a:lnRef>
-          <a:fillRef idx="1">
-            <a:schemeClr val="accent1"/>
-          </a:fillRef>
-          <a:effectRef idx="0">
-            <a:schemeClr val="accent1"/>
-          </a:effectRef>
-          <a:fontRef idx="minor">
-            <a:schemeClr val="lt1"/>
-          </a:fontRef>
-        </p:style>
-        <p:txBody>
-          <a:bodyPr rtlCol="0" anchor="ctr"/>
-          <a:lstStyle/>
-          <a:p>
-            <a:pPr algn="ctr"/>
-            <a:endParaRPr lang="en-US"/>
-          </a:p>
-        </p:txBody>
-      </p:sp>
-      <p:sp>
-        <p:nvSpPr>
-          <p:cNvPr id="50" name="Rectangle 49">
-            <a:extLst>
-              <a:ext uri="{FF2B5EF4-FFF2-40B4-BE49-F238E27FC236}">
-                <a16:creationId xmlns:a16="http://schemas.microsoft.com/office/drawing/2014/main" id="{906A43F1-86EF-3689-1BB1-E3DFA06FEE41}"/>
-              </a:ext>
-            </a:extLst>
-          </p:cNvPr>
-          <p:cNvSpPr/>
-          <p:nvPr/>
-        </p:nvSpPr>
-        <p:spPr>
-          <a:xfrm>
-            <a:off x="322174" y="4255470"/>
-            <a:ext cx="345260" cy="268868"/>
-          </a:xfrm>
-          <a:prstGeom prst="rect">
-            <a:avLst/>
-          </a:prstGeom>
-          <a:solidFill>
-            <a:srgbClr val="0D7D7D"/>
-          </a:solidFill>
-        </p:spPr>
-        <p:style>
-          <a:lnRef idx="2">
-            <a:schemeClr val="accent1">
-              <a:shade val="15000"/>
-            </a:schemeClr>
-          </a:lnRef>
-          <a:fillRef idx="1">
-            <a:schemeClr val="accent1"/>
-          </a:fillRef>
-          <a:effectRef idx="0">
-            <a:schemeClr val="accent1"/>
-          </a:effectRef>
-          <a:fontRef idx="minor">
-            <a:schemeClr val="lt1"/>
-          </a:fontRef>
-        </p:style>
-        <p:txBody>
-          <a:bodyPr rtlCol="0" anchor="ctr"/>
-          <a:lstStyle/>
-          <a:p>
-            <a:pPr algn="ctr"/>
-            <a:endParaRPr lang="en-US"/>
-          </a:p>
-        </p:txBody>
-      </p:sp>
-      <p:sp>
-        <p:nvSpPr>
-          <p:cNvPr id="51" name="TextBox 50">
-            <a:extLst>
-              <a:ext uri="{FF2B5EF4-FFF2-40B4-BE49-F238E27FC236}">
-                <a16:creationId xmlns:a16="http://schemas.microsoft.com/office/drawing/2014/main" id="{F5D65954-AE4B-BCF7-8CA6-A3CCE865974B}"/>
-              </a:ext>
-            </a:extLst>
-          </p:cNvPr>
-          <p:cNvSpPr txBox="1"/>
-          <p:nvPr/>
-        </p:nvSpPr>
-        <p:spPr>
-          <a:xfrm>
-            <a:off x="645325" y="3824648"/>
-            <a:ext cx="1165575" cy="369332"/>
-          </a:xfrm>
-          <a:prstGeom prst="rect">
-            <a:avLst/>
-          </a:prstGeom>
-          <a:noFill/>
-        </p:spPr>
-        <p:txBody>
-          <a:bodyPr wrap="none" rtlCol="0">
-            <a:spAutoFit/>
-          </a:bodyPr>
-          <a:lstStyle/>
-          <a:p>
-            <a:r>
-              <a:rPr lang="en-US" dirty="0">
-                <a:latin typeface="Centaur" panose="02030504050205020304" pitchFamily="18" charset="77"/>
-              </a:rPr>
-              <a:t>Pre-existing</a:t>
-            </a:r>
-          </a:p>
-        </p:txBody>
-      </p:sp>
-      <p:sp>
-        <p:nvSpPr>
-          <p:cNvPr id="52" name="TextBox 51">
-            <a:extLst>
-              <a:ext uri="{FF2B5EF4-FFF2-40B4-BE49-F238E27FC236}">
-                <a16:creationId xmlns:a16="http://schemas.microsoft.com/office/drawing/2014/main" id="{BF26E03F-CFB8-99C1-C30D-3050ED9F6152}"/>
-              </a:ext>
-            </a:extLst>
-          </p:cNvPr>
-          <p:cNvSpPr txBox="1"/>
-          <p:nvPr/>
-        </p:nvSpPr>
-        <p:spPr>
-          <a:xfrm>
-            <a:off x="656702" y="4210898"/>
-            <a:ext cx="1380443" cy="369332"/>
-          </a:xfrm>
-          <a:prstGeom prst="rect">
-            <a:avLst/>
-          </a:prstGeom>
-          <a:noFill/>
-        </p:spPr>
-        <p:txBody>
-          <a:bodyPr wrap="none" rtlCol="0">
-            <a:spAutoFit/>
-          </a:bodyPr>
-          <a:lstStyle/>
-          <a:p>
-            <a:r>
-              <a:rPr lang="en-US" dirty="0">
-                <a:latin typeface="Centaur" panose="02030504050205020304" pitchFamily="18" charset="77"/>
-              </a:rPr>
-              <a:t>New for PDC</a:t>
-            </a:r>
           </a:p>
         </p:txBody>
       </p:sp>
@@ -6080,8 +5578,8 @@
         </p:nvCxnSpPr>
         <p:spPr>
           <a:xfrm>
-            <a:off x="3924300" y="4655738"/>
-            <a:ext cx="0" cy="199025"/>
+            <a:off x="4519562" y="4317914"/>
+            <a:ext cx="1745726" cy="14171"/>
           </a:xfrm>
           <a:prstGeom prst="straightConnector1">
             <a:avLst/>
@@ -6111,24 +5609,283 @@
           </a:fontRef>
         </p:style>
       </p:cxnSp>
+      <p:sp>
+        <p:nvSpPr>
+          <p:cNvPr id="5" name="Can 4">
+            <a:extLst>
+              <a:ext uri="{FF2B5EF4-FFF2-40B4-BE49-F238E27FC236}">
+                <a16:creationId xmlns:a16="http://schemas.microsoft.com/office/drawing/2014/main" id="{B79DB960-209C-1661-1C7C-896B98D54AC1}"/>
+              </a:ext>
+            </a:extLst>
+          </p:cNvPr>
+          <p:cNvSpPr/>
+          <p:nvPr/>
+        </p:nvSpPr>
+        <p:spPr>
+          <a:xfrm>
+            <a:off x="6522070" y="1340626"/>
+            <a:ext cx="1210968" cy="501226"/>
+          </a:xfrm>
+          <a:prstGeom prst="can">
+            <a:avLst/>
+          </a:prstGeom>
+          <a:solidFill>
+            <a:schemeClr val="bg1">
+              <a:lumMod val="50000"/>
+            </a:schemeClr>
+          </a:solidFill>
+          <a:ln>
+            <a:solidFill>
+              <a:schemeClr val="tx1"/>
+            </a:solidFill>
+          </a:ln>
+        </p:spPr>
+        <p:style>
+          <a:lnRef idx="2">
+            <a:schemeClr val="accent1">
+              <a:shade val="15000"/>
+            </a:schemeClr>
+          </a:lnRef>
+          <a:fillRef idx="1">
+            <a:schemeClr val="accent1"/>
+          </a:fillRef>
+          <a:effectRef idx="0">
+            <a:schemeClr val="accent1"/>
+          </a:effectRef>
+          <a:fontRef idx="minor">
+            <a:schemeClr val="lt1"/>
+          </a:fontRef>
+        </p:style>
+        <p:txBody>
+          <a:bodyPr rtlCol="0" anchor="ctr"/>
+          <a:lstStyle/>
+          <a:p>
+            <a:pPr algn="ctr"/>
+            <a:r>
+              <a:rPr lang="en-US" dirty="0">
+                <a:latin typeface="Centaur" panose="02030504050205020304" pitchFamily="18" charset="77"/>
+              </a:rPr>
+              <a:t>Purge DB</a:t>
+            </a:r>
+          </a:p>
+        </p:txBody>
+      </p:sp>
+      <p:sp>
+        <p:nvSpPr>
+          <p:cNvPr id="23" name="Can 22">
+            <a:extLst>
+              <a:ext uri="{FF2B5EF4-FFF2-40B4-BE49-F238E27FC236}">
+                <a16:creationId xmlns:a16="http://schemas.microsoft.com/office/drawing/2014/main" id="{5AA2E241-61B2-9ACF-E522-B167001E870A}"/>
+              </a:ext>
+            </a:extLst>
+          </p:cNvPr>
+          <p:cNvSpPr/>
+          <p:nvPr/>
+        </p:nvSpPr>
+        <p:spPr>
+          <a:xfrm>
+            <a:off x="4699344" y="3427216"/>
+            <a:ext cx="1306862" cy="740240"/>
+          </a:xfrm>
+          <a:prstGeom prst="can">
+            <a:avLst/>
+          </a:prstGeom>
+          <a:solidFill>
+            <a:schemeClr val="bg1">
+              <a:lumMod val="50000"/>
+            </a:schemeClr>
+          </a:solidFill>
+          <a:ln>
+            <a:solidFill>
+              <a:schemeClr val="tx1"/>
+            </a:solidFill>
+          </a:ln>
+        </p:spPr>
+        <p:style>
+          <a:lnRef idx="2">
+            <a:schemeClr val="accent1">
+              <a:shade val="15000"/>
+            </a:schemeClr>
+          </a:lnRef>
+          <a:fillRef idx="1">
+            <a:schemeClr val="accent1"/>
+          </a:fillRef>
+          <a:effectRef idx="0">
+            <a:schemeClr val="accent1"/>
+          </a:effectRef>
+          <a:fontRef idx="minor">
+            <a:schemeClr val="lt1"/>
+          </a:fontRef>
+        </p:style>
+        <p:txBody>
+          <a:bodyPr rtlCol="0" anchor="ctr"/>
+          <a:lstStyle/>
+          <a:p>
+            <a:pPr algn="ctr"/>
+            <a:r>
+              <a:rPr lang="en-US" dirty="0">
+                <a:latin typeface="Centaur" panose="02030504050205020304" pitchFamily="18" charset="77"/>
+              </a:rPr>
+              <a:t>Transient</a:t>
+            </a:r>
+            <a:br>
+              <a:rPr lang="en-US" dirty="0">
+                <a:latin typeface="Centaur" panose="02030504050205020304" pitchFamily="18" charset="77"/>
+              </a:rPr>
+            </a:br>
+            <a:r>
+              <a:rPr lang="en-US" dirty="0">
+                <a:latin typeface="Centaur" panose="02030504050205020304" pitchFamily="18" charset="77"/>
+              </a:rPr>
+              <a:t>Store</a:t>
+            </a:r>
+          </a:p>
+        </p:txBody>
+      </p:sp>
+      <p:sp>
+        <p:nvSpPr>
+          <p:cNvPr id="26" name="Can 25">
+            <a:extLst>
+              <a:ext uri="{FF2B5EF4-FFF2-40B4-BE49-F238E27FC236}">
+                <a16:creationId xmlns:a16="http://schemas.microsoft.com/office/drawing/2014/main" id="{FBB32E3A-E1D8-C238-EAB8-23490A9620CC}"/>
+              </a:ext>
+            </a:extLst>
+          </p:cNvPr>
+          <p:cNvSpPr/>
+          <p:nvPr/>
+        </p:nvSpPr>
+        <p:spPr>
+          <a:xfrm>
+            <a:off x="8414038" y="3761455"/>
+            <a:ext cx="1303191" cy="882235"/>
+          </a:xfrm>
+          <a:prstGeom prst="can">
+            <a:avLst/>
+          </a:prstGeom>
+          <a:solidFill>
+            <a:schemeClr val="bg1">
+              <a:lumMod val="50000"/>
+            </a:schemeClr>
+          </a:solidFill>
+        </p:spPr>
+        <p:style>
+          <a:lnRef idx="2">
+            <a:schemeClr val="accent1">
+              <a:shade val="15000"/>
+            </a:schemeClr>
+          </a:lnRef>
+          <a:fillRef idx="1">
+            <a:schemeClr val="accent1"/>
+          </a:fillRef>
+          <a:effectRef idx="0">
+            <a:schemeClr val="accent1"/>
+          </a:effectRef>
+          <a:fontRef idx="minor">
+            <a:schemeClr val="lt1"/>
+          </a:fontRef>
+        </p:style>
+        <p:txBody>
+          <a:bodyPr rtlCol="0" anchor="ctr"/>
+          <a:lstStyle/>
+          <a:p>
+            <a:pPr algn="ctr"/>
+            <a:r>
+              <a:rPr lang="en-US" dirty="0">
+                <a:solidFill>
+                  <a:schemeClr val="bg1"/>
+                </a:solidFill>
+                <a:latin typeface="Centaur" panose="02030504050205020304" pitchFamily="18" charset="77"/>
+              </a:rPr>
+              <a:t>Private Data</a:t>
+            </a:r>
+            <a:br>
+              <a:rPr lang="en-US" dirty="0">
+                <a:solidFill>
+                  <a:schemeClr val="bg1"/>
+                </a:solidFill>
+                <a:latin typeface="Centaur" panose="02030504050205020304" pitchFamily="18" charset="77"/>
+              </a:rPr>
+            </a:br>
+            <a:r>
+              <a:rPr lang="en-US" dirty="0">
+                <a:solidFill>
+                  <a:schemeClr val="bg1"/>
+                </a:solidFill>
+                <a:latin typeface="Centaur" panose="02030504050205020304" pitchFamily="18" charset="77"/>
+              </a:rPr>
+              <a:t>Collection </a:t>
+            </a:r>
+          </a:p>
+          <a:p>
+            <a:pPr algn="ctr"/>
+            <a:r>
+              <a:rPr lang="en-US" dirty="0">
+                <a:solidFill>
+                  <a:schemeClr val="bg1"/>
+                </a:solidFill>
+                <a:latin typeface="Centaur" panose="02030504050205020304" pitchFamily="18" charset="77"/>
+              </a:rPr>
+              <a:t>Config DB</a:t>
+            </a:r>
+          </a:p>
+        </p:txBody>
+      </p:sp>
+      <p:sp>
+        <p:nvSpPr>
+          <p:cNvPr id="45" name="TextBox 44">
+            <a:extLst>
+              <a:ext uri="{FF2B5EF4-FFF2-40B4-BE49-F238E27FC236}">
+                <a16:creationId xmlns:a16="http://schemas.microsoft.com/office/drawing/2014/main" id="{70BD09B7-404A-7D19-ACC2-7F0026713516}"/>
+              </a:ext>
+            </a:extLst>
+          </p:cNvPr>
+          <p:cNvSpPr txBox="1"/>
+          <p:nvPr/>
+        </p:nvSpPr>
+        <p:spPr>
+          <a:xfrm>
+            <a:off x="8638888" y="1295629"/>
+            <a:ext cx="939681" cy="369332"/>
+          </a:xfrm>
+          <a:prstGeom prst="rect">
+            <a:avLst/>
+          </a:prstGeom>
+          <a:noFill/>
+        </p:spPr>
+        <p:txBody>
+          <a:bodyPr wrap="none" rtlCol="0">
+            <a:spAutoFit/>
+          </a:bodyPr>
+          <a:lstStyle/>
+          <a:p>
+            <a:r>
+              <a:rPr lang="en-US" dirty="0">
+                <a:latin typeface="Centaur" panose="02030504050205020304" pitchFamily="18" charset="77"/>
+              </a:rPr>
+              <a:t>State DB</a:t>
+            </a:r>
+          </a:p>
+        </p:txBody>
+      </p:sp>
       <p:cxnSp>
         <p:nvCxnSpPr>
-          <p:cNvPr id="32" name="Straight Arrow Connector 31">
-            <a:extLst>
-              <a:ext uri="{FF2B5EF4-FFF2-40B4-BE49-F238E27FC236}">
-                <a16:creationId xmlns:a16="http://schemas.microsoft.com/office/drawing/2014/main" id="{A2D4B29C-C3EF-7197-5D10-D46F85B531BF}"/>
+          <p:cNvPr id="86" name="Straight Arrow Connector 85">
+            <a:extLst>
+              <a:ext uri="{FF2B5EF4-FFF2-40B4-BE49-F238E27FC236}">
+                <a16:creationId xmlns:a16="http://schemas.microsoft.com/office/drawing/2014/main" id="{B79D2ED4-2B32-EB41-6D99-A08FFEFDCDBF}"/>
               </a:ext>
             </a:extLst>
           </p:cNvPr>
           <p:cNvCxnSpPr>
             <a:cxnSpLocks/>
+            <a:endCxn id="17" idx="1"/>
           </p:cNvCxnSpPr>
           <p:nvPr/>
         </p:nvCxnSpPr>
         <p:spPr>
-          <a:xfrm flipV="1">
-            <a:off x="5974198" y="3791760"/>
-            <a:ext cx="381624" cy="6492"/>
+          <a:xfrm>
+            <a:off x="3369445" y="2910616"/>
+            <a:ext cx="150164" cy="0"/>
           </a:xfrm>
           <a:prstGeom prst="straightConnector1">
             <a:avLst/>
@@ -6160,10 +5917,10 @@
       </p:cxnSp>
       <p:sp>
         <p:nvSpPr>
-          <p:cNvPr id="5" name="Can 4">
-            <a:extLst>
-              <a:ext uri="{FF2B5EF4-FFF2-40B4-BE49-F238E27FC236}">
-                <a16:creationId xmlns:a16="http://schemas.microsoft.com/office/drawing/2014/main" id="{B79DB960-209C-1661-1C7C-896B98D54AC1}"/>
+          <p:cNvPr id="67" name="Rectangle 66">
+            <a:extLst>
+              <a:ext uri="{FF2B5EF4-FFF2-40B4-BE49-F238E27FC236}">
+                <a16:creationId xmlns:a16="http://schemas.microsoft.com/office/drawing/2014/main" id="{DBAA6554-CE7C-0953-615A-8CFEB07EDAC8}"/>
               </a:ext>
             </a:extLst>
           </p:cNvPr>
@@ -6172,14 +5929,65 @@
         </p:nvSpPr>
         <p:spPr>
           <a:xfrm>
-            <a:off x="6388258" y="1340626"/>
-            <a:ext cx="1210968" cy="501226"/>
-          </a:xfrm>
-          <a:prstGeom prst="can">
+            <a:off x="5900880" y="1835563"/>
+            <a:ext cx="262200" cy="103096"/>
+          </a:xfrm>
+          <a:prstGeom prst="rect">
             <a:avLst/>
           </a:prstGeom>
           <a:solidFill>
-            <a:srgbClr val="0D7D7D"/>
+            <a:schemeClr val="bg1">
+              <a:lumMod val="50000"/>
+            </a:schemeClr>
+          </a:solidFill>
+        </p:spPr>
+        <p:style>
+          <a:lnRef idx="2">
+            <a:schemeClr val="accent1">
+              <a:shade val="15000"/>
+            </a:schemeClr>
+          </a:lnRef>
+          <a:fillRef idx="1">
+            <a:schemeClr val="accent1"/>
+          </a:fillRef>
+          <a:effectRef idx="0">
+            <a:schemeClr val="accent1"/>
+          </a:effectRef>
+          <a:fontRef idx="minor">
+            <a:schemeClr val="lt1"/>
+          </a:fontRef>
+        </p:style>
+        <p:txBody>
+          <a:bodyPr rtlCol="0" anchor="ctr"/>
+          <a:lstStyle/>
+          <a:p>
+            <a:pPr algn="ctr"/>
+            <a:endParaRPr lang="en-US"/>
+          </a:p>
+        </p:txBody>
+      </p:sp>
+      <p:sp>
+        <p:nvSpPr>
+          <p:cNvPr id="75" name="Rectangle 74">
+            <a:extLst>
+              <a:ext uri="{FF2B5EF4-FFF2-40B4-BE49-F238E27FC236}">
+                <a16:creationId xmlns:a16="http://schemas.microsoft.com/office/drawing/2014/main" id="{8DFA485C-9F89-EBE7-B1DB-E6898AA9FB87}"/>
+              </a:ext>
+            </a:extLst>
+          </p:cNvPr>
+          <p:cNvSpPr/>
+          <p:nvPr/>
+        </p:nvSpPr>
+        <p:spPr>
+          <a:xfrm>
+            <a:off x="2376182" y="5177927"/>
+            <a:ext cx="271806" cy="230231"/>
+          </a:xfrm>
+          <a:prstGeom prst="rect">
+            <a:avLst/>
+          </a:prstGeom>
+          <a:solidFill>
+            <a:schemeClr val="bg1"/>
           </a:solidFill>
           <a:ln>
             <a:solidFill>
@@ -6208,21 +6016,16 @@
           <a:lstStyle/>
           <a:p>
             <a:pPr algn="ctr"/>
-            <a:r>
-              <a:rPr lang="en-US" dirty="0">
-                <a:latin typeface="Centaur" panose="02030504050205020304" pitchFamily="18" charset="77"/>
-              </a:rPr>
-              <a:t>Purge DB</a:t>
-            </a:r>
-          </a:p>
-        </p:txBody>
-      </p:sp>
-      <p:sp>
-        <p:nvSpPr>
-          <p:cNvPr id="23" name="Can 22">
-            <a:extLst>
-              <a:ext uri="{FF2B5EF4-FFF2-40B4-BE49-F238E27FC236}">
-                <a16:creationId xmlns:a16="http://schemas.microsoft.com/office/drawing/2014/main" id="{5AA2E241-61B2-9ACF-E522-B167001E870A}"/>
+            <a:endParaRPr lang="en-US"/>
+          </a:p>
+        </p:txBody>
+      </p:sp>
+      <p:sp>
+        <p:nvSpPr>
+          <p:cNvPr id="76" name="Rectangle 75">
+            <a:extLst>
+              <a:ext uri="{FF2B5EF4-FFF2-40B4-BE49-F238E27FC236}">
+                <a16:creationId xmlns:a16="http://schemas.microsoft.com/office/drawing/2014/main" id="{983846E9-BB09-C2C9-A8EC-38DA0695F01D}"/>
               </a:ext>
             </a:extLst>
           </p:cNvPr>
@@ -6231,84 +6034,16 @@
         </p:nvSpPr>
         <p:spPr>
           <a:xfrm>
-            <a:off x="4699344" y="3404914"/>
-            <a:ext cx="1306862" cy="740240"/>
-          </a:xfrm>
-          <a:prstGeom prst="can">
+            <a:off x="4618253" y="5177927"/>
+            <a:ext cx="271806" cy="230231"/>
+          </a:xfrm>
+          <a:prstGeom prst="rect">
             <a:avLst/>
           </a:prstGeom>
           <a:solidFill>
-            <a:srgbClr val="0D7D7D"/>
-          </a:solidFill>
-          <a:ln>
-            <a:solidFill>
-              <a:schemeClr val="tx1"/>
-            </a:solidFill>
-          </a:ln>
-        </p:spPr>
-        <p:style>
-          <a:lnRef idx="2">
-            <a:schemeClr val="accent1">
-              <a:shade val="15000"/>
+            <a:schemeClr val="bg1">
+              <a:lumMod val="50000"/>
             </a:schemeClr>
-          </a:lnRef>
-          <a:fillRef idx="1">
-            <a:schemeClr val="accent1"/>
-          </a:fillRef>
-          <a:effectRef idx="0">
-            <a:schemeClr val="accent1"/>
-          </a:effectRef>
-          <a:fontRef idx="minor">
-            <a:schemeClr val="lt1"/>
-          </a:fontRef>
-        </p:style>
-        <p:txBody>
-          <a:bodyPr rtlCol="0" anchor="ctr"/>
-          <a:lstStyle/>
-          <a:p>
-            <a:pPr algn="ctr"/>
-            <a:r>
-              <a:rPr lang="en-US" dirty="0">
-                <a:latin typeface="Centaur" panose="02030504050205020304" pitchFamily="18" charset="77"/>
-              </a:rPr>
-              <a:t>Transient</a:t>
-            </a:r>
-            <a:br>
-              <a:rPr lang="en-US" dirty="0">
-                <a:latin typeface="Centaur" panose="02030504050205020304" pitchFamily="18" charset="77"/>
-              </a:rPr>
-            </a:br>
-            <a:r>
-              <a:rPr lang="en-US" dirty="0">
-                <a:latin typeface="Centaur" panose="02030504050205020304" pitchFamily="18" charset="77"/>
-              </a:rPr>
-              <a:t>Store</a:t>
-            </a:r>
-          </a:p>
-        </p:txBody>
-      </p:sp>
-      <p:sp>
-        <p:nvSpPr>
-          <p:cNvPr id="26" name="Can 25">
-            <a:extLst>
-              <a:ext uri="{FF2B5EF4-FFF2-40B4-BE49-F238E27FC236}">
-                <a16:creationId xmlns:a16="http://schemas.microsoft.com/office/drawing/2014/main" id="{FBB32E3A-E1D8-C238-EAB8-23490A9620CC}"/>
-              </a:ext>
-            </a:extLst>
-          </p:cNvPr>
-          <p:cNvSpPr/>
-          <p:nvPr/>
-        </p:nvSpPr>
-        <p:spPr>
-          <a:xfrm>
-            <a:off x="8000552" y="3958520"/>
-            <a:ext cx="1303191" cy="802342"/>
-          </a:xfrm>
-          <a:prstGeom prst="can">
-            <a:avLst/>
-          </a:prstGeom>
-          <a:solidFill>
-            <a:srgbClr val="0D7D7D"/>
           </a:solidFill>
         </p:spPr>
         <p:style>
@@ -6332,62 +6067,16 @@
           <a:lstStyle/>
           <a:p>
             <a:pPr algn="ctr"/>
-            <a:r>
-              <a:rPr lang="en-US" sz="1600" dirty="0">
-                <a:solidFill>
-                  <a:schemeClr val="bg1"/>
-                </a:solidFill>
-                <a:latin typeface="Centaur" panose="02030504050205020304" pitchFamily="18" charset="77"/>
-              </a:rPr>
-              <a:t>Private Data</a:t>
-            </a:r>
-            <a:br>
-              <a:rPr lang="en-US" sz="1600" dirty="0">
-                <a:solidFill>
-                  <a:schemeClr val="bg1"/>
-                </a:solidFill>
-                <a:latin typeface="Centaur" panose="02030504050205020304" pitchFamily="18" charset="77"/>
-              </a:rPr>
-            </a:br>
-            <a:r>
-              <a:rPr lang="en-US" sz="1600" dirty="0">
-                <a:solidFill>
-                  <a:schemeClr val="bg1"/>
-                </a:solidFill>
-                <a:latin typeface="Centaur" panose="02030504050205020304" pitchFamily="18" charset="77"/>
-              </a:rPr>
-              <a:t>Collection </a:t>
-            </a:r>
-          </a:p>
-          <a:p>
-            <a:pPr algn="ctr"/>
-            <a:r>
-              <a:rPr lang="en-US" sz="1600" dirty="0">
-                <a:solidFill>
-                  <a:schemeClr val="bg1"/>
-                </a:solidFill>
-                <a:latin typeface="Centaur" panose="02030504050205020304" pitchFamily="18" charset="77"/>
-              </a:rPr>
-              <a:t>Config DB</a:t>
-            </a:r>
-          </a:p>
-          <a:p>
-            <a:pPr algn="ctr"/>
-            <a:endParaRPr lang="en-US" sz="1600" dirty="0">
-              <a:solidFill>
-                <a:schemeClr val="bg1"/>
-              </a:solidFill>
-              <a:latin typeface="Centaur" panose="02030504050205020304" pitchFamily="18" charset="77"/>
-            </a:endParaRPr>
-          </a:p>
-        </p:txBody>
-      </p:sp>
-      <p:sp>
-        <p:nvSpPr>
-          <p:cNvPr id="45" name="TextBox 44">
-            <a:extLst>
-              <a:ext uri="{FF2B5EF4-FFF2-40B4-BE49-F238E27FC236}">
-                <a16:creationId xmlns:a16="http://schemas.microsoft.com/office/drawing/2014/main" id="{70BD09B7-404A-7D19-ACC2-7F0026713516}"/>
+            <a:endParaRPr lang="en-US"/>
+          </a:p>
+        </p:txBody>
+      </p:sp>
+      <p:sp>
+        <p:nvSpPr>
+          <p:cNvPr id="78" name="TextBox 77">
+            <a:extLst>
+              <a:ext uri="{FF2B5EF4-FFF2-40B4-BE49-F238E27FC236}">
+                <a16:creationId xmlns:a16="http://schemas.microsoft.com/office/drawing/2014/main" id="{A45948B8-4DB1-91B0-CE7E-0D1BCC365197}"/>
               </a:ext>
             </a:extLst>
           </p:cNvPr>
@@ -6396,8 +6085,8 @@
         </p:nvSpPr>
         <p:spPr>
           <a:xfrm>
-            <a:off x="8168648" y="1295629"/>
-            <a:ext cx="939681" cy="369332"/>
+            <a:off x="2614392" y="5121345"/>
+            <a:ext cx="1947969" cy="369332"/>
           </a:xfrm>
           <a:prstGeom prst="rect">
             <a:avLst/>
@@ -6414,32 +6103,499 @@
               <a:rPr lang="en-US" dirty="0">
                 <a:latin typeface="Centaur" panose="02030504050205020304" pitchFamily="18" charset="77"/>
               </a:rPr>
-              <a:t>State DB</a:t>
+              <a:t>Existing components</a:t>
+            </a:r>
+          </a:p>
+        </p:txBody>
+      </p:sp>
+      <p:sp>
+        <p:nvSpPr>
+          <p:cNvPr id="79" name="TextBox 78">
+            <a:extLst>
+              <a:ext uri="{FF2B5EF4-FFF2-40B4-BE49-F238E27FC236}">
+                <a16:creationId xmlns:a16="http://schemas.microsoft.com/office/drawing/2014/main" id="{324CB991-32D2-8DDB-FA6D-FF6F50DBDB06}"/>
+              </a:ext>
+            </a:extLst>
+          </p:cNvPr>
+          <p:cNvSpPr txBox="1"/>
+          <p:nvPr/>
+        </p:nvSpPr>
+        <p:spPr>
+          <a:xfrm>
+            <a:off x="4888196" y="5118592"/>
+            <a:ext cx="1670650" cy="369332"/>
+          </a:xfrm>
+          <a:prstGeom prst="rect">
+            <a:avLst/>
+          </a:prstGeom>
+          <a:noFill/>
+        </p:spPr>
+        <p:txBody>
+          <a:bodyPr wrap="none" rtlCol="0">
+            <a:spAutoFit/>
+          </a:bodyPr>
+          <a:lstStyle/>
+          <a:p>
+            <a:r>
+              <a:rPr lang="en-US" dirty="0">
+                <a:latin typeface="Centaur" panose="02030504050205020304" pitchFamily="18" charset="77"/>
+              </a:rPr>
+              <a:t>New components</a:t>
+            </a:r>
+          </a:p>
+        </p:txBody>
+      </p:sp>
+      <p:sp>
+        <p:nvSpPr>
+          <p:cNvPr id="80" name="TextBox 79">
+            <a:extLst>
+              <a:ext uri="{FF2B5EF4-FFF2-40B4-BE49-F238E27FC236}">
+                <a16:creationId xmlns:a16="http://schemas.microsoft.com/office/drawing/2014/main" id="{962430D2-D764-6102-107D-BFB6BF453155}"/>
+              </a:ext>
+            </a:extLst>
+          </p:cNvPr>
+          <p:cNvSpPr txBox="1"/>
+          <p:nvPr/>
+        </p:nvSpPr>
+        <p:spPr>
+          <a:xfrm>
+            <a:off x="6618033" y="5149370"/>
+            <a:ext cx="3592009" cy="338554"/>
+          </a:xfrm>
+          <a:prstGeom prst="rect">
+            <a:avLst/>
+          </a:prstGeom>
+          <a:noFill/>
+        </p:spPr>
+        <p:txBody>
+          <a:bodyPr wrap="none" rtlCol="0">
+            <a:spAutoFit/>
+          </a:bodyPr>
+          <a:lstStyle/>
+          <a:p>
+            <a:r>
+              <a:rPr lang="en-US" sz="1600" dirty="0">
+                <a:latin typeface="Centaur" panose="02030504050205020304" pitchFamily="18" charset="77"/>
+              </a:rPr>
+              <a:t>All stores and DB uses levelDB storage library</a:t>
+            </a:r>
+          </a:p>
+        </p:txBody>
+      </p:sp>
+      <p:sp>
+        <p:nvSpPr>
+          <p:cNvPr id="81" name="Oval 80">
+            <a:extLst>
+              <a:ext uri="{FF2B5EF4-FFF2-40B4-BE49-F238E27FC236}">
+                <a16:creationId xmlns:a16="http://schemas.microsoft.com/office/drawing/2014/main" id="{6B4CAB86-F3B8-D421-5249-3FA4365D0956}"/>
+              </a:ext>
+            </a:extLst>
+          </p:cNvPr>
+          <p:cNvSpPr/>
+          <p:nvPr/>
+        </p:nvSpPr>
+        <p:spPr>
+          <a:xfrm>
+            <a:off x="5383216" y="2604325"/>
+            <a:ext cx="226016" cy="220337"/>
+          </a:xfrm>
+          <a:prstGeom prst="ellipse">
+            <a:avLst/>
+          </a:prstGeom>
+        </p:spPr>
+        <p:style>
+          <a:lnRef idx="2">
+            <a:schemeClr val="dk1">
+              <a:shade val="15000"/>
+            </a:schemeClr>
+          </a:lnRef>
+          <a:fillRef idx="1">
+            <a:schemeClr val="dk1"/>
+          </a:fillRef>
+          <a:effectRef idx="0">
+            <a:schemeClr val="dk1"/>
+          </a:effectRef>
+          <a:fontRef idx="minor">
+            <a:schemeClr val="lt1"/>
+          </a:fontRef>
+        </p:style>
+        <p:txBody>
+          <a:bodyPr rtlCol="0" anchor="ctr"/>
+          <a:lstStyle/>
+          <a:p>
+            <a:pPr algn="ctr"/>
+            <a:r>
+              <a:rPr lang="en-US" dirty="0"/>
+              <a:t>1</a:t>
+            </a:r>
+          </a:p>
+        </p:txBody>
+      </p:sp>
+      <p:sp>
+        <p:nvSpPr>
+          <p:cNvPr id="82" name="Oval 81">
+            <a:extLst>
+              <a:ext uri="{FF2B5EF4-FFF2-40B4-BE49-F238E27FC236}">
+                <a16:creationId xmlns:a16="http://schemas.microsoft.com/office/drawing/2014/main" id="{31B91EF2-0EF9-9F31-F14B-4475E1E9BDC6}"/>
+              </a:ext>
+            </a:extLst>
+          </p:cNvPr>
+          <p:cNvSpPr/>
+          <p:nvPr/>
+        </p:nvSpPr>
+        <p:spPr>
+          <a:xfrm>
+            <a:off x="5106096" y="2437809"/>
+            <a:ext cx="226016" cy="220337"/>
+          </a:xfrm>
+          <a:prstGeom prst="ellipse">
+            <a:avLst/>
+          </a:prstGeom>
+        </p:spPr>
+        <p:style>
+          <a:lnRef idx="2">
+            <a:schemeClr val="dk1">
+              <a:shade val="15000"/>
+            </a:schemeClr>
+          </a:lnRef>
+          <a:fillRef idx="1">
+            <a:schemeClr val="dk1"/>
+          </a:fillRef>
+          <a:effectRef idx="0">
+            <a:schemeClr val="dk1"/>
+          </a:effectRef>
+          <a:fontRef idx="minor">
+            <a:schemeClr val="lt1"/>
+          </a:fontRef>
+        </p:style>
+        <p:txBody>
+          <a:bodyPr rtlCol="0" anchor="ctr"/>
+          <a:lstStyle/>
+          <a:p>
+            <a:pPr algn="ctr"/>
+            <a:r>
+              <a:rPr lang="en-US" dirty="0"/>
+              <a:t>2</a:t>
+            </a:r>
+          </a:p>
+        </p:txBody>
+      </p:sp>
+      <p:sp>
+        <p:nvSpPr>
+          <p:cNvPr id="83" name="Oval 82">
+            <a:extLst>
+              <a:ext uri="{FF2B5EF4-FFF2-40B4-BE49-F238E27FC236}">
+                <a16:creationId xmlns:a16="http://schemas.microsoft.com/office/drawing/2014/main" id="{C408CD6E-C519-DED9-A24D-8649A49AF36F}"/>
+              </a:ext>
+            </a:extLst>
+          </p:cNvPr>
+          <p:cNvSpPr/>
+          <p:nvPr/>
+        </p:nvSpPr>
+        <p:spPr>
+          <a:xfrm>
+            <a:off x="3217874" y="2645787"/>
+            <a:ext cx="226016" cy="220337"/>
+          </a:xfrm>
+          <a:prstGeom prst="ellipse">
+            <a:avLst/>
+          </a:prstGeom>
+        </p:spPr>
+        <p:style>
+          <a:lnRef idx="2">
+            <a:schemeClr val="dk1">
+              <a:shade val="15000"/>
+            </a:schemeClr>
+          </a:lnRef>
+          <a:fillRef idx="1">
+            <a:schemeClr val="dk1"/>
+          </a:fillRef>
+          <a:effectRef idx="0">
+            <a:schemeClr val="dk1"/>
+          </a:effectRef>
+          <a:fontRef idx="minor">
+            <a:schemeClr val="lt1"/>
+          </a:fontRef>
+        </p:style>
+        <p:txBody>
+          <a:bodyPr rtlCol="0" anchor="ctr"/>
+          <a:lstStyle/>
+          <a:p>
+            <a:pPr algn="ctr"/>
+            <a:r>
+              <a:rPr lang="en-US" dirty="0"/>
+              <a:t>3</a:t>
+            </a:r>
+          </a:p>
+        </p:txBody>
+      </p:sp>
+      <p:sp>
+        <p:nvSpPr>
+          <p:cNvPr id="84" name="Oval 83">
+            <a:extLst>
+              <a:ext uri="{FF2B5EF4-FFF2-40B4-BE49-F238E27FC236}">
+                <a16:creationId xmlns:a16="http://schemas.microsoft.com/office/drawing/2014/main" id="{2ACC09A3-ED62-2970-469F-6B0CBC5C57F2}"/>
+              </a:ext>
+            </a:extLst>
+          </p:cNvPr>
+          <p:cNvSpPr/>
+          <p:nvPr/>
+        </p:nvSpPr>
+        <p:spPr>
+          <a:xfrm>
+            <a:off x="4031857" y="3105556"/>
+            <a:ext cx="226016" cy="220337"/>
+          </a:xfrm>
+          <a:prstGeom prst="ellipse">
+            <a:avLst/>
+          </a:prstGeom>
+        </p:spPr>
+        <p:style>
+          <a:lnRef idx="2">
+            <a:schemeClr val="dk1">
+              <a:shade val="15000"/>
+            </a:schemeClr>
+          </a:lnRef>
+          <a:fillRef idx="1">
+            <a:schemeClr val="dk1"/>
+          </a:fillRef>
+          <a:effectRef idx="0">
+            <a:schemeClr val="dk1"/>
+          </a:effectRef>
+          <a:fontRef idx="minor">
+            <a:schemeClr val="lt1"/>
+          </a:fontRef>
+        </p:style>
+        <p:txBody>
+          <a:bodyPr rtlCol="0" anchor="ctr"/>
+          <a:lstStyle/>
+          <a:p>
+            <a:pPr algn="ctr"/>
+            <a:r>
+              <a:rPr lang="en-US" dirty="0"/>
+              <a:t>4</a:t>
+            </a:r>
+          </a:p>
+        </p:txBody>
+      </p:sp>
+      <p:sp>
+        <p:nvSpPr>
+          <p:cNvPr id="85" name="Oval 84">
+            <a:extLst>
+              <a:ext uri="{FF2B5EF4-FFF2-40B4-BE49-F238E27FC236}">
+                <a16:creationId xmlns:a16="http://schemas.microsoft.com/office/drawing/2014/main" id="{9BD497A8-D1F9-1B62-0D83-E3B4974D06FC}"/>
+              </a:ext>
+            </a:extLst>
+          </p:cNvPr>
+          <p:cNvSpPr/>
+          <p:nvPr/>
+        </p:nvSpPr>
+        <p:spPr>
+          <a:xfrm>
+            <a:off x="4558935" y="3513917"/>
+            <a:ext cx="226016" cy="220337"/>
+          </a:xfrm>
+          <a:prstGeom prst="ellipse">
+            <a:avLst/>
+          </a:prstGeom>
+        </p:spPr>
+        <p:style>
+          <a:lnRef idx="2">
+            <a:schemeClr val="dk1">
+              <a:shade val="15000"/>
+            </a:schemeClr>
+          </a:lnRef>
+          <a:fillRef idx="1">
+            <a:schemeClr val="dk1"/>
+          </a:fillRef>
+          <a:effectRef idx="0">
+            <a:schemeClr val="dk1"/>
+          </a:effectRef>
+          <a:fontRef idx="minor">
+            <a:schemeClr val="lt1"/>
+          </a:fontRef>
+        </p:style>
+        <p:txBody>
+          <a:bodyPr rtlCol="0" anchor="ctr"/>
+          <a:lstStyle/>
+          <a:p>
+            <a:pPr algn="ctr"/>
+            <a:r>
+              <a:rPr lang="en-US" dirty="0"/>
+              <a:t>5</a:t>
+            </a:r>
+          </a:p>
+        </p:txBody>
+      </p:sp>
+      <p:sp>
+        <p:nvSpPr>
+          <p:cNvPr id="87" name="Oval 86">
+            <a:extLst>
+              <a:ext uri="{FF2B5EF4-FFF2-40B4-BE49-F238E27FC236}">
+                <a16:creationId xmlns:a16="http://schemas.microsoft.com/office/drawing/2014/main" id="{3324AD5E-EFE5-3889-8733-7FB76BCD35AC}"/>
+              </a:ext>
+            </a:extLst>
+          </p:cNvPr>
+          <p:cNvSpPr/>
+          <p:nvPr/>
+        </p:nvSpPr>
+        <p:spPr>
+          <a:xfrm>
+            <a:off x="5195735" y="4348247"/>
+            <a:ext cx="226016" cy="220337"/>
+          </a:xfrm>
+          <a:prstGeom prst="ellipse">
+            <a:avLst/>
+          </a:prstGeom>
+        </p:spPr>
+        <p:style>
+          <a:lnRef idx="2">
+            <a:schemeClr val="dk1">
+              <a:shade val="15000"/>
+            </a:schemeClr>
+          </a:lnRef>
+          <a:fillRef idx="1">
+            <a:schemeClr val="dk1"/>
+          </a:fillRef>
+          <a:effectRef idx="0">
+            <a:schemeClr val="dk1"/>
+          </a:effectRef>
+          <a:fontRef idx="minor">
+            <a:schemeClr val="lt1"/>
+          </a:fontRef>
+        </p:style>
+        <p:txBody>
+          <a:bodyPr rtlCol="0" anchor="ctr"/>
+          <a:lstStyle/>
+          <a:p>
+            <a:pPr algn="ctr"/>
+            <a:r>
+              <a:rPr lang="en-US" dirty="0"/>
+              <a:t>7</a:t>
+            </a:r>
+          </a:p>
+        </p:txBody>
+      </p:sp>
+      <p:sp>
+        <p:nvSpPr>
+          <p:cNvPr id="88" name="Oval 87">
+            <a:extLst>
+              <a:ext uri="{FF2B5EF4-FFF2-40B4-BE49-F238E27FC236}">
+                <a16:creationId xmlns:a16="http://schemas.microsoft.com/office/drawing/2014/main" id="{A05601D1-B24E-F029-8A4C-8D72BFDD1C00}"/>
+              </a:ext>
+            </a:extLst>
+          </p:cNvPr>
+          <p:cNvSpPr/>
+          <p:nvPr/>
+        </p:nvSpPr>
+        <p:spPr>
+          <a:xfrm>
+            <a:off x="6152836" y="3818197"/>
+            <a:ext cx="226016" cy="220337"/>
+          </a:xfrm>
+          <a:prstGeom prst="ellipse">
+            <a:avLst/>
+          </a:prstGeom>
+        </p:spPr>
+        <p:style>
+          <a:lnRef idx="2">
+            <a:schemeClr val="dk1">
+              <a:shade val="15000"/>
+            </a:schemeClr>
+          </a:lnRef>
+          <a:fillRef idx="1">
+            <a:schemeClr val="dk1"/>
+          </a:fillRef>
+          <a:effectRef idx="0">
+            <a:schemeClr val="dk1"/>
+          </a:effectRef>
+          <a:fontRef idx="minor">
+            <a:schemeClr val="lt1"/>
+          </a:fontRef>
+        </p:style>
+        <p:txBody>
+          <a:bodyPr rtlCol="0" anchor="ctr"/>
+          <a:lstStyle/>
+          <a:p>
+            <a:pPr algn="ctr"/>
+            <a:r>
+              <a:rPr lang="en-US" dirty="0"/>
+              <a:t>8</a:t>
+            </a:r>
+          </a:p>
+        </p:txBody>
+      </p:sp>
+      <p:sp>
+        <p:nvSpPr>
+          <p:cNvPr id="89" name="Oval 88">
+            <a:extLst>
+              <a:ext uri="{FF2B5EF4-FFF2-40B4-BE49-F238E27FC236}">
+                <a16:creationId xmlns:a16="http://schemas.microsoft.com/office/drawing/2014/main" id="{1485C878-66BC-7F6E-C44C-E30120240741}"/>
+              </a:ext>
+            </a:extLst>
+          </p:cNvPr>
+          <p:cNvSpPr/>
+          <p:nvPr/>
+        </p:nvSpPr>
+        <p:spPr>
+          <a:xfrm>
+            <a:off x="6106865" y="2993334"/>
+            <a:ext cx="226016" cy="220337"/>
+          </a:xfrm>
+          <a:prstGeom prst="ellipse">
+            <a:avLst/>
+          </a:prstGeom>
+        </p:spPr>
+        <p:style>
+          <a:lnRef idx="2">
+            <a:schemeClr val="dk1">
+              <a:shade val="15000"/>
+            </a:schemeClr>
+          </a:lnRef>
+          <a:fillRef idx="1">
+            <a:schemeClr val="dk1"/>
+          </a:fillRef>
+          <a:effectRef idx="0">
+            <a:schemeClr val="dk1"/>
+          </a:effectRef>
+          <a:fontRef idx="minor">
+            <a:schemeClr val="lt1"/>
+          </a:fontRef>
+        </p:style>
+        <p:txBody>
+          <a:bodyPr rtlCol="0" anchor="ctr"/>
+          <a:lstStyle/>
+          <a:p>
+            <a:pPr algn="ctr"/>
+            <a:r>
+              <a:rPr lang="en-US" dirty="0"/>
+              <a:t>9</a:t>
             </a:r>
           </a:p>
         </p:txBody>
       </p:sp>
       <p:cxnSp>
         <p:nvCxnSpPr>
-          <p:cNvPr id="58" name="Straight Arrow Connector 57">
-            <a:extLst>
-              <a:ext uri="{FF2B5EF4-FFF2-40B4-BE49-F238E27FC236}">
-                <a16:creationId xmlns:a16="http://schemas.microsoft.com/office/drawing/2014/main" id="{24E7875F-6006-1E41-1EE8-E458CED1C809}"/>
+          <p:cNvPr id="91" name="Curved Connector 90">
+            <a:extLst>
+              <a:ext uri="{FF2B5EF4-FFF2-40B4-BE49-F238E27FC236}">
+                <a16:creationId xmlns:a16="http://schemas.microsoft.com/office/drawing/2014/main" id="{A1436FAD-6697-6CBD-D161-3EE3A3D5BBF0}"/>
               </a:ext>
             </a:extLst>
           </p:cNvPr>
           <p:cNvCxnSpPr>
             <a:cxnSpLocks/>
-            <a:endCxn id="2" idx="3"/>
+            <a:stCxn id="19" idx="4"/>
+            <a:endCxn id="23" idx="2"/>
           </p:cNvCxnSpPr>
           <p:nvPr/>
         </p:nvCxnSpPr>
         <p:spPr>
-          <a:xfrm flipV="1">
-            <a:off x="7004114" y="4728694"/>
-            <a:ext cx="0" cy="126069"/>
-          </a:xfrm>
-          <a:prstGeom prst="straightConnector1">
+          <a:xfrm>
+            <a:off x="4347348" y="3624224"/>
+            <a:ext cx="351996" cy="173112"/>
+          </a:xfrm>
+          <a:prstGeom prst="curvedConnector3">
             <a:avLst/>
           </a:prstGeom>
           <a:ln w="19050" cap="flat" cmpd="sng" algn="ctr">
@@ -6448,7 +6604,7 @@
             </a:solidFill>
             <a:prstDash val="solid"/>
             <a:round/>
-            <a:headEnd type="none" w="med" len="med"/>
+            <a:headEnd type="arrow" w="med" len="med"/>
             <a:tailEnd type="arrow" w="med" len="med"/>
           </a:ln>
         </p:spPr>
@@ -6469,24 +6625,25 @@
       </p:cxnSp>
       <p:cxnSp>
         <p:nvCxnSpPr>
-          <p:cNvPr id="60" name="Straight Arrow Connector 59">
-            <a:extLst>
-              <a:ext uri="{FF2B5EF4-FFF2-40B4-BE49-F238E27FC236}">
-                <a16:creationId xmlns:a16="http://schemas.microsoft.com/office/drawing/2014/main" id="{AFFB7350-A293-772D-8343-BE0EA6925048}"/>
+          <p:cNvPr id="93" name="Curved Connector 92">
+            <a:extLst>
+              <a:ext uri="{FF2B5EF4-FFF2-40B4-BE49-F238E27FC236}">
+                <a16:creationId xmlns:a16="http://schemas.microsoft.com/office/drawing/2014/main" id="{05FE88D3-E61A-56B9-8D41-60A65971E56B}"/>
               </a:ext>
             </a:extLst>
           </p:cNvPr>
           <p:cNvCxnSpPr>
             <a:cxnSpLocks/>
+            <a:stCxn id="19" idx="5"/>
           </p:cNvCxnSpPr>
           <p:nvPr/>
         </p:nvCxnSpPr>
         <p:spPr>
           <a:xfrm flipV="1">
-            <a:off x="6993742" y="2674593"/>
-            <a:ext cx="0" cy="175056"/>
-          </a:xfrm>
-          <a:prstGeom prst="straightConnector1">
+            <a:off x="4519562" y="2304732"/>
+            <a:ext cx="368634" cy="1147278"/>
+          </a:xfrm>
+          <a:prstGeom prst="curvedConnector2">
             <a:avLst/>
           </a:prstGeom>
           <a:ln w="19050" cap="flat" cmpd="sng" algn="ctr">
@@ -6495,7 +6652,7 @@
             </a:solidFill>
             <a:prstDash val="solid"/>
             <a:round/>
-            <a:headEnd type="none" w="med" len="med"/>
+            <a:headEnd type="arrow" w="med" len="med"/>
             <a:tailEnd type="arrow" w="med" len="med"/>
           </a:ln>
         </p:spPr>
@@ -6514,299 +6671,55 @@
           </a:fontRef>
         </p:style>
       </p:cxnSp>
-      <p:cxnSp>
-        <p:nvCxnSpPr>
-          <p:cNvPr id="62" name="Straight Arrow Connector 61">
-            <a:extLst>
-              <a:ext uri="{FF2B5EF4-FFF2-40B4-BE49-F238E27FC236}">
-                <a16:creationId xmlns:a16="http://schemas.microsoft.com/office/drawing/2014/main" id="{CC5161DC-60D0-2D3A-18B4-D94D2054BEE4}"/>
-              </a:ext>
-            </a:extLst>
-          </p:cNvPr>
-          <p:cNvCxnSpPr>
-            <a:cxnSpLocks/>
-            <a:endCxn id="5" idx="3"/>
-          </p:cNvCxnSpPr>
+      <p:sp>
+        <p:nvSpPr>
+          <p:cNvPr id="94" name="Oval 93">
+            <a:extLst>
+              <a:ext uri="{FF2B5EF4-FFF2-40B4-BE49-F238E27FC236}">
+                <a16:creationId xmlns:a16="http://schemas.microsoft.com/office/drawing/2014/main" id="{A493AEA1-F7C2-3462-DCBE-1FADCEE2E69C}"/>
+              </a:ext>
+            </a:extLst>
+          </p:cNvPr>
+          <p:cNvSpPr/>
           <p:nvPr/>
-        </p:nvCxnSpPr>
+        </p:nvSpPr>
         <p:spPr>
-          <a:xfrm flipV="1">
-            <a:off x="6992736" y="1841852"/>
-            <a:ext cx="1006" cy="227830"/>
-          </a:xfrm>
-          <a:prstGeom prst="straightConnector1">
+          <a:xfrm>
+            <a:off x="4813048" y="2907748"/>
+            <a:ext cx="226016" cy="220337"/>
+          </a:xfrm>
+          <a:prstGeom prst="ellipse">
             <a:avLst/>
           </a:prstGeom>
-          <a:ln w="19050" cap="flat" cmpd="sng" algn="ctr">
-            <a:solidFill>
-              <a:schemeClr val="dk1"/>
-            </a:solidFill>
-            <a:prstDash val="solid"/>
-            <a:round/>
-            <a:headEnd type="none" w="med" len="med"/>
-            <a:tailEnd type="arrow" w="med" len="med"/>
-          </a:ln>
         </p:spPr>
         <p:style>
-          <a:lnRef idx="0">
-            <a:scrgbClr r="0" g="0" b="0"/>
+          <a:lnRef idx="2">
+            <a:schemeClr val="dk1">
+              <a:shade val="15000"/>
+            </a:schemeClr>
           </a:lnRef>
-          <a:fillRef idx="0">
-            <a:scrgbClr r="0" g="0" b="0"/>
+          <a:fillRef idx="1">
+            <a:schemeClr val="dk1"/>
           </a:fillRef>
           <a:effectRef idx="0">
-            <a:scrgbClr r="0" g="0" b="0"/>
+            <a:schemeClr val="dk1"/>
           </a:effectRef>
           <a:fontRef idx="minor">
-            <a:schemeClr val="tx1"/>
+            <a:schemeClr val="lt1"/>
           </a:fontRef>
         </p:style>
-      </p:cxnSp>
-      <p:cxnSp>
-        <p:nvCxnSpPr>
-          <p:cNvPr id="66" name="Curved Connector 65">
-            <a:extLst>
-              <a:ext uri="{FF2B5EF4-FFF2-40B4-BE49-F238E27FC236}">
-                <a16:creationId xmlns:a16="http://schemas.microsoft.com/office/drawing/2014/main" id="{386F515B-033C-2D9A-70BC-6F54A389709E}"/>
-              </a:ext>
-            </a:extLst>
-          </p:cNvPr>
-          <p:cNvCxnSpPr>
-            <a:cxnSpLocks/>
-            <a:stCxn id="5" idx="1"/>
-          </p:cNvCxnSpPr>
-          <p:nvPr/>
-        </p:nvCxnSpPr>
-        <p:spPr>
-          <a:xfrm rot="16200000" flipH="1">
-            <a:off x="7415711" y="918656"/>
-            <a:ext cx="137203" cy="981143"/>
-          </a:xfrm>
-          <a:prstGeom prst="curvedConnector4">
-            <a:avLst>
-              <a:gd name="adj1" fmla="val -47732"/>
-              <a:gd name="adj2" fmla="val 80856"/>
-            </a:avLst>
-          </a:prstGeom>
-          <a:ln w="19050" cap="flat" cmpd="sng" algn="ctr">
-            <a:solidFill>
-              <a:schemeClr val="dk1"/>
-            </a:solidFill>
-            <a:prstDash val="solid"/>
-            <a:round/>
-            <a:headEnd type="none" w="med" len="med"/>
-            <a:tailEnd type="arrow" w="med" len="med"/>
-          </a:ln>
-        </p:spPr>
-        <p:style>
-          <a:lnRef idx="0">
-            <a:scrgbClr r="0" g="0" b="0"/>
-          </a:lnRef>
-          <a:fillRef idx="0">
-            <a:scrgbClr r="0" g="0" b="0"/>
-          </a:fillRef>
-          <a:effectRef idx="0">
-            <a:scrgbClr r="0" g="0" b="0"/>
-          </a:effectRef>
-          <a:fontRef idx="minor">
-            <a:schemeClr val="tx1"/>
-          </a:fontRef>
-        </p:style>
-      </p:cxnSp>
-      <p:cxnSp>
-        <p:nvCxnSpPr>
-          <p:cNvPr id="71" name="Straight Arrow Connector 70">
-            <a:extLst>
-              <a:ext uri="{FF2B5EF4-FFF2-40B4-BE49-F238E27FC236}">
-                <a16:creationId xmlns:a16="http://schemas.microsoft.com/office/drawing/2014/main" id="{22EC83A1-E995-8348-B36A-6D214ECD7291}"/>
-              </a:ext>
-            </a:extLst>
-          </p:cNvPr>
-          <p:cNvCxnSpPr>
-            <a:cxnSpLocks/>
-            <a:stCxn id="33" idx="3"/>
-            <a:endCxn id="63" idx="1"/>
-          </p:cNvCxnSpPr>
-          <p:nvPr/>
-        </p:nvCxnSpPr>
-        <p:spPr>
-          <a:xfrm flipH="1">
-            <a:off x="8651514" y="2993334"/>
-            <a:ext cx="157" cy="182012"/>
-          </a:xfrm>
-          <a:prstGeom prst="straightConnector1">
-            <a:avLst/>
-          </a:prstGeom>
-          <a:ln w="19050" cap="flat" cmpd="sng" algn="ctr">
-            <a:solidFill>
-              <a:schemeClr val="dk1"/>
-            </a:solidFill>
-            <a:prstDash val="solid"/>
-            <a:round/>
-            <a:headEnd type="none" w="med" len="med"/>
-            <a:tailEnd type="arrow" w="med" len="med"/>
-          </a:ln>
-        </p:spPr>
-        <p:style>
-          <a:lnRef idx="0">
-            <a:scrgbClr r="0" g="0" b="0"/>
-          </a:lnRef>
-          <a:fillRef idx="0">
-            <a:scrgbClr r="0" g="0" b="0"/>
-          </a:fillRef>
-          <a:effectRef idx="0">
-            <a:scrgbClr r="0" g="0" b="0"/>
-          </a:effectRef>
-          <a:fontRef idx="minor">
-            <a:schemeClr val="tx1"/>
-          </a:fontRef>
-        </p:style>
-      </p:cxnSp>
-      <p:cxnSp>
-        <p:nvCxnSpPr>
-          <p:cNvPr id="74" name="Straight Arrow Connector 73">
-            <a:extLst>
-              <a:ext uri="{FF2B5EF4-FFF2-40B4-BE49-F238E27FC236}">
-                <a16:creationId xmlns:a16="http://schemas.microsoft.com/office/drawing/2014/main" id="{FE723C18-41DA-7359-B29C-BE6342059DC6}"/>
-              </a:ext>
-            </a:extLst>
-          </p:cNvPr>
-          <p:cNvCxnSpPr>
-            <a:cxnSpLocks/>
-            <a:stCxn id="63" idx="3"/>
-            <a:endCxn id="26" idx="1"/>
-          </p:cNvCxnSpPr>
-          <p:nvPr/>
-        </p:nvCxnSpPr>
-        <p:spPr>
-          <a:xfrm>
-            <a:off x="8651514" y="3715673"/>
-            <a:ext cx="634" cy="242847"/>
-          </a:xfrm>
-          <a:prstGeom prst="straightConnector1">
-            <a:avLst/>
-          </a:prstGeom>
-          <a:ln w="19050" cap="flat" cmpd="sng" algn="ctr">
-            <a:solidFill>
-              <a:schemeClr val="dk1"/>
-            </a:solidFill>
-            <a:prstDash val="solid"/>
-            <a:round/>
-            <a:headEnd type="none" w="med" len="med"/>
-            <a:tailEnd type="arrow" w="med" len="med"/>
-          </a:ln>
-        </p:spPr>
-        <p:style>
-          <a:lnRef idx="0">
-            <a:scrgbClr r="0" g="0" b="0"/>
-          </a:lnRef>
-          <a:fillRef idx="0">
-            <a:scrgbClr r="0" g="0" b="0"/>
-          </a:fillRef>
-          <a:effectRef idx="0">
-            <a:scrgbClr r="0" g="0" b="0"/>
-          </a:effectRef>
-          <a:fontRef idx="minor">
-            <a:schemeClr val="tx1"/>
-          </a:fontRef>
-        </p:style>
-      </p:cxnSp>
-      <p:sp>
-        <p:nvSpPr>
-          <p:cNvPr id="77" name="TextBox 76">
-            <a:extLst>
-              <a:ext uri="{FF2B5EF4-FFF2-40B4-BE49-F238E27FC236}">
-                <a16:creationId xmlns:a16="http://schemas.microsoft.com/office/drawing/2014/main" id="{83F1ACD5-E9DF-B7BB-C1C4-8D07CC47DA5B}"/>
-              </a:ext>
-            </a:extLst>
-          </p:cNvPr>
-          <p:cNvSpPr txBox="1"/>
-          <p:nvPr/>
-        </p:nvSpPr>
-        <p:spPr>
-          <a:xfrm>
-            <a:off x="230686" y="4606626"/>
-            <a:ext cx="1868460" cy="584775"/>
-          </a:xfrm>
-          <a:prstGeom prst="rect">
-            <a:avLst/>
-          </a:prstGeom>
-          <a:noFill/>
-        </p:spPr>
-        <p:txBody>
-          <a:bodyPr wrap="none" rtlCol="0">
-            <a:spAutoFit/>
-          </a:bodyPr>
-          <a:lstStyle/>
-          <a:p>
-            <a:r>
-              <a:rPr lang="en-US" sz="1600" dirty="0">
-                <a:latin typeface="Centaur" panose="02030504050205020304" pitchFamily="18" charset="77"/>
-              </a:rPr>
-              <a:t>All stores &amp; DB uses</a:t>
-            </a:r>
-            <a:br>
-              <a:rPr lang="en-US" sz="1600" dirty="0">
-                <a:latin typeface="Centaur" panose="02030504050205020304" pitchFamily="18" charset="77"/>
-              </a:rPr>
-            </a:br>
-            <a:r>
-              <a:rPr lang="en-US" sz="1600" dirty="0">
-                <a:latin typeface="Centaur" panose="02030504050205020304" pitchFamily="18" charset="77"/>
-              </a:rPr>
-              <a:t>levelDB storage library</a:t>
-            </a:r>
-          </a:p>
-        </p:txBody>
-      </p:sp>
-      <p:cxnSp>
-        <p:nvCxnSpPr>
-          <p:cNvPr id="86" name="Straight Arrow Connector 85">
-            <a:extLst>
-              <a:ext uri="{FF2B5EF4-FFF2-40B4-BE49-F238E27FC236}">
-                <a16:creationId xmlns:a16="http://schemas.microsoft.com/office/drawing/2014/main" id="{B79D2ED4-2B32-EB41-6D99-A08FFEFDCDBF}"/>
-              </a:ext>
-            </a:extLst>
-          </p:cNvPr>
-          <p:cNvCxnSpPr>
-            <a:cxnSpLocks/>
-            <a:endCxn id="17" idx="1"/>
-          </p:cNvCxnSpPr>
-          <p:nvPr/>
-        </p:nvCxnSpPr>
-        <p:spPr>
-          <a:xfrm>
-            <a:off x="3369445" y="2910616"/>
-            <a:ext cx="150164" cy="0"/>
-          </a:xfrm>
-          <a:prstGeom prst="straightConnector1">
-            <a:avLst/>
-          </a:prstGeom>
-          <a:ln w="19050" cap="flat" cmpd="sng" algn="ctr">
-            <a:solidFill>
-              <a:schemeClr val="dk1"/>
-            </a:solidFill>
-            <a:prstDash val="solid"/>
-            <a:round/>
-            <a:headEnd type="none" w="med" len="med"/>
-            <a:tailEnd type="arrow" w="med" len="med"/>
-          </a:ln>
-        </p:spPr>
-        <p:style>
-          <a:lnRef idx="0">
-            <a:scrgbClr r="0" g="0" b="0"/>
-          </a:lnRef>
-          <a:fillRef idx="0">
-            <a:scrgbClr r="0" g="0" b="0"/>
-          </a:fillRef>
-          <a:effectRef idx="0">
-            <a:scrgbClr r="0" g="0" b="0"/>
-          </a:effectRef>
-          <a:fontRef idx="minor">
-            <a:schemeClr val="tx1"/>
-          </a:fontRef>
-        </p:style>
-      </p:cxnSp>
+        <p:txBody>
+          <a:bodyPr rtlCol="0" anchor="ctr"/>
+          <a:lstStyle/>
+          <a:p>
+            <a:pPr algn="ctr"/>
+            <a:r>
+              <a:rPr lang="en-US" dirty="0"/>
+              <a:t>6</a:t>
+            </a:r>
+          </a:p>
+        </p:txBody>
+      </p:sp>
     </p:spTree>
     <p:extLst>
       <p:ext uri="{BB962C8B-B14F-4D97-AF65-F5344CB8AC3E}">
